--- a/proof-to-pipeline/deck/EAIO_TriadSynergy_Deck_V1.pptx
+++ b/proof-to-pipeline/deck/EAIO_TriadSynergy_Deck_V1.pptx
@@ -8139,82 +8139,33 @@
           <a:ln/>
         </p:spPr>
       </p:sp>
-      <p:sp>
-        <p:nvSpPr>
-          <p:cNvPr id="8" name="Text 6"/>
-          <p:cNvSpPr/>
-          <p:nvPr/>
-        </p:nvSpPr>
-        <p:spPr>
-          <a:xfrm>
-            <a:off x="6400800" y="1325880"/>
-            <a:ext cx="2103120" cy="1737360"/>
-          </a:xfrm>
-          <a:prstGeom prst="rect">
-            <a:avLst/>
-          </a:prstGeom>
-          <a:noFill/>
-          <a:ln/>
-        </p:spPr>
-        <p:txBody>
-          <a:bodyPr wrap="square" rtlCol="0" anchor="ctr"/>
-          <a:lstStyle/>
-          <a:p>
-            <a:pPr algn="ctr" indent="0" marL="0">
-              <a:buNone/>
-            </a:pPr>
-            <a:r>
-              <a:rPr lang="en-US" sz="1200" b="1" dirty="0">
-                <a:solidFill>
-                  <a:srgbClr val="1F3A4D"/>
-                </a:solidFill>
-                <a:latin typeface="Calibri" pitchFamily="34" charset="0"/>
-                <a:ea typeface="Calibri" pitchFamily="34" charset="-122"/>
-                <a:cs typeface="Calibri" pitchFamily="34" charset="-120"/>
-              </a:rPr>
-              <a:t>QR</a:t>
-            </a:r>
-            <a:endParaRPr lang="en-US" sz="1200" dirty="0"/>
-          </a:p>
-          <a:p>
-            <a:pPr algn="ctr" indent="0" marL="0">
-              <a:buNone/>
-            </a:pPr>
-            <a:r>
-              <a:rPr lang="en-US" sz="1200" b="1" dirty="0">
-                <a:solidFill>
-                  <a:srgbClr val="1F3A4D"/>
-                </a:solidFill>
-                <a:latin typeface="Calibri" pitchFamily="34" charset="0"/>
-                <a:ea typeface="Calibri" pitchFamily="34" charset="-122"/>
-                <a:cs typeface="Calibri" pitchFamily="34" charset="-120"/>
-              </a:rPr>
-              <a:t>(form link —</a:t>
-            </a:r>
-            <a:endParaRPr lang="en-US" sz="1200" dirty="0"/>
-          </a:p>
-          <a:p>
-            <a:pPr algn="ctr" indent="0" marL="0">
-              <a:buNone/>
-            </a:pPr>
-            <a:r>
-              <a:rPr lang="en-US" sz="1200" b="1" dirty="0">
-                <a:solidFill>
-                  <a:srgbClr val="1F3A4D"/>
-                </a:solidFill>
-                <a:latin typeface="Calibri" pitchFamily="34" charset="0"/>
-                <a:ea typeface="Calibri" pitchFamily="34" charset="-122"/>
-                <a:cs typeface="Calibri" pitchFamily="34" charset="-120"/>
-              </a:rPr>
-              <a:t>also in chat)</a:t>
-            </a:r>
-            <a:endParaRPr lang="en-US" sz="1200" dirty="0"/>
-          </a:p>
-        </p:txBody>
-      </p:sp>
-      <p:sp>
-        <p:nvSpPr>
-          <p:cNvPr id="9" name="Text 7"/>
+      <p:pic>
+        <p:nvPicPr>
+          <p:cNvPr id="8" name="Image 0" descr="/home/user/agnt-neo/proof-to-pipeline/deck/form_qr.png">    </p:cNvPr>
+          <p:cNvPicPr>
+            <a:picLocks noChangeAspect="1"/>
+          </p:cNvPicPr>
+          <p:nvPr/>
+        </p:nvPicPr>
+        <p:blipFill>
+          <a:blip r:embed="rId1"/>
+          <a:stretch>
+            <a:fillRect/>
+          </a:stretch>
+        </p:blipFill>
+        <p:spPr>
+          <a:xfrm>
+            <a:off x="6556248" y="1371600"/>
+            <a:ext cx="1645920" cy="1645920"/>
+          </a:xfrm>
+          <a:prstGeom prst="rect">
+            <a:avLst/>
+          </a:prstGeom>
+        </p:spPr>
+      </p:pic>
+      <p:sp>
+        <p:nvSpPr>
+          <p:cNvPr id="9" name="Text 6"/>
           <p:cNvSpPr/>
           <p:nvPr/>
         </p:nvSpPr>
@@ -8267,7 +8218,7 @@
       </p:sp>
       <p:sp>
         <p:nvSpPr>
-          <p:cNvPr id="10" name="Text 8"/>
+          <p:cNvPr id="10" name="Text 7"/>
           <p:cNvSpPr/>
           <p:nvPr/>
         </p:nvSpPr>
@@ -8306,7 +8257,7 @@
       </p:sp>
       <p:sp>
         <p:nvSpPr>
-          <p:cNvPr id="11" name="Text 9"/>
+          <p:cNvPr id="11" name="Text 8"/>
           <p:cNvSpPr/>
           <p:nvPr/>
         </p:nvSpPr>
@@ -8345,7 +8296,7 @@
       </p:sp>
       <p:sp>
         <p:nvSpPr>
-          <p:cNvPr id="12" name="Text 10"/>
+          <p:cNvPr id="12" name="Text 9"/>
           <p:cNvSpPr/>
           <p:nvPr/>
         </p:nvSpPr>

--- a/proof-to-pipeline/deck/EAIO_TriadSynergy_Deck_V1.pptx
+++ b/proof-to-pipeline/deck/EAIO_TriadSynergy_Deck_V1.pptx
@@ -14,9 +14,10 @@
     <p:sldId id="262" r:id="rId8"/>
     <p:sldId id="263" r:id="rId9"/>
     <p:sldId id="264" r:id="rId10"/>
+    <p:sldId id="265" r:id="rId11"/>
   </p:sldIdLst>
   <p:notesMasterIdLst>
-    <p:notesMasterId r:id="rId11"/>
+    <p:notesMasterId r:id="rId12"/>
   </p:notesMasterIdLst>
   <p:sldSz cx="9144000" cy="5143500"/>
   <p:notesSz cx="5143500" cy="9144000"/>
@@ -552,6 +553,94 @@
 </p:notes>
 </file>
 
+<file path=ppt/notesSlides/notesSlide10.xml><?xml version="1.0" encoding="utf-8"?>
+<p:notes xmlns:a="http://schemas.openxmlformats.org/drawingml/2006/main" xmlns:r="http://schemas.openxmlformats.org/officeDocument/2006/relationships" xmlns:p="http://schemas.openxmlformats.org/presentationml/2006/main">
+  <p:cSld>
+    <p:spTree>
+      <p:nvGrpSpPr>
+        <p:cNvPr id="1" name=""/>
+        <p:cNvGrpSpPr/>
+        <p:nvPr/>
+      </p:nvGrpSpPr>
+      <p:grpSpPr>
+        <a:xfrm>
+          <a:off x="0" y="0"/>
+          <a:ext cx="0" cy="0"/>
+          <a:chOff x="0" y="0"/>
+          <a:chExt cx="0" cy="0"/>
+        </a:xfrm>
+      </p:grpSpPr>
+      <p:sp>
+        <p:nvSpPr>
+          <p:cNvPr id="2" name="Slide Image Placeholder 1"/>
+          <p:cNvSpPr>
+            <a:spLocks noGrp="1" noRot="1" noChangeAspect="1"/>
+          </p:cNvSpPr>
+          <p:nvPr>
+            <p:ph type="sldImg"/>
+          </p:nvPr>
+        </p:nvSpPr>
+        <p:spPr/>
+      </p:sp>
+      <p:sp>
+        <p:nvSpPr>
+          <p:cNvPr id="3" name="Notes Placeholder 2"/>
+          <p:cNvSpPr>
+            <a:spLocks noGrp="1"/>
+          </p:cNvSpPr>
+          <p:nvPr>
+            <p:ph type="body" idx="1"/>
+          </p:nvPr>
+        </p:nvSpPr>
+        <p:spPr/>
+        <p:txBody>
+          <a:bodyPr/>
+          <a:lstStyle/>
+          <a:p>
+            <a:r>
+              <a:rPr lang="en-US" dirty="0"/>
+              <a:t>9:30–10:00. DROP THE FORM LINK IN ZOOM CHAT NOW. One availability line, no pitch, no price. Then: 'Questions — let's go.'</a:t>
+            </a:r>
+            <a:endParaRPr lang="en-US" dirty="0"/>
+          </a:p>
+        </p:txBody>
+      </p:sp>
+      <p:sp>
+        <p:nvSpPr>
+          <p:cNvPr id="4" name="Slide Number Placeholder 3"/>
+          <p:cNvSpPr>
+            <a:spLocks noGrp="1"/>
+          </p:cNvSpPr>
+          <p:nvPr>
+            <p:ph type="sldNum" sz="quarter" idx="10"/>
+          </p:nvPr>
+        </p:nvSpPr>
+        <p:spPr/>
+        <p:txBody>
+          <a:bodyPr/>
+          <a:lstStyle/>
+          <a:p>
+            <a:fld id="{F7021451-1387-4CA6-816F-3879F97B5CBC}" type="slidenum">
+              <a:rPr lang="en-US"/>
+              <a:t>10</a:t>
+            </a:fld>
+            <a:endParaRPr lang="en-US"/>
+          </a:p>
+        </p:txBody>
+      </p:sp>
+    </p:spTree>
+    <p:extLst>
+      <p:ext uri="{BB962C8B-B14F-4D97-AF65-F5344CB8AC3E}">
+        <p14:creationId xmlns:p14="http://schemas.microsoft.com/office/powerpoint/2010/main" val="1024086991"/>
+      </p:ext>
+    </p:extLst>
+  </p:cSld>
+  <p:clrMapOvr>
+    <a:masterClrMapping/>
+  </p:clrMapOvr>
+</p:notes>
+</file>
+
 <file path=ppt/notesSlides/notesSlide2.xml><?xml version="1.0" encoding="utf-8"?>
 <p:notes xmlns:a="http://schemas.openxmlformats.org/drawingml/2006/main" xmlns:r="http://schemas.openxmlformats.org/officeDocument/2006/relationships" xmlns:p="http://schemas.openxmlformats.org/presentationml/2006/main">
   <p:cSld>
@@ -686,7 +775,7 @@
           <a:p>
             <a:r>
               <a:rPr lang="en-US" dirty="0"/>
-              <a:t>2:00–3:00. This is the map for the next three slides — watch the key in the corner. The framework is the brand and the brand is the framework.</a:t>
+              <a:t>Added per Paul's Aug 15 edits. ⚠️ The $400,000 figure needs Mike Tessneer's written consent (due Tue Aug 18) — strike it if consent doesn't cover it. Sunset date shown as Dec 2026 (feedback said Dec 2025; assumed typo — confirm).</a:t>
             </a:r>
             <a:endParaRPr lang="en-US" dirty="0"/>
           </a:p>
@@ -774,7 +863,7 @@
           <a:p>
             <a:r>
               <a:rPr lang="en-US" dirty="0"/>
-              <a:t>3:00–4:30. Mailing-list archaeology: exports, spreadsheets, paper fragments to one verified master. The segmentation matters: consent-first outreach to the unknown 1,984 — respect encoded in data structure. Work shown in ARC's own branding where screenshots appear.</a:t>
+              <a:t>2:00–3:00. This is the map for the next three slides — watch the key in the corner. The framework is the brand and the brand is the framework.</a:t>
             </a:r>
             <a:endParaRPr lang="en-US" dirty="0"/>
           </a:p>
@@ -862,7 +951,7 @@
           <a:p>
             <a:r>
               <a:rPr lang="en-US" dirty="0"/>
-              <a:t>4:30–6:00. Fill the box Friday morning from the ALF run. Say it plainly: 'These numbers are from last night's circle — my agent briefed me this morning.' Pause one beat.</a:t>
+              <a:t>3:00–4:30. Mailing-list archaeology: exports, spreadsheets, paper fragments to one verified master. The segmentation matters: consent-first outreach to the unknown 1,984 — respect encoded in data structure. Work shown in ARC's own branding where screenshots appear.</a:t>
             </a:r>
             <a:endParaRPr lang="en-US" dirty="0"/>
           </a:p>
@@ -950,7 +1039,7 @@
           <a:p>
             <a:r>
               <a:rPr lang="en-US" dirty="0"/>
-              <a:t>6:00–7:30. Technical meat for this room. Fallback-first design: assume the API fails, label data freshness. Human-in-the-loop by contract, not accident. This exact agent — sanitized — is in the kit.</a:t>
+              <a:t>4:30–6:00. Fill the box Friday morning from the ALF run. Say it plainly: 'These numbers are from last night's circle — my agent briefed me this morning.' Pause one beat.</a:t>
             </a:r>
             <a:endParaRPr lang="en-US" dirty="0"/>
           </a:p>
@@ -1038,7 +1127,7 @@
           <a:p>
             <a:r>
               <a:rPr lang="en-US" dirty="0"/>
-              <a:t>7:30–8:30. The I of the triad: leadership through an ending. Name the fund amount verbally ONLY if Board Chair consent covers it; the slide stays general. Land the positioning line.</a:t>
+              <a:t>6:00–7:30. Technical meat for this room. Fallback-first design: assume the API fails, label data freshness. Human-in-the-loop by contract, not accident. This exact agent — sanitized — is in the kit.</a:t>
             </a:r>
             <a:endParaRPr lang="en-US" dirty="0"/>
           </a:p>
@@ -1126,7 +1215,7 @@
           <a:p>
             <a:r>
               <a:rPr lang="en-US" dirty="0"/>
-              <a:t>8:30–9:30. The meta moment — deliver plainly, no flourish. One beat after 'in your inbox.'</a:t>
+              <a:t>7:30–8:30. The I of the triad: leadership through an ending. The fund amount now appears on the mandate slide — remove it there if Mike's written consent (due Tue Aug 18) doesn't cover it; this slide stays general. Land the positioning line.</a:t>
             </a:r>
             <a:endParaRPr lang="en-US" dirty="0"/>
           </a:p>
@@ -1214,7 +1303,7 @@
           <a:p>
             <a:r>
               <a:rPr lang="en-US" dirty="0"/>
-              <a:t>9:30–10:00. DROP THE FORM LINK IN ZOOM CHAT NOW. One availability line, no pitch, no price. Then: 'Questions — let's go.'</a:t>
+              <a:t>8:30–9:30. The meta moment — deliver plainly, no flourish. One beat after 'in your inbox.'</a:t>
             </a:r>
             <a:endParaRPr lang="en-US" dirty="0"/>
           </a:p>
@@ -1807,6 +1896,593 @@
           </a:p>
         </p:txBody>
       </p:sp>
+      <p:sp>
+        <p:nvSpPr>
+          <p:cNvPr id="8" name="Text 6"/>
+          <p:cNvSpPr/>
+          <p:nvPr/>
+        </p:nvSpPr>
+        <p:spPr>
+          <a:xfrm>
+            <a:off x="457200" y="3017520"/>
+            <a:ext cx="8229600" cy="777240"/>
+          </a:xfrm>
+          <a:prstGeom prst="rect">
+            <a:avLst/>
+          </a:prstGeom>
+          <a:noFill/>
+          <a:ln/>
+        </p:spPr>
+        <p:txBody>
+          <a:bodyPr wrap="square" rtlCol="0" anchor="ctr"/>
+          <a:lstStyle/>
+          <a:p>
+            <a:pPr algn="ctr" indent="0" marL="0">
+              <a:lnSpc>
+                <a:spcPct val="125000"/>
+              </a:lnSpc>
+              <a:buNone/>
+            </a:pPr>
+            <a:r>
+              <a:rPr lang="en-US" sz="1100" b="1" dirty="0">
+                <a:solidFill>
+                  <a:srgbClr val="B9C6CE"/>
+                </a:solidFill>
+                <a:latin typeface="Calibri" pitchFamily="34" charset="0"/>
+                <a:ea typeface="Calibri" pitchFamily="34" charset="-122"/>
+                <a:cs typeface="Calibri" pitchFamily="34" charset="-120"/>
+              </a:rPr>
+              <a:t>Live engagement — ARC Retreat Community · Stanchfield, MN · 501(c)(3) · arcretreat.org</a:t>
+            </a:r>
+            <a:endParaRPr lang="en-US" sz="1100" dirty="0"/>
+          </a:p>
+          <a:p>
+            <a:pPr algn="ctr" indent="0" marL="0">
+              <a:lnSpc>
+                <a:spcPct val="125000"/>
+              </a:lnSpc>
+              <a:buNone/>
+            </a:pPr>
+            <a:r>
+              <a:rPr lang="en-US" sz="1000" dirty="0">
+                <a:solidFill>
+                  <a:srgbClr val="8FA3AE"/>
+                </a:solidFill>
+                <a:latin typeface="Calibri" pitchFamily="34" charset="0"/>
+                <a:ea typeface="Calibri" pitchFamily="34" charset="-122"/>
+                <a:cs typeface="Calibri" pitchFamily="34" charset="-120"/>
+              </a:rPr>
+              <a:t>May 1, 2026 → June 30, 2027 (14 months) · Paul ≈10 hrs/wk @ $3,000/mo</a:t>
+            </a:r>
+            <a:endParaRPr lang="en-US" sz="1100" dirty="0"/>
+          </a:p>
+          <a:p>
+            <a:pPr algn="ctr" indent="0" marL="0">
+              <a:lnSpc>
+                <a:spcPct val="125000"/>
+              </a:lnSpc>
+              <a:buNone/>
+            </a:pPr>
+            <a:r>
+              <a:rPr lang="en-US" sz="1000" dirty="0">
+                <a:solidFill>
+                  <a:srgbClr val="8FA3AE"/>
+                </a:solidFill>
+                <a:latin typeface="Calibri" pitchFamily="34" charset="0"/>
+                <a:ea typeface="Calibri" pitchFamily="34" charset="-122"/>
+                <a:cs typeface="Calibri" pitchFamily="34" charset="-120"/>
+              </a:rPr>
+              <a:t>+ Amy ≈10 hrs/wk — event facilitation, storytelling audio, written blogs</a:t>
+            </a:r>
+            <a:endParaRPr lang="en-US" sz="1100" dirty="0"/>
+          </a:p>
+        </p:txBody>
+      </p:sp>
+    </p:spTree>
+  </p:cSld>
+  <p:clrMapOvr>
+    <a:masterClrMapping/>
+  </p:clrMapOvr>
+</p:sld>
+</file>
+
+<file path=ppt/slides/slide10.xml><?xml version="1.0" encoding="utf-8"?>
+<p:sld xmlns:a="http://schemas.openxmlformats.org/drawingml/2006/main" xmlns:r="http://schemas.openxmlformats.org/officeDocument/2006/relationships" xmlns:p="http://schemas.openxmlformats.org/presentationml/2006/main">
+  <p:cSld name="Slide 10">
+    <p:bg>
+      <p:bgPr>
+        <a:solidFill>
+          <a:srgbClr val="1F3A4D"/>
+        </a:solidFill>
+      </p:bgPr>
+    </p:bg>
+    <p:spTree>
+      <p:nvGrpSpPr>
+        <p:cNvPr id="1" name=""/>
+        <p:cNvGrpSpPr/>
+        <p:nvPr/>
+      </p:nvGrpSpPr>
+      <p:grpSpPr>
+        <a:xfrm>
+          <a:off x="0" y="0"/>
+          <a:ext cx="0" cy="0"/>
+          <a:chOff x="0" y="0"/>
+          <a:chExt cx="0" cy="0"/>
+        </a:xfrm>
+      </p:grpSpPr>
+      <p:sp>
+        <p:nvSpPr>
+          <p:cNvPr id="2" name="Text 0"/>
+          <p:cNvSpPr/>
+          <p:nvPr/>
+        </p:nvSpPr>
+        <p:spPr>
+          <a:xfrm>
+            <a:off x="457200" y="457200"/>
+            <a:ext cx="8229600" cy="548640"/>
+          </a:xfrm>
+          <a:prstGeom prst="rect">
+            <a:avLst/>
+          </a:prstGeom>
+          <a:noFill/>
+          <a:ln/>
+        </p:spPr>
+        <p:txBody>
+          <a:bodyPr wrap="square" rtlCol="0" anchor="ctr"/>
+          <a:lstStyle/>
+          <a:p>
+            <a:pPr algn="ctr" indent="0" marL="0">
+              <a:buNone/>
+            </a:pPr>
+            <a:r>
+              <a:rPr lang="en-US" sz="2800" b="1" dirty="0">
+                <a:solidFill>
+                  <a:srgbClr val="FFFFFF"/>
+                </a:solidFill>
+                <a:latin typeface="Cambria" pitchFamily="34" charset="0"/>
+                <a:ea typeface="Cambria" pitchFamily="34" charset="-122"/>
+                <a:cs typeface="Cambria" pitchFamily="34" charset="-120"/>
+              </a:rPr>
+              <a:t>Two gifts. One field. Your choice.</a:t>
+            </a:r>
+            <a:endParaRPr lang="en-US" sz="2800" dirty="0"/>
+          </a:p>
+        </p:txBody>
+      </p:sp>
+      <p:sp>
+        <p:nvSpPr>
+          <p:cNvPr id="3" name="Shape 1"/>
+          <p:cNvSpPr/>
+          <p:nvPr/>
+        </p:nvSpPr>
+        <p:spPr>
+          <a:xfrm>
+            <a:off x="640080" y="1325880"/>
+            <a:ext cx="2606040" cy="1737360"/>
+          </a:xfrm>
+          <a:prstGeom prst="roundRect">
+            <a:avLst>
+              <a:gd name="adj" fmla="val 4737"/>
+            </a:avLst>
+          </a:prstGeom>
+          <a:solidFill>
+            <a:srgbClr val="16303F"/>
+          </a:solidFill>
+          <a:ln w="15875">
+            <a:solidFill>
+              <a:srgbClr val="C08A2E"/>
+            </a:solidFill>
+            <a:prstDash val="solid"/>
+          </a:ln>
+        </p:spPr>
+      </p:sp>
+      <p:sp>
+        <p:nvSpPr>
+          <p:cNvPr id="4" name="Text 2"/>
+          <p:cNvSpPr/>
+          <p:nvPr/>
+        </p:nvSpPr>
+        <p:spPr>
+          <a:xfrm>
+            <a:off x="822960" y="1517904"/>
+            <a:ext cx="2240280" cy="1371600"/>
+          </a:xfrm>
+          <a:prstGeom prst="rect">
+            <a:avLst/>
+          </a:prstGeom>
+          <a:noFill/>
+          <a:ln/>
+        </p:spPr>
+        <p:txBody>
+          <a:bodyPr wrap="square" rtlCol="0" anchor="ctr"/>
+          <a:lstStyle/>
+          <a:p>
+            <a:pPr indent="0" marL="0">
+              <a:lnSpc>
+                <a:spcPct val="112000"/>
+              </a:lnSpc>
+              <a:buNone/>
+            </a:pPr>
+            <a:r>
+              <a:rPr lang="en-US" sz="1300" b="1" spc="200" kern="0" dirty="0">
+                <a:solidFill>
+                  <a:srgbClr val="C08A2E"/>
+                </a:solidFill>
+                <a:latin typeface="Calibri" pitchFamily="34" charset="0"/>
+                <a:ea typeface="Calibri" pitchFamily="34" charset="-122"/>
+                <a:cs typeface="Calibri" pitchFamily="34" charset="-120"/>
+              </a:rPr>
+              <a:t>THE PROMPT</a:t>
+            </a:r>
+            <a:endParaRPr lang="en-US" sz="1300" dirty="0"/>
+          </a:p>
+          <a:p>
+            <a:pPr indent="0" marL="0">
+              <a:lnSpc>
+                <a:spcPct val="112000"/>
+              </a:lnSpc>
+              <a:buNone/>
+            </a:pPr>
+            <a:r>
+              <a:rPr lang="en-US" sz="600" dirty="0">
+                <a:solidFill>
+                  <a:srgbClr val="000000"/>
+                </a:solidFill>
+                <a:latin typeface="Calibri" pitchFamily="34" charset="0"/>
+                <a:ea typeface="Calibri" pitchFamily="34" charset="-122"/>
+                <a:cs typeface="Calibri" pitchFamily="34" charset="-120"/>
+              </a:rPr>
+              <a:t> </a:t>
+            </a:r>
+            <a:endParaRPr lang="en-US" sz="1300" dirty="0"/>
+          </a:p>
+          <a:p>
+            <a:pPr indent="0" marL="0">
+              <a:lnSpc>
+                <a:spcPct val="112000"/>
+              </a:lnSpc>
+              <a:buNone/>
+            </a:pPr>
+            <a:r>
+              <a:rPr lang="en-US" sz="1150" dirty="0">
+                <a:solidFill>
+                  <a:srgbClr val="FFFFFF"/>
+                </a:solidFill>
+                <a:latin typeface="Calibri" pitchFamily="34" charset="0"/>
+                <a:ea typeface="Calibri" pitchFamily="34" charset="-122"/>
+                <a:cs typeface="Calibri" pitchFamily="34" charset="-120"/>
+              </a:rPr>
+              <a:t>Proof-to-Pipeline — the parameterized prompt that produced this talk</a:t>
+            </a:r>
+            <a:endParaRPr lang="en-US" sz="1300" dirty="0"/>
+          </a:p>
+        </p:txBody>
+      </p:sp>
+      <p:sp>
+        <p:nvSpPr>
+          <p:cNvPr id="5" name="Shape 3"/>
+          <p:cNvSpPr/>
+          <p:nvPr/>
+        </p:nvSpPr>
+        <p:spPr>
+          <a:xfrm>
+            <a:off x="3474720" y="1325880"/>
+            <a:ext cx="2606040" cy="1737360"/>
+          </a:xfrm>
+          <a:prstGeom prst="roundRect">
+            <a:avLst>
+              <a:gd name="adj" fmla="val 4737"/>
+            </a:avLst>
+          </a:prstGeom>
+          <a:solidFill>
+            <a:srgbClr val="16303F"/>
+          </a:solidFill>
+          <a:ln w="15875">
+            <a:solidFill>
+              <a:srgbClr val="C08A2E"/>
+            </a:solidFill>
+            <a:prstDash val="solid"/>
+          </a:ln>
+        </p:spPr>
+      </p:sp>
+      <p:sp>
+        <p:nvSpPr>
+          <p:cNvPr id="6" name="Text 4"/>
+          <p:cNvSpPr/>
+          <p:nvPr/>
+        </p:nvSpPr>
+        <p:spPr>
+          <a:xfrm>
+            <a:off x="3657600" y="1517904"/>
+            <a:ext cx="2240280" cy="1371600"/>
+          </a:xfrm>
+          <a:prstGeom prst="rect">
+            <a:avLst/>
+          </a:prstGeom>
+          <a:noFill/>
+          <a:ln/>
+        </p:spPr>
+        <p:txBody>
+          <a:bodyPr wrap="square" rtlCol="0" anchor="ctr"/>
+          <a:lstStyle/>
+          <a:p>
+            <a:pPr indent="0" marL="0">
+              <a:lnSpc>
+                <a:spcPct val="112000"/>
+              </a:lnSpc>
+              <a:buNone/>
+            </a:pPr>
+            <a:r>
+              <a:rPr lang="en-US" sz="1300" b="1" spc="200" kern="0" dirty="0">
+                <a:solidFill>
+                  <a:srgbClr val="C08A2E"/>
+                </a:solidFill>
+                <a:latin typeface="Calibri" pitchFamily="34" charset="0"/>
+                <a:ea typeface="Calibri" pitchFamily="34" charset="-122"/>
+                <a:cs typeface="Calibri" pitchFamily="34" charset="-120"/>
+              </a:rPr>
+              <a:t>THE AGENT</a:t>
+            </a:r>
+            <a:endParaRPr lang="en-US" sz="1300" dirty="0"/>
+          </a:p>
+          <a:p>
+            <a:pPr indent="0" marL="0">
+              <a:lnSpc>
+                <a:spcPct val="112000"/>
+              </a:lnSpc>
+              <a:buNone/>
+            </a:pPr>
+            <a:r>
+              <a:rPr lang="en-US" sz="600" dirty="0">
+                <a:solidFill>
+                  <a:srgbClr val="000000"/>
+                </a:solidFill>
+                <a:latin typeface="Calibri" pitchFamily="34" charset="0"/>
+                <a:ea typeface="Calibri" pitchFamily="34" charset="-122"/>
+                <a:cs typeface="Calibri" pitchFamily="34" charset="-120"/>
+              </a:rPr>
+              <a:t> </a:t>
+            </a:r>
+            <a:endParaRPr lang="en-US" sz="1300" dirty="0"/>
+          </a:p>
+          <a:p>
+            <a:pPr indent="0" marL="0">
+              <a:lnSpc>
+                <a:spcPct val="112000"/>
+              </a:lnSpc>
+              <a:buNone/>
+            </a:pPr>
+            <a:r>
+              <a:rPr lang="en-US" sz="1150" dirty="0">
+                <a:solidFill>
+                  <a:srgbClr val="FFFFFF"/>
+                </a:solidFill>
+                <a:latin typeface="Calibri" pitchFamily="34" charset="0"/>
+                <a:ea typeface="Calibri" pitchFamily="34" charset="-122"/>
+                <a:cs typeface="Calibri" pitchFamily="34" charset="-120"/>
+              </a:rPr>
+              <a:t>Transition Listening Report — the sanitized production skill, judgment rules intact</a:t>
+            </a:r>
+            <a:endParaRPr lang="en-US" sz="1300" dirty="0"/>
+          </a:p>
+        </p:txBody>
+      </p:sp>
+      <p:sp>
+        <p:nvSpPr>
+          <p:cNvPr id="7" name="Shape 5"/>
+          <p:cNvSpPr/>
+          <p:nvPr/>
+        </p:nvSpPr>
+        <p:spPr>
+          <a:xfrm>
+            <a:off x="6400800" y="1325880"/>
+            <a:ext cx="2103120" cy="1737360"/>
+          </a:xfrm>
+          <a:prstGeom prst="roundRect">
+            <a:avLst>
+              <a:gd name="adj" fmla="val 4737"/>
+            </a:avLst>
+          </a:prstGeom>
+          <a:solidFill>
+            <a:srgbClr val="FFFFFF"/>
+          </a:solidFill>
+          <a:ln/>
+        </p:spPr>
+      </p:sp>
+      <p:pic>
+        <p:nvPicPr>
+          <p:cNvPr id="8" name="Image 0" descr="/home/user/agnt-neo/proof-to-pipeline/deck/form_qr.png">    </p:cNvPr>
+          <p:cNvPicPr>
+            <a:picLocks noChangeAspect="1"/>
+          </p:cNvPicPr>
+          <p:nvPr/>
+        </p:nvPicPr>
+        <p:blipFill>
+          <a:blip r:embed="rId1"/>
+          <a:stretch>
+            <a:fillRect/>
+          </a:stretch>
+        </p:blipFill>
+        <p:spPr>
+          <a:xfrm>
+            <a:off x="6556248" y="1371600"/>
+            <a:ext cx="1645920" cy="1645920"/>
+          </a:xfrm>
+          <a:prstGeom prst="rect">
+            <a:avLst/>
+          </a:prstGeom>
+        </p:spPr>
+      </p:pic>
+      <p:sp>
+        <p:nvSpPr>
+          <p:cNvPr id="9" name="Text 6"/>
+          <p:cNvSpPr/>
+          <p:nvPr/>
+        </p:nvSpPr>
+        <p:spPr>
+          <a:xfrm>
+            <a:off x="457200" y="3310128"/>
+            <a:ext cx="8229600" cy="411480"/>
+          </a:xfrm>
+          <a:prstGeom prst="rect">
+            <a:avLst/>
+          </a:prstGeom>
+          <a:noFill/>
+          <a:ln/>
+        </p:spPr>
+        <p:txBody>
+          <a:bodyPr wrap="square" lIns="0" tIns="0" rIns="0" bIns="0" rtlCol="0" anchor="ctr"/>
+          <a:lstStyle/>
+          <a:p>
+            <a:pPr algn="ctr" indent="0" marL="0">
+              <a:buNone/>
+            </a:pPr>
+            <a:r>
+              <a:rPr lang="en-US" sz="1500" b="1" dirty="0">
+                <a:solidFill>
+                  <a:srgbClr val="FFFFFF"/>
+                </a:solidFill>
+                <a:latin typeface="Calibri" pitchFamily="34" charset="0"/>
+                <a:ea typeface="Calibri" pitchFamily="34" charset="-122"/>
+                <a:cs typeface="Calibri" pitchFamily="34" charset="-120"/>
+              </a:rPr>
+              <a:t>LinkedIn or email — whichever you prefer. </a:t>
+            </a:r>
+            <a:pPr algn="ctr" indent="0" marL="0">
+              <a:buNone/>
+            </a:pPr>
+            <a:r>
+              <a:rPr lang="en-US" sz="1500" dirty="0">
+                <a:solidFill>
+                  <a:srgbClr val="B9C6CE"/>
+                </a:solidFill>
+                <a:latin typeface="Calibri" pitchFamily="34" charset="0"/>
+                <a:ea typeface="Calibri" pitchFamily="34" charset="-122"/>
+                <a:cs typeface="Calibri" pitchFamily="34" charset="-120"/>
+              </a:rPr>
+              <a:t>The kit arrives within the hour.</a:t>
+            </a:r>
+            <a:endParaRPr lang="en-US" sz="1500" dirty="0"/>
+          </a:p>
+        </p:txBody>
+      </p:sp>
+      <p:sp>
+        <p:nvSpPr>
+          <p:cNvPr id="10" name="Text 7"/>
+          <p:cNvSpPr/>
+          <p:nvPr/>
+        </p:nvSpPr>
+        <p:spPr>
+          <a:xfrm>
+            <a:off x="457200" y="3886200"/>
+            <a:ext cx="8229600" cy="365760"/>
+          </a:xfrm>
+          <a:prstGeom prst="rect">
+            <a:avLst/>
+          </a:prstGeom>
+          <a:noFill/>
+          <a:ln/>
+        </p:spPr>
+        <p:txBody>
+          <a:bodyPr wrap="square" lIns="0" tIns="0" rIns="0" bIns="0" rtlCol="0" anchor="ctr"/>
+          <a:lstStyle/>
+          <a:p>
+            <a:pPr algn="ctr" indent="0" marL="0">
+              <a:buNone/>
+            </a:pPr>
+            <a:r>
+              <a:rPr lang="en-US" sz="1250" i="1" dirty="0">
+                <a:solidFill>
+                  <a:srgbClr val="B9C6CE"/>
+                </a:solidFill>
+                <a:latin typeface="Calibri" pitchFamily="34" charset="0"/>
+                <a:ea typeface="Calibri" pitchFamily="34" charset="-122"/>
+                <a:cs typeface="Calibri" pitchFamily="34" charset="-120"/>
+              </a:rPr>
+              <a:t>I take a small number of fractional engagements for organizations in transition — if you have one, or know one:</a:t>
+            </a:r>
+            <a:endParaRPr lang="en-US" sz="1250" dirty="0"/>
+          </a:p>
+        </p:txBody>
+      </p:sp>
+      <p:sp>
+        <p:nvSpPr>
+          <p:cNvPr id="11" name="Text 8"/>
+          <p:cNvSpPr/>
+          <p:nvPr/>
+        </p:nvSpPr>
+        <p:spPr>
+          <a:xfrm>
+            <a:off x="457200" y="4279392"/>
+            <a:ext cx="8229600" cy="457200"/>
+          </a:xfrm>
+          <a:prstGeom prst="rect">
+            <a:avLst/>
+          </a:prstGeom>
+          <a:noFill/>
+          <a:ln/>
+        </p:spPr>
+        <p:txBody>
+          <a:bodyPr wrap="square" lIns="0" tIns="0" rIns="0" bIns="0" rtlCol="0" anchor="ctr"/>
+          <a:lstStyle/>
+          <a:p>
+            <a:pPr algn="ctr" indent="0" marL="0">
+              <a:buNone/>
+            </a:pPr>
+            <a:r>
+              <a:rPr lang="en-US" sz="2100" b="1" dirty="0">
+                <a:solidFill>
+                  <a:srgbClr val="C08A2E"/>
+                </a:solidFill>
+                <a:latin typeface="Cambria" pitchFamily="34" charset="0"/>
+                <a:ea typeface="Cambria" pitchFamily="34" charset="-122"/>
+                <a:cs typeface="Cambria" pitchFamily="34" charset="-120"/>
+              </a:rPr>
+              <a:t>scheduler.zoom.us/paul-halvorson</a:t>
+            </a:r>
+            <a:endParaRPr lang="en-US" sz="2100" dirty="0"/>
+          </a:p>
+        </p:txBody>
+      </p:sp>
+      <p:sp>
+        <p:nvSpPr>
+          <p:cNvPr id="12" name="Text 9"/>
+          <p:cNvSpPr/>
+          <p:nvPr/>
+        </p:nvSpPr>
+        <p:spPr>
+          <a:xfrm>
+            <a:off x="457200" y="4773168"/>
+            <a:ext cx="8229600" cy="274320"/>
+          </a:xfrm>
+          <a:prstGeom prst="rect">
+            <a:avLst/>
+          </a:prstGeom>
+          <a:noFill/>
+          <a:ln/>
+        </p:spPr>
+        <p:txBody>
+          <a:bodyPr wrap="square" lIns="0" tIns="0" rIns="0" bIns="0" rtlCol="0" anchor="ctr"/>
+          <a:lstStyle/>
+          <a:p>
+            <a:pPr algn="ctr" indent="0" marL="0">
+              <a:buNone/>
+            </a:pPr>
+            <a:r>
+              <a:rPr lang="en-US" sz="950" dirty="0">
+                <a:solidFill>
+                  <a:srgbClr val="8FA3AE"/>
+                </a:solidFill>
+                <a:latin typeface="Calibri" pitchFamily="34" charset="0"/>
+                <a:ea typeface="Calibri" pitchFamily="34" charset="-122"/>
+                <a:cs typeface="Calibri" pitchFamily="34" charset="-120"/>
+              </a:rPr>
+              <a:t>Paul Halvorson · TRIAD Synergy · DrPaul@TriadSynergy.com · Purpose Driven Action for Business and Community Leaders</a:t>
+            </a:r>
+            <a:endParaRPr lang="en-US" sz="950" dirty="0"/>
+          </a:p>
+        </p:txBody>
+      </p:sp>
     </p:spTree>
   </p:cSld>
   <p:clrMapOvr>
@@ -1934,7 +2610,7 @@
                 <a:ea typeface="Calibri" pitchFamily="34" charset="-122"/>
                 <a:cs typeface="Calibri" pitchFamily="34" charset="-120"/>
               </a:rPr>
-              <a:t>October 2025</a:t>
+              <a:t>June 2025</a:t>
             </a:r>
             <a:endParaRPr lang="en-US" sz="1200" dirty="0"/>
           </a:p>
@@ -1946,7 +2622,7 @@
               <a:buNone/>
             </a:pPr>
             <a:r>
-              <a:rPr lang="en-US" sz="1450" dirty="0">
+              <a:rPr lang="en-US" sz="1250" dirty="0">
                 <a:solidFill>
                   <a:srgbClr val="22313D"/>
                 </a:solidFill>
@@ -1954,7 +2630,7 @@
                 <a:ea typeface="Calibri" pitchFamily="34" charset="-122"/>
                 <a:cs typeface="Calibri" pitchFamily="34" charset="-120"/>
               </a:rPr>
-              <a:t>Property sold. Retreat center goes dark.</a:t>
+              <a:t>Staff laid off.</a:t>
             </a:r>
             <a:endParaRPr lang="en-US" sz="1200" dirty="0"/>
           </a:p>
@@ -2039,7 +2715,7 @@
                 <a:ea typeface="Calibri" pitchFamily="34" charset="-122"/>
                 <a:cs typeface="Calibri" pitchFamily="34" charset="-120"/>
               </a:rPr>
-              <a:t>The same season</a:t>
+              <a:t>October 2025</a:t>
             </a:r>
             <a:endParaRPr lang="en-US" sz="1200" dirty="0"/>
           </a:p>
@@ -2051,7 +2727,7 @@
               <a:buNone/>
             </a:pPr>
             <a:r>
-              <a:rPr lang="en-US" sz="1450" dirty="0">
+              <a:rPr lang="en-US" sz="1250" dirty="0">
                 <a:solidFill>
                   <a:srgbClr val="22313D"/>
                 </a:solidFill>
@@ -2059,7 +2735,7 @@
                 <a:ea typeface="Calibri" pitchFamily="34" charset="-122"/>
                 <a:cs typeface="Calibri" pitchFamily="34" charset="-120"/>
               </a:rPr>
-              <a:t>Executive Director and staff depart.</a:t>
+              <a:t>Property sold — 91 acres + buildings — to pay off debt. The retreat center goes dark.</a:t>
             </a:r>
             <a:endParaRPr lang="en-US" sz="1200" dirty="0"/>
           </a:p>
@@ -2144,7 +2820,7 @@
                 <a:ea typeface="Calibri" pitchFamily="34" charset="-122"/>
                 <a:cs typeface="Calibri" pitchFamily="34" charset="-120"/>
               </a:rPr>
-              <a:t>What's left on paper</a:t>
+              <a:t>December 2025</a:t>
             </a:r>
             <a:endParaRPr lang="en-US" sz="1200" dirty="0"/>
           </a:p>
@@ -2156,7 +2832,7 @@
               <a:buNone/>
             </a:pPr>
             <a:r>
-              <a:rPr lang="en-US" sz="1450" dirty="0">
+              <a:rPr lang="en-US" sz="1250" dirty="0">
                 <a:solidFill>
                   <a:srgbClr val="22313D"/>
                 </a:solidFill>
@@ -2164,7 +2840,7 @@
                 <a:ea typeface="Calibri" pitchFamily="34" charset="-122"/>
                 <a:cs typeface="Calibri" pitchFamily="34" charset="-120"/>
               </a:rPr>
-              <a:t>No succession plan. No operating playbook.</a:t>
+              <a:t>Executive Director departs. No succession plan; no handover of records, mailing list, backups, or passwords.</a:t>
             </a:r>
             <a:endParaRPr lang="en-US" sz="1200" dirty="0"/>
           </a:p>
@@ -2261,7 +2937,7 @@
               <a:buNone/>
             </a:pPr>
             <a:r>
-              <a:rPr lang="en-US" sz="1450" dirty="0">
+              <a:rPr lang="en-US" sz="1250" dirty="0">
                 <a:solidFill>
                   <a:srgbClr val="22313D"/>
                 </a:solidFill>
@@ -2269,7 +2945,7 @@
                 <a:ea typeface="Calibri" pitchFamily="34" charset="-122"/>
                 <a:cs typeface="Calibri" pitchFamily="34" charset="-120"/>
               </a:rPr>
-              <a:t>A five-person board — and no map.</a:t>
+              <a:t>A five-person board — worn out by the sale, emotionally beat up.</a:t>
             </a:r>
             <a:endParaRPr lang="en-US" sz="1200" dirty="0"/>
           </a:p>
@@ -2456,6 +3132,853 @@
 <file path=ppt/slides/slide3.xml><?xml version="1.0" encoding="utf-8"?>
 <p:sld xmlns:a="http://schemas.openxmlformats.org/drawingml/2006/main" xmlns:r="http://schemas.openxmlformats.org/officeDocument/2006/relationships" xmlns:p="http://schemas.openxmlformats.org/presentationml/2006/main">
   <p:cSld name="Slide 3">
+    <p:bg>
+      <p:bgPr>
+        <a:solidFill>
+          <a:srgbClr val="FFFFFF"/>
+        </a:solidFill>
+      </p:bgPr>
+    </p:bg>
+    <p:spTree>
+      <p:nvGrpSpPr>
+        <p:cNvPr id="1" name=""/>
+        <p:cNvGrpSpPr/>
+        <p:nvPr/>
+      </p:nvGrpSpPr>
+      <p:grpSpPr>
+        <a:xfrm>
+          <a:off x="0" y="0"/>
+          <a:ext cx="0" cy="0"/>
+          <a:chOff x="0" y="0"/>
+          <a:chExt cx="0" cy="0"/>
+        </a:xfrm>
+      </p:grpSpPr>
+      <p:sp>
+        <p:nvSpPr>
+          <p:cNvPr id="2" name="Text 0"/>
+          <p:cNvSpPr/>
+          <p:nvPr/>
+        </p:nvSpPr>
+        <p:spPr>
+          <a:xfrm>
+            <a:off x="502920" y="292608"/>
+            <a:ext cx="7498080" cy="566928"/>
+          </a:xfrm>
+          <a:prstGeom prst="rect">
+            <a:avLst/>
+          </a:prstGeom>
+          <a:noFill/>
+          <a:ln/>
+        </p:spPr>
+        <p:txBody>
+          <a:bodyPr wrap="square" lIns="0" tIns="0" rIns="0" bIns="0" rtlCol="0" anchor="ctr"/>
+          <a:lstStyle/>
+          <a:p>
+            <a:pPr indent="0" marL="0">
+              <a:buNone/>
+            </a:pPr>
+            <a:r>
+              <a:rPr lang="en-US" sz="3000" b="1" dirty="0">
+                <a:solidFill>
+                  <a:srgbClr val="1F3A4D"/>
+                </a:solidFill>
+                <a:latin typeface="Cambria" pitchFamily="34" charset="0"/>
+                <a:ea typeface="Cambria" pitchFamily="34" charset="-122"/>
+                <a:cs typeface="Cambria" pitchFamily="34" charset="-120"/>
+              </a:rPr>
+              <a:t>Who remains — and the mandate</a:t>
+            </a:r>
+            <a:endParaRPr lang="en-US" sz="3000" dirty="0"/>
+          </a:p>
+        </p:txBody>
+      </p:sp>
+      <p:sp>
+        <p:nvSpPr>
+          <p:cNvPr id="3" name="Text 1"/>
+          <p:cNvSpPr/>
+          <p:nvPr/>
+        </p:nvSpPr>
+        <p:spPr>
+          <a:xfrm>
+            <a:off x="502920" y="969264"/>
+            <a:ext cx="3566160" cy="256032"/>
+          </a:xfrm>
+          <a:prstGeom prst="rect">
+            <a:avLst/>
+          </a:prstGeom>
+          <a:noFill/>
+          <a:ln/>
+        </p:spPr>
+        <p:txBody>
+          <a:bodyPr wrap="square" lIns="0" tIns="0" rIns="0" bIns="0" rtlCol="0" anchor="ctr"/>
+          <a:lstStyle/>
+          <a:p>
+            <a:pPr indent="0" marL="0">
+              <a:buNone/>
+            </a:pPr>
+            <a:r>
+              <a:rPr lang="en-US" sz="1100" b="1" spc="200" kern="0" dirty="0">
+                <a:solidFill>
+                  <a:srgbClr val="888888"/>
+                </a:solidFill>
+                <a:latin typeface="Calibri" pitchFamily="34" charset="0"/>
+                <a:ea typeface="Calibri" pitchFamily="34" charset="-122"/>
+                <a:cs typeface="Calibri" pitchFamily="34" charset="-120"/>
+              </a:rPr>
+              <a:t>THE TEAM NOW</a:t>
+            </a:r>
+            <a:endParaRPr lang="en-US" sz="1100" dirty="0"/>
+          </a:p>
+        </p:txBody>
+      </p:sp>
+      <p:sp>
+        <p:nvSpPr>
+          <p:cNvPr id="4" name="Shape 2"/>
+          <p:cNvSpPr/>
+          <p:nvPr/>
+        </p:nvSpPr>
+        <p:spPr>
+          <a:xfrm>
+            <a:off x="566928" y="1371600"/>
+            <a:ext cx="164592" cy="164592"/>
+          </a:xfrm>
+          <a:prstGeom prst="ellipse">
+            <a:avLst/>
+          </a:prstGeom>
+          <a:solidFill>
+            <a:srgbClr val="1F3A4D"/>
+          </a:solidFill>
+          <a:ln/>
+        </p:spPr>
+      </p:sp>
+      <p:sp>
+        <p:nvSpPr>
+          <p:cNvPr id="5" name="Text 3"/>
+          <p:cNvSpPr/>
+          <p:nvPr/>
+        </p:nvSpPr>
+        <p:spPr>
+          <a:xfrm>
+            <a:off x="896112" y="1243584"/>
+            <a:ext cx="3246120" cy="868680"/>
+          </a:xfrm>
+          <a:prstGeom prst="rect">
+            <a:avLst/>
+          </a:prstGeom>
+          <a:noFill/>
+          <a:ln/>
+        </p:spPr>
+        <p:txBody>
+          <a:bodyPr wrap="square" lIns="0" tIns="0" rIns="0" bIns="0" rtlCol="0" anchor="ctr"/>
+          <a:lstStyle/>
+          <a:p>
+            <a:pPr indent="0" marL="0">
+              <a:lnSpc>
+                <a:spcPct val="105000"/>
+              </a:lnSpc>
+              <a:buNone/>
+            </a:pPr>
+            <a:r>
+              <a:rPr lang="en-US" sz="1300" b="1" dirty="0">
+                <a:solidFill>
+                  <a:srgbClr val="1F3A4D"/>
+                </a:solidFill>
+                <a:latin typeface="Calibri" pitchFamily="34" charset="0"/>
+                <a:ea typeface="Calibri" pitchFamily="34" charset="-122"/>
+                <a:cs typeface="Calibri" pitchFamily="34" charset="-120"/>
+              </a:rPr>
+              <a:t>Board chair</a:t>
+            </a:r>
+            <a:endParaRPr lang="en-US" sz="1300" dirty="0"/>
+          </a:p>
+          <a:p>
+            <a:pPr indent="0" marL="0">
+              <a:lnSpc>
+                <a:spcPct val="105000"/>
+              </a:lnSpc>
+              <a:buNone/>
+            </a:pPr>
+            <a:r>
+              <a:rPr lang="en-US" sz="1050" dirty="0">
+                <a:solidFill>
+                  <a:srgbClr val="22313D"/>
+                </a:solidFill>
+                <a:latin typeface="Calibri" pitchFamily="34" charset="0"/>
+                <a:ea typeface="Calibri" pitchFamily="34" charset="-122"/>
+                <a:cs typeface="Calibri" pitchFamily="34" charset="-120"/>
+              </a:rPr>
+              <a:t>Leading the charge — brought in two part-time contractors.</a:t>
+            </a:r>
+            <a:endParaRPr lang="en-US" sz="1300" dirty="0"/>
+          </a:p>
+        </p:txBody>
+      </p:sp>
+      <p:sp>
+        <p:nvSpPr>
+          <p:cNvPr id="6" name="Shape 4"/>
+          <p:cNvSpPr/>
+          <p:nvPr/>
+        </p:nvSpPr>
+        <p:spPr>
+          <a:xfrm>
+            <a:off x="566928" y="2267712"/>
+            <a:ext cx="164592" cy="164592"/>
+          </a:xfrm>
+          <a:prstGeom prst="ellipse">
+            <a:avLst/>
+          </a:prstGeom>
+          <a:solidFill>
+            <a:srgbClr val="2E6E6E"/>
+          </a:solidFill>
+          <a:ln/>
+        </p:spPr>
+      </p:sp>
+      <p:sp>
+        <p:nvSpPr>
+          <p:cNvPr id="7" name="Text 5"/>
+          <p:cNvSpPr/>
+          <p:nvPr/>
+        </p:nvSpPr>
+        <p:spPr>
+          <a:xfrm>
+            <a:off x="896112" y="2139696"/>
+            <a:ext cx="3246120" cy="868680"/>
+          </a:xfrm>
+          <a:prstGeom prst="rect">
+            <a:avLst/>
+          </a:prstGeom>
+          <a:noFill/>
+          <a:ln/>
+        </p:spPr>
+        <p:txBody>
+          <a:bodyPr wrap="square" lIns="0" tIns="0" rIns="0" bIns="0" rtlCol="0" anchor="ctr"/>
+          <a:lstStyle/>
+          <a:p>
+            <a:pPr indent="0" marL="0">
+              <a:lnSpc>
+                <a:spcPct val="105000"/>
+              </a:lnSpc>
+              <a:buNone/>
+            </a:pPr>
+            <a:r>
+              <a:rPr lang="en-US" sz="1300" b="1" dirty="0">
+                <a:solidFill>
+                  <a:srgbClr val="2E6E6E"/>
+                </a:solidFill>
+                <a:latin typeface="Calibri" pitchFamily="34" charset="0"/>
+                <a:ea typeface="Calibri" pitchFamily="34" charset="-122"/>
+                <a:cs typeface="Calibri" pitchFamily="34" charset="-120"/>
+              </a:rPr>
+              <a:t>Paul · TRIAD Synergy</a:t>
+            </a:r>
+            <a:endParaRPr lang="en-US" sz="1300" dirty="0"/>
+          </a:p>
+          <a:p>
+            <a:pPr indent="0" marL="0">
+              <a:lnSpc>
+                <a:spcPct val="105000"/>
+              </a:lnSpc>
+              <a:buNone/>
+            </a:pPr>
+            <a:r>
+              <a:rPr lang="en-US" sz="1050" dirty="0">
+                <a:solidFill>
+                  <a:srgbClr val="22313D"/>
+                </a:solidFill>
+                <a:latin typeface="Calibri" pitchFamily="34" charset="0"/>
+                <a:ea typeface="Calibri" pitchFamily="34" charset="-122"/>
+                <a:cs typeface="Calibri" pitchFamily="34" charset="-120"/>
+              </a:rPr>
+              <a:t>Records, systems, data, daily dashboards — and the sunset plan.</a:t>
+            </a:r>
+            <a:endParaRPr lang="en-US" sz="1300" dirty="0"/>
+          </a:p>
+        </p:txBody>
+      </p:sp>
+      <p:sp>
+        <p:nvSpPr>
+          <p:cNvPr id="8" name="Shape 6"/>
+          <p:cNvSpPr/>
+          <p:nvPr/>
+        </p:nvSpPr>
+        <p:spPr>
+          <a:xfrm>
+            <a:off x="566928" y="3163824"/>
+            <a:ext cx="164592" cy="164592"/>
+          </a:xfrm>
+          <a:prstGeom prst="ellipse">
+            <a:avLst/>
+          </a:prstGeom>
+          <a:solidFill>
+            <a:srgbClr val="C08A2E"/>
+          </a:solidFill>
+          <a:ln/>
+        </p:spPr>
+      </p:sp>
+      <p:sp>
+        <p:nvSpPr>
+          <p:cNvPr id="9" name="Text 7"/>
+          <p:cNvSpPr/>
+          <p:nvPr/>
+        </p:nvSpPr>
+        <p:spPr>
+          <a:xfrm>
+            <a:off x="896112" y="3035808"/>
+            <a:ext cx="3246120" cy="868680"/>
+          </a:xfrm>
+          <a:prstGeom prst="rect">
+            <a:avLst/>
+          </a:prstGeom>
+          <a:noFill/>
+          <a:ln/>
+        </p:spPr>
+        <p:txBody>
+          <a:bodyPr wrap="square" lIns="0" tIns="0" rIns="0" bIns="0" rtlCol="0" anchor="ctr"/>
+          <a:lstStyle/>
+          <a:p>
+            <a:pPr indent="0" marL="0">
+              <a:lnSpc>
+                <a:spcPct val="105000"/>
+              </a:lnSpc>
+              <a:buNone/>
+            </a:pPr>
+            <a:r>
+              <a:rPr lang="en-US" sz="1300" b="1" dirty="0">
+                <a:solidFill>
+                  <a:srgbClr val="9A6E25"/>
+                </a:solidFill>
+                <a:latin typeface="Calibri" pitchFamily="34" charset="0"/>
+                <a:ea typeface="Calibri" pitchFamily="34" charset="-122"/>
+                <a:cs typeface="Calibri" pitchFamily="34" charset="-120"/>
+              </a:rPr>
+              <a:t>Amy</a:t>
+            </a:r>
+            <a:endParaRPr lang="en-US" sz="1300" dirty="0"/>
+          </a:p>
+          <a:p>
+            <a:pPr indent="0" marL="0">
+              <a:lnSpc>
+                <a:spcPct val="105000"/>
+              </a:lnSpc>
+              <a:buNone/>
+            </a:pPr>
+            <a:r>
+              <a:rPr lang="en-US" sz="1050" dirty="0">
+                <a:solidFill>
+                  <a:srgbClr val="22313D"/>
+                </a:solidFill>
+                <a:latin typeface="Calibri" pitchFamily="34" charset="0"/>
+                <a:ea typeface="Calibri" pitchFamily="34" charset="-122"/>
+                <a:cs typeface="Calibri" pitchFamily="34" charset="-120"/>
+              </a:rPr>
+              <a:t>Organizes and facilitates the listening sessions; turns the stories into oral and written histories published on the website.</a:t>
+            </a:r>
+            <a:endParaRPr lang="en-US" sz="1300" dirty="0"/>
+          </a:p>
+        </p:txBody>
+      </p:sp>
+      <p:sp>
+        <p:nvSpPr>
+          <p:cNvPr id="10" name="Text 8"/>
+          <p:cNvSpPr/>
+          <p:nvPr/>
+        </p:nvSpPr>
+        <p:spPr>
+          <a:xfrm>
+            <a:off x="4526280" y="969264"/>
+            <a:ext cx="4114800" cy="256032"/>
+          </a:xfrm>
+          <a:prstGeom prst="rect">
+            <a:avLst/>
+          </a:prstGeom>
+          <a:noFill/>
+          <a:ln/>
+        </p:spPr>
+        <p:txBody>
+          <a:bodyPr wrap="square" lIns="0" tIns="0" rIns="0" bIns="0" rtlCol="0" anchor="ctr"/>
+          <a:lstStyle/>
+          <a:p>
+            <a:pPr indent="0" marL="0">
+              <a:buNone/>
+            </a:pPr>
+            <a:r>
+              <a:rPr lang="en-US" sz="1100" b="1" spc="200" kern="0" dirty="0">
+                <a:solidFill>
+                  <a:srgbClr val="888888"/>
+                </a:solidFill>
+                <a:latin typeface="Calibri" pitchFamily="34" charset="0"/>
+                <a:ea typeface="Calibri" pitchFamily="34" charset="-122"/>
+                <a:cs typeface="Calibri" pitchFamily="34" charset="-120"/>
+              </a:rPr>
+              <a:t>THE MANDATE</a:t>
+            </a:r>
+            <a:endParaRPr lang="en-US" sz="1100" dirty="0"/>
+          </a:p>
+        </p:txBody>
+      </p:sp>
+      <p:sp>
+        <p:nvSpPr>
+          <p:cNvPr id="11" name="Shape 9"/>
+          <p:cNvSpPr/>
+          <p:nvPr/>
+        </p:nvSpPr>
+        <p:spPr>
+          <a:xfrm>
+            <a:off x="4526280" y="1271016"/>
+            <a:ext cx="4114800" cy="804672"/>
+          </a:xfrm>
+          <a:prstGeom prst="roundRect">
+            <a:avLst>
+              <a:gd name="adj" fmla="val 7955"/>
+            </a:avLst>
+          </a:prstGeom>
+          <a:solidFill>
+            <a:srgbClr val="EEF3F4"/>
+          </a:solidFill>
+          <a:ln/>
+        </p:spPr>
+      </p:sp>
+      <p:sp>
+        <p:nvSpPr>
+          <p:cNvPr id="12" name="Text 10"/>
+          <p:cNvSpPr/>
+          <p:nvPr/>
+        </p:nvSpPr>
+        <p:spPr>
+          <a:xfrm>
+            <a:off x="4645152" y="1271016"/>
+            <a:ext cx="457200" cy="804672"/>
+          </a:xfrm>
+          <a:prstGeom prst="rect">
+            <a:avLst/>
+          </a:prstGeom>
+          <a:noFill/>
+          <a:ln/>
+        </p:spPr>
+        <p:txBody>
+          <a:bodyPr wrap="square" lIns="0" tIns="0" rIns="0" bIns="0" rtlCol="0" anchor="ctr"/>
+          <a:lstStyle/>
+          <a:p>
+            <a:pPr algn="ctr" indent="0" marL="0">
+              <a:buNone/>
+            </a:pPr>
+            <a:r>
+              <a:rPr lang="en-US" sz="2000" b="1" dirty="0">
+                <a:solidFill>
+                  <a:srgbClr val="C08A2E"/>
+                </a:solidFill>
+                <a:latin typeface="Cambria" pitchFamily="34" charset="0"/>
+                <a:ea typeface="Cambria" pitchFamily="34" charset="-122"/>
+                <a:cs typeface="Cambria" pitchFamily="34" charset="-120"/>
+              </a:rPr>
+              <a:t>1</a:t>
+            </a:r>
+            <a:endParaRPr lang="en-US" sz="2000" dirty="0"/>
+          </a:p>
+        </p:txBody>
+      </p:sp>
+      <p:sp>
+        <p:nvSpPr>
+          <p:cNvPr id="13" name="Text 11"/>
+          <p:cNvSpPr/>
+          <p:nvPr/>
+        </p:nvSpPr>
+        <p:spPr>
+          <a:xfrm>
+            <a:off x="5138928" y="1271016"/>
+            <a:ext cx="3383280" cy="804672"/>
+          </a:xfrm>
+          <a:prstGeom prst="rect">
+            <a:avLst/>
+          </a:prstGeom>
+          <a:noFill/>
+          <a:ln/>
+        </p:spPr>
+        <p:txBody>
+          <a:bodyPr wrap="square" lIns="0" tIns="0" rIns="0" bIns="0" rtlCol="0" anchor="ctr"/>
+          <a:lstStyle/>
+          <a:p>
+            <a:pPr indent="0" marL="0">
+              <a:lnSpc>
+                <a:spcPct val="105000"/>
+              </a:lnSpc>
+              <a:buNone/>
+            </a:pPr>
+            <a:r>
+              <a:rPr lang="en-US" sz="1100" dirty="0">
+                <a:solidFill>
+                  <a:srgbClr val="22313D"/>
+                </a:solidFill>
+                <a:latin typeface="Calibri" pitchFamily="34" charset="0"/>
+                <a:ea typeface="Calibri" pitchFamily="34" charset="-122"/>
+                <a:cs typeface="Calibri" pitchFamily="34" charset="-120"/>
+              </a:rPr>
+              <a:t>Identify a new fiscal agent and legally sunset the 501(c)(3) — by December 2026.</a:t>
+            </a:r>
+            <a:endParaRPr lang="en-US" sz="1100" dirty="0"/>
+          </a:p>
+        </p:txBody>
+      </p:sp>
+      <p:sp>
+        <p:nvSpPr>
+          <p:cNvPr id="14" name="Shape 12"/>
+          <p:cNvSpPr/>
+          <p:nvPr/>
+        </p:nvSpPr>
+        <p:spPr>
+          <a:xfrm>
+            <a:off x="4526280" y="2167128"/>
+            <a:ext cx="4114800" cy="804672"/>
+          </a:xfrm>
+          <a:prstGeom prst="roundRect">
+            <a:avLst>
+              <a:gd name="adj" fmla="val 7955"/>
+            </a:avLst>
+          </a:prstGeom>
+          <a:solidFill>
+            <a:srgbClr val="EEF3F4"/>
+          </a:solidFill>
+          <a:ln/>
+        </p:spPr>
+      </p:sp>
+      <p:sp>
+        <p:nvSpPr>
+          <p:cNvPr id="15" name="Text 13"/>
+          <p:cNvSpPr/>
+          <p:nvPr/>
+        </p:nvSpPr>
+        <p:spPr>
+          <a:xfrm>
+            <a:off x="4645152" y="2167128"/>
+            <a:ext cx="457200" cy="804672"/>
+          </a:xfrm>
+          <a:prstGeom prst="rect">
+            <a:avLst/>
+          </a:prstGeom>
+          <a:noFill/>
+          <a:ln/>
+        </p:spPr>
+        <p:txBody>
+          <a:bodyPr wrap="square" lIns="0" tIns="0" rIns="0" bIns="0" rtlCol="0" anchor="ctr"/>
+          <a:lstStyle/>
+          <a:p>
+            <a:pPr algn="ctr" indent="0" marL="0">
+              <a:buNone/>
+            </a:pPr>
+            <a:r>
+              <a:rPr lang="en-US" sz="2000" b="1" dirty="0">
+                <a:solidFill>
+                  <a:srgbClr val="C08A2E"/>
+                </a:solidFill>
+                <a:latin typeface="Cambria" pitchFamily="34" charset="0"/>
+                <a:ea typeface="Cambria" pitchFamily="34" charset="-122"/>
+                <a:cs typeface="Cambria" pitchFamily="34" charset="-120"/>
+              </a:rPr>
+              <a:t>2</a:t>
+            </a:r>
+            <a:endParaRPr lang="en-US" sz="2000" dirty="0"/>
+          </a:p>
+        </p:txBody>
+      </p:sp>
+      <p:sp>
+        <p:nvSpPr>
+          <p:cNvPr id="16" name="Text 14"/>
+          <p:cNvSpPr/>
+          <p:nvPr/>
+        </p:nvSpPr>
+        <p:spPr>
+          <a:xfrm>
+            <a:off x="5138928" y="2167128"/>
+            <a:ext cx="3383280" cy="804672"/>
+          </a:xfrm>
+          <a:prstGeom prst="rect">
+            <a:avLst/>
+          </a:prstGeom>
+          <a:noFill/>
+          <a:ln/>
+        </p:spPr>
+        <p:txBody>
+          <a:bodyPr wrap="square" lIns="0" tIns="0" rIns="0" bIns="0" rtlCol="0" anchor="ctr"/>
+          <a:lstStyle/>
+          <a:p>
+            <a:pPr indent="0" marL="0">
+              <a:lnSpc>
+                <a:spcPct val="105000"/>
+              </a:lnSpc>
+              <a:buNone/>
+            </a:pPr>
+            <a:r>
+              <a:rPr lang="en-US" sz="1100" dirty="0">
+                <a:solidFill>
+                  <a:srgbClr val="22313D"/>
+                </a:solidFill>
+                <a:latin typeface="Calibri" pitchFamily="34" charset="0"/>
+                <a:ea typeface="Calibri" pitchFamily="34" charset="-122"/>
+                <a:cs typeface="Calibri" pitchFamily="34" charset="-120"/>
+              </a:rPr>
+              <a:t>With the founder and three designated Stewards, decide how $400,000 is distributed to pay ARC's mission forward.</a:t>
+            </a:r>
+            <a:endParaRPr lang="en-US" sz="1100" dirty="0"/>
+          </a:p>
+        </p:txBody>
+      </p:sp>
+      <p:sp>
+        <p:nvSpPr>
+          <p:cNvPr id="17" name="Shape 15"/>
+          <p:cNvSpPr/>
+          <p:nvPr/>
+        </p:nvSpPr>
+        <p:spPr>
+          <a:xfrm>
+            <a:off x="4526280" y="3063240"/>
+            <a:ext cx="4114800" cy="804672"/>
+          </a:xfrm>
+          <a:prstGeom prst="roundRect">
+            <a:avLst>
+              <a:gd name="adj" fmla="val 7955"/>
+            </a:avLst>
+          </a:prstGeom>
+          <a:solidFill>
+            <a:srgbClr val="EEF3F4"/>
+          </a:solidFill>
+          <a:ln/>
+        </p:spPr>
+      </p:sp>
+      <p:sp>
+        <p:nvSpPr>
+          <p:cNvPr id="18" name="Text 16"/>
+          <p:cNvSpPr/>
+          <p:nvPr/>
+        </p:nvSpPr>
+        <p:spPr>
+          <a:xfrm>
+            <a:off x="4645152" y="3063240"/>
+            <a:ext cx="457200" cy="804672"/>
+          </a:xfrm>
+          <a:prstGeom prst="rect">
+            <a:avLst/>
+          </a:prstGeom>
+          <a:noFill/>
+          <a:ln/>
+        </p:spPr>
+        <p:txBody>
+          <a:bodyPr wrap="square" lIns="0" tIns="0" rIns="0" bIns="0" rtlCol="0" anchor="ctr"/>
+          <a:lstStyle/>
+          <a:p>
+            <a:pPr algn="ctr" indent="0" marL="0">
+              <a:buNone/>
+            </a:pPr>
+            <a:r>
+              <a:rPr lang="en-US" sz="2000" b="1" dirty="0">
+                <a:solidFill>
+                  <a:srgbClr val="C08A2E"/>
+                </a:solidFill>
+                <a:latin typeface="Cambria" pitchFamily="34" charset="0"/>
+                <a:ea typeface="Cambria" pitchFamily="34" charset="-122"/>
+                <a:cs typeface="Cambria" pitchFamily="34" charset="-120"/>
+              </a:rPr>
+              <a:t>3</a:t>
+            </a:r>
+            <a:endParaRPr lang="en-US" sz="2000" dirty="0"/>
+          </a:p>
+        </p:txBody>
+      </p:sp>
+      <p:sp>
+        <p:nvSpPr>
+          <p:cNvPr id="19" name="Text 17"/>
+          <p:cNvSpPr/>
+          <p:nvPr/>
+        </p:nvSpPr>
+        <p:spPr>
+          <a:xfrm>
+            <a:off x="5138928" y="3063240"/>
+            <a:ext cx="3383280" cy="804672"/>
+          </a:xfrm>
+          <a:prstGeom prst="rect">
+            <a:avLst/>
+          </a:prstGeom>
+          <a:noFill/>
+          <a:ln/>
+        </p:spPr>
+        <p:txBody>
+          <a:bodyPr wrap="square" lIns="0" tIns="0" rIns="0" bIns="0" rtlCol="0" anchor="ctr"/>
+          <a:lstStyle/>
+          <a:p>
+            <a:pPr indent="0" marL="0">
+              <a:lnSpc>
+                <a:spcPct val="105000"/>
+              </a:lnSpc>
+              <a:buNone/>
+            </a:pPr>
+            <a:r>
+              <a:rPr lang="en-US" sz="1100" dirty="0">
+                <a:solidFill>
+                  <a:srgbClr val="22313D"/>
+                </a:solidFill>
+                <a:latin typeface="Calibri" pitchFamily="34" charset="0"/>
+                <a:ea typeface="Calibri" pitchFamily="34" charset="-122"/>
+                <a:cs typeface="Calibri" pitchFamily="34" charset="-120"/>
+              </a:rPr>
+              <a:t>A celebration event, June 2027 — the final act.</a:t>
+            </a:r>
+            <a:endParaRPr lang="en-US" sz="1100" dirty="0"/>
+          </a:p>
+        </p:txBody>
+      </p:sp>
+      <p:sp>
+        <p:nvSpPr>
+          <p:cNvPr id="20" name="Shape 18"/>
+          <p:cNvSpPr/>
+          <p:nvPr/>
+        </p:nvSpPr>
+        <p:spPr>
+          <a:xfrm>
+            <a:off x="502920" y="4041648"/>
+            <a:ext cx="8138160" cy="914400"/>
+          </a:xfrm>
+          <a:prstGeom prst="roundRect">
+            <a:avLst>
+              <a:gd name="adj" fmla="val 9000"/>
+            </a:avLst>
+          </a:prstGeom>
+          <a:solidFill>
+            <a:srgbClr val="1F3A4D"/>
+          </a:solidFill>
+          <a:ln/>
+        </p:spPr>
+      </p:sp>
+      <p:sp>
+        <p:nvSpPr>
+          <p:cNvPr id="21" name="Text 19"/>
+          <p:cNvSpPr/>
+          <p:nvPr/>
+        </p:nvSpPr>
+        <p:spPr>
+          <a:xfrm>
+            <a:off x="685800" y="4041648"/>
+            <a:ext cx="1234440" cy="914400"/>
+          </a:xfrm>
+          <a:prstGeom prst="rect">
+            <a:avLst/>
+          </a:prstGeom>
+          <a:noFill/>
+          <a:ln/>
+        </p:spPr>
+        <p:txBody>
+          <a:bodyPr wrap="square" lIns="0" tIns="0" rIns="0" bIns="0" rtlCol="0" anchor="ctr"/>
+          <a:lstStyle/>
+          <a:p>
+            <a:pPr indent="0" marL="0">
+              <a:buNone/>
+            </a:pPr>
+            <a:r>
+              <a:rPr lang="en-US" sz="1100" b="1" spc="200" kern="0" dirty="0">
+                <a:solidFill>
+                  <a:srgbClr val="C08A2E"/>
+                </a:solidFill>
+                <a:latin typeface="Calibri" pitchFamily="34" charset="0"/>
+                <a:ea typeface="Calibri" pitchFamily="34" charset="-122"/>
+                <a:cs typeface="Calibri" pitchFamily="34" charset="-120"/>
+              </a:rPr>
+              <a:t>DELIVERABLES</a:t>
+            </a:r>
+            <a:endParaRPr lang="en-US" sz="1100" dirty="0"/>
+          </a:p>
+        </p:txBody>
+      </p:sp>
+      <p:sp>
+        <p:nvSpPr>
+          <p:cNvPr id="22" name="Text 20"/>
+          <p:cNvSpPr/>
+          <p:nvPr/>
+        </p:nvSpPr>
+        <p:spPr>
+          <a:xfrm>
+            <a:off x="2011680" y="4114800"/>
+            <a:ext cx="6492240" cy="777240"/>
+          </a:xfrm>
+          <a:prstGeom prst="rect">
+            <a:avLst/>
+          </a:prstGeom>
+          <a:noFill/>
+          <a:ln/>
+        </p:spPr>
+        <p:txBody>
+          <a:bodyPr wrap="square" lIns="0" tIns="0" rIns="0" bIns="0" rtlCol="0" anchor="ctr"/>
+          <a:lstStyle/>
+          <a:p>
+            <a:pPr indent="0" marL="0">
+              <a:lnSpc>
+                <a:spcPct val="115000"/>
+              </a:lnSpc>
+              <a:buNone/>
+            </a:pPr>
+            <a:r>
+              <a:rPr lang="en-US" sz="1050" dirty="0">
+                <a:solidFill>
+                  <a:srgbClr val="FFFFFF"/>
+                </a:solidFill>
+                <a:latin typeface="Calibri" pitchFamily="34" charset="0"/>
+                <a:ea typeface="Calibri" pitchFamily="34" charset="-122"/>
+                <a:cs typeface="Calibri" pitchFamily="34" charset="-120"/>
+              </a:rPr>
+              <a:t>1  Daily dashboard to Paul, Amy, and the board chair through August.</a:t>
+            </a:r>
+            <a:endParaRPr lang="en-US" sz="1050" dirty="0"/>
+          </a:p>
+          <a:p>
+            <a:pPr indent="0" marL="0">
+              <a:lnSpc>
+                <a:spcPct val="115000"/>
+              </a:lnSpc>
+              <a:buNone/>
+            </a:pPr>
+            <a:r>
+              <a:rPr lang="en-US" sz="1050" dirty="0">
+                <a:solidFill>
+                  <a:srgbClr val="FFFFFF"/>
+                </a:solidFill>
+                <a:latin typeface="Calibri" pitchFamily="34" charset="0"/>
+                <a:ea typeface="Calibri" pitchFamily="34" charset="-122"/>
+                <a:cs typeface="Calibri" pitchFamily="34" charset="-120"/>
+              </a:rPr>
+              <a:t>2  Findings + recommendations from the listening sessions and community survey.</a:t>
+            </a:r>
+            <a:endParaRPr lang="en-US" sz="1050" dirty="0"/>
+          </a:p>
+          <a:p>
+            <a:pPr indent="0" marL="0">
+              <a:lnSpc>
+                <a:spcPct val="115000"/>
+              </a:lnSpc>
+              <a:buNone/>
+            </a:pPr>
+            <a:r>
+              <a:rPr lang="en-US" sz="1050" dirty="0">
+                <a:solidFill>
+                  <a:srgbClr val="FFFFFF"/>
+                </a:solidFill>
+                <a:latin typeface="Calibri" pitchFamily="34" charset="0"/>
+                <a:ea typeface="Calibri" pitchFamily="34" charset="-122"/>
+                <a:cs typeface="Calibri" pitchFamily="34" charset="-120"/>
+              </a:rPr>
+              <a:t>3  60-day legal sunset &amp; dissolution plan — cash assets to a fiscal agent, managed by the 3-person stewardship group with the founder.</a:t>
+            </a:r>
+            <a:endParaRPr lang="en-US" sz="1050" dirty="0"/>
+          </a:p>
+        </p:txBody>
+      </p:sp>
+    </p:spTree>
+  </p:cSld>
+  <p:clrMapOvr>
+    <a:masterClrMapping/>
+  </p:clrMapOvr>
+</p:sld>
+</file>
+
+<file path=ppt/slides/slide4.xml><?xml version="1.0" encoding="utf-8"?>
+<p:sld xmlns:a="http://schemas.openxmlformats.org/drawingml/2006/main" xmlns:r="http://schemas.openxmlformats.org/officeDocument/2006/relationships" xmlns:p="http://schemas.openxmlformats.org/presentationml/2006/main">
+  <p:cSld name="Slide 4">
     <p:bg>
       <p:bgPr>
         <a:solidFill>
@@ -3042,998 +4565,6 @@
                 <a:cs typeface="Calibri" pitchFamily="34" charset="-120"/>
               </a:rPr>
               <a:t>Transitions fail when you optimize one dimension and neglect the other two.</a:t>
-            </a:r>
-            <a:endParaRPr lang="en-US" sz="1350" dirty="0"/>
-          </a:p>
-        </p:txBody>
-      </p:sp>
-    </p:spTree>
-  </p:cSld>
-  <p:clrMapOvr>
-    <a:masterClrMapping/>
-  </p:clrMapOvr>
-</p:sld>
-</file>
-
-<file path=ppt/slides/slide4.xml><?xml version="1.0" encoding="utf-8"?>
-<p:sld xmlns:a="http://schemas.openxmlformats.org/drawingml/2006/main" xmlns:r="http://schemas.openxmlformats.org/officeDocument/2006/relationships" xmlns:p="http://schemas.openxmlformats.org/presentationml/2006/main">
-  <p:cSld name="Slide 4">
-    <p:bg>
-      <p:bgPr>
-        <a:solidFill>
-          <a:srgbClr val="FFFFFF"/>
-        </a:solidFill>
-      </p:bgPr>
-    </p:bg>
-    <p:spTree>
-      <p:nvGrpSpPr>
-        <p:cNvPr id="1" name=""/>
-        <p:cNvGrpSpPr/>
-        <p:nvPr/>
-      </p:nvGrpSpPr>
-      <p:grpSpPr>
-        <a:xfrm>
-          <a:off x="0" y="0"/>
-          <a:ext cx="0" cy="0"/>
-          <a:chOff x="0" y="0"/>
-          <a:chExt cx="0" cy="0"/>
-        </a:xfrm>
-      </p:grpSpPr>
-      <p:sp>
-        <p:nvSpPr>
-          <p:cNvPr id="2" name="Text 0"/>
-          <p:cNvSpPr/>
-          <p:nvPr/>
-        </p:nvSpPr>
-        <p:spPr>
-          <a:xfrm>
-            <a:off x="502920" y="292608"/>
-            <a:ext cx="7498080" cy="566928"/>
-          </a:xfrm>
-          <a:prstGeom prst="rect">
-            <a:avLst/>
-          </a:prstGeom>
-          <a:noFill/>
-          <a:ln/>
-        </p:spPr>
-        <p:txBody>
-          <a:bodyPr wrap="square" lIns="0" tIns="0" rIns="0" bIns="0" rtlCol="0" anchor="ctr"/>
-          <a:lstStyle/>
-          <a:p>
-            <a:pPr indent="0" marL="0">
-              <a:buNone/>
-            </a:pPr>
-            <a:r>
-              <a:rPr lang="en-US" sz="3000" b="1" dirty="0">
-                <a:solidFill>
-                  <a:srgbClr val="C08A2E"/>
-                </a:solidFill>
-                <a:latin typeface="Cambria" pitchFamily="34" charset="0"/>
-                <a:ea typeface="Cambria" pitchFamily="34" charset="-122"/>
-                <a:cs typeface="Cambria" pitchFamily="34" charset="-120"/>
-              </a:rPr>
-              <a:t>It — forensic reconstruction</a:t>
-            </a:r>
-            <a:endParaRPr lang="en-US" sz="3000" dirty="0"/>
-          </a:p>
-        </p:txBody>
-      </p:sp>
-      <p:sp>
-        <p:nvSpPr>
-          <p:cNvPr id="3" name="Shape 1"/>
-          <p:cNvSpPr/>
-          <p:nvPr/>
-        </p:nvSpPr>
-        <p:spPr>
-          <a:xfrm>
-            <a:off x="8403336" y="82296"/>
-            <a:ext cx="164592" cy="164592"/>
-          </a:xfrm>
-          <a:prstGeom prst="ellipse">
-            <a:avLst/>
-          </a:prstGeom>
-          <a:solidFill>
-            <a:srgbClr val="1F3A4D">
-              <a:alpha val="35000"/>
-            </a:srgbClr>
-          </a:solidFill>
-          <a:ln/>
-        </p:spPr>
-      </p:sp>
-      <p:sp>
-        <p:nvSpPr>
-          <p:cNvPr id="4" name="Shape 2"/>
-          <p:cNvSpPr/>
-          <p:nvPr/>
-        </p:nvSpPr>
-        <p:spPr>
-          <a:xfrm>
-            <a:off x="8212409" y="411480"/>
-            <a:ext cx="164592" cy="164592"/>
-          </a:xfrm>
-          <a:prstGeom prst="ellipse">
-            <a:avLst/>
-          </a:prstGeom>
-          <a:solidFill>
-            <a:srgbClr val="2E6E6E">
-              <a:alpha val="35000"/>
-            </a:srgbClr>
-          </a:solidFill>
-          <a:ln/>
-        </p:spPr>
-      </p:sp>
-      <p:sp>
-        <p:nvSpPr>
-          <p:cNvPr id="5" name="Shape 3"/>
-          <p:cNvSpPr/>
-          <p:nvPr/>
-        </p:nvSpPr>
-        <p:spPr>
-          <a:xfrm>
-            <a:off x="8553115" y="370332"/>
-            <a:ext cx="246888" cy="246888"/>
-          </a:xfrm>
-          <a:prstGeom prst="ellipse">
-            <a:avLst/>
-          </a:prstGeom>
-          <a:solidFill>
-            <a:srgbClr val="C08A2E"/>
-          </a:solidFill>
-          <a:ln/>
-        </p:spPr>
-      </p:sp>
-      <p:sp>
-        <p:nvSpPr>
-          <p:cNvPr id="6" name="Text 4"/>
-          <p:cNvSpPr/>
-          <p:nvPr/>
-        </p:nvSpPr>
-        <p:spPr>
-          <a:xfrm>
-            <a:off x="8028432" y="658368"/>
-            <a:ext cx="914400" cy="201168"/>
-          </a:xfrm>
-          <a:prstGeom prst="rect">
-            <a:avLst/>
-          </a:prstGeom>
-          <a:noFill/>
-          <a:ln/>
-        </p:spPr>
-        <p:txBody>
-          <a:bodyPr wrap="square" rtlCol="0" anchor="ctr"/>
-          <a:lstStyle/>
-          <a:p>
-            <a:pPr algn="ctr" indent="0" marL="0">
-              <a:buNone/>
-            </a:pPr>
-            <a:r>
-              <a:rPr lang="en-US" sz="900" b="1" spc="200" kern="0" dirty="0">
-                <a:solidFill>
-                  <a:srgbClr val="C08A2E"/>
-                </a:solidFill>
-                <a:latin typeface="Calibri" pitchFamily="34" charset="0"/>
-                <a:ea typeface="Calibri" pitchFamily="34" charset="-122"/>
-                <a:cs typeface="Calibri" pitchFamily="34" charset="-120"/>
-              </a:rPr>
-              <a:t>It</a:t>
-            </a:r>
-            <a:endParaRPr lang="en-US" sz="900" dirty="0"/>
-          </a:p>
-        </p:txBody>
-      </p:sp>
-      <p:sp>
-        <p:nvSpPr>
-          <p:cNvPr id="7" name="Shape 5"/>
-          <p:cNvSpPr/>
-          <p:nvPr/>
-        </p:nvSpPr>
-        <p:spPr>
-          <a:xfrm>
-            <a:off x="502920" y="1188720"/>
-            <a:ext cx="1389888" cy="603504"/>
-          </a:xfrm>
-          <a:prstGeom prst="roundRect">
-            <a:avLst>
-              <a:gd name="adj" fmla="val 10606"/>
-            </a:avLst>
-          </a:prstGeom>
-          <a:solidFill>
-            <a:srgbClr val="EEF3F4"/>
-          </a:solidFill>
-          <a:ln w="12700">
-            <a:solidFill>
-              <a:srgbClr val="CBD8DB"/>
-            </a:solidFill>
-            <a:prstDash val="solid"/>
-          </a:ln>
-        </p:spPr>
-      </p:sp>
-      <p:sp>
-        <p:nvSpPr>
-          <p:cNvPr id="8" name="Text 6"/>
-          <p:cNvSpPr/>
-          <p:nvPr/>
-        </p:nvSpPr>
-        <p:spPr>
-          <a:xfrm>
-            <a:off x="502920" y="1188720"/>
-            <a:ext cx="1389888" cy="603504"/>
-          </a:xfrm>
-          <a:prstGeom prst="rect">
-            <a:avLst/>
-          </a:prstGeom>
-          <a:noFill/>
-          <a:ln/>
-        </p:spPr>
-        <p:txBody>
-          <a:bodyPr wrap="square" lIns="0" tIns="0" rIns="0" bIns="0" rtlCol="0" anchor="ctr"/>
-          <a:lstStyle/>
-          <a:p>
-            <a:pPr algn="ctr" indent="0" marL="0">
-              <a:buNone/>
-            </a:pPr>
-            <a:r>
-              <a:rPr lang="en-US" sz="1250" b="1" dirty="0">
-                <a:solidFill>
-                  <a:srgbClr val="22313D"/>
-                </a:solidFill>
-                <a:latin typeface="Calibri" pitchFamily="34" charset="0"/>
-                <a:ea typeface="Calibri" pitchFamily="34" charset="-122"/>
-                <a:cs typeface="Calibri" pitchFamily="34" charset="-120"/>
-              </a:rPr>
-              <a:t>Fragments</a:t>
-            </a:r>
-            <a:endParaRPr lang="en-US" sz="1250" dirty="0"/>
-          </a:p>
-        </p:txBody>
-      </p:sp>
-      <p:sp>
-        <p:nvSpPr>
-          <p:cNvPr id="9" name="Text 7"/>
-          <p:cNvSpPr/>
-          <p:nvPr/>
-        </p:nvSpPr>
-        <p:spPr>
-          <a:xfrm>
-            <a:off x="1874520" y="1188720"/>
-            <a:ext cx="274320" cy="603504"/>
-          </a:xfrm>
-          <a:prstGeom prst="rect">
-            <a:avLst/>
-          </a:prstGeom>
-          <a:noFill/>
-          <a:ln/>
-        </p:spPr>
-        <p:txBody>
-          <a:bodyPr wrap="square" lIns="0" tIns="0" rIns="0" bIns="0" rtlCol="0" anchor="ctr"/>
-          <a:lstStyle/>
-          <a:p>
-            <a:pPr algn="ctr" indent="0" marL="0">
-              <a:buNone/>
-            </a:pPr>
-            <a:r>
-              <a:rPr lang="en-US" sz="1400" dirty="0">
-                <a:solidFill>
-                  <a:srgbClr val="888888"/>
-                </a:solidFill>
-              </a:rPr>
-              <a:t>→</a:t>
-            </a:r>
-            <a:endParaRPr lang="en-US" sz="1400" dirty="0"/>
-          </a:p>
-        </p:txBody>
-      </p:sp>
-      <p:sp>
-        <p:nvSpPr>
-          <p:cNvPr id="10" name="Shape 8"/>
-          <p:cNvSpPr/>
-          <p:nvPr/>
-        </p:nvSpPr>
-        <p:spPr>
-          <a:xfrm>
-            <a:off x="2130552" y="1188720"/>
-            <a:ext cx="1389888" cy="603504"/>
-          </a:xfrm>
-          <a:prstGeom prst="roundRect">
-            <a:avLst>
-              <a:gd name="adj" fmla="val 10606"/>
-            </a:avLst>
-          </a:prstGeom>
-          <a:solidFill>
-            <a:srgbClr val="EEF3F4"/>
-          </a:solidFill>
-          <a:ln w="12700">
-            <a:solidFill>
-              <a:srgbClr val="CBD8DB"/>
-            </a:solidFill>
-            <a:prstDash val="solid"/>
-          </a:ln>
-        </p:spPr>
-      </p:sp>
-      <p:sp>
-        <p:nvSpPr>
-          <p:cNvPr id="11" name="Text 9"/>
-          <p:cNvSpPr/>
-          <p:nvPr/>
-        </p:nvSpPr>
-        <p:spPr>
-          <a:xfrm>
-            <a:off x="2130552" y="1188720"/>
-            <a:ext cx="1389888" cy="603504"/>
-          </a:xfrm>
-          <a:prstGeom prst="rect">
-            <a:avLst/>
-          </a:prstGeom>
-          <a:noFill/>
-          <a:ln/>
-        </p:spPr>
-        <p:txBody>
-          <a:bodyPr wrap="square" lIns="0" tIns="0" rIns="0" bIns="0" rtlCol="0" anchor="ctr"/>
-          <a:lstStyle/>
-          <a:p>
-            <a:pPr algn="ctr" indent="0" marL="0">
-              <a:buNone/>
-            </a:pPr>
-            <a:r>
-              <a:rPr lang="en-US" sz="1250" b="1" dirty="0">
-                <a:solidFill>
-                  <a:srgbClr val="22313D"/>
-                </a:solidFill>
-                <a:latin typeface="Calibri" pitchFamily="34" charset="0"/>
-                <a:ea typeface="Calibri" pitchFamily="34" charset="-122"/>
-                <a:cs typeface="Calibri" pitchFamily="34" charset="-120"/>
-              </a:rPr>
-              <a:t>Merge + verify</a:t>
-            </a:r>
-            <a:endParaRPr lang="en-US" sz="1250" dirty="0"/>
-          </a:p>
-        </p:txBody>
-      </p:sp>
-      <p:sp>
-        <p:nvSpPr>
-          <p:cNvPr id="12" name="Text 10"/>
-          <p:cNvSpPr/>
-          <p:nvPr/>
-        </p:nvSpPr>
-        <p:spPr>
-          <a:xfrm>
-            <a:off x="3502152" y="1188720"/>
-            <a:ext cx="274320" cy="603504"/>
-          </a:xfrm>
-          <a:prstGeom prst="rect">
-            <a:avLst/>
-          </a:prstGeom>
-          <a:noFill/>
-          <a:ln/>
-        </p:spPr>
-        <p:txBody>
-          <a:bodyPr wrap="square" lIns="0" tIns="0" rIns="0" bIns="0" rtlCol="0" anchor="ctr"/>
-          <a:lstStyle/>
-          <a:p>
-            <a:pPr algn="ctr" indent="0" marL="0">
-              <a:buNone/>
-            </a:pPr>
-            <a:r>
-              <a:rPr lang="en-US" sz="1400" dirty="0">
-                <a:solidFill>
-                  <a:srgbClr val="888888"/>
-                </a:solidFill>
-              </a:rPr>
-              <a:t>→</a:t>
-            </a:r>
-            <a:endParaRPr lang="en-US" sz="1400" dirty="0"/>
-          </a:p>
-        </p:txBody>
-      </p:sp>
-      <p:sp>
-        <p:nvSpPr>
-          <p:cNvPr id="13" name="Shape 11"/>
-          <p:cNvSpPr/>
-          <p:nvPr/>
-        </p:nvSpPr>
-        <p:spPr>
-          <a:xfrm>
-            <a:off x="3758184" y="1188720"/>
-            <a:ext cx="1389888" cy="603504"/>
-          </a:xfrm>
-          <a:prstGeom prst="roundRect">
-            <a:avLst>
-              <a:gd name="adj" fmla="val 10606"/>
-            </a:avLst>
-          </a:prstGeom>
-          <a:solidFill>
-            <a:srgbClr val="EEF3F4"/>
-          </a:solidFill>
-          <a:ln w="12700">
-            <a:solidFill>
-              <a:srgbClr val="CBD8DB"/>
-            </a:solidFill>
-            <a:prstDash val="solid"/>
-          </a:ln>
-        </p:spPr>
-      </p:sp>
-      <p:sp>
-        <p:nvSpPr>
-          <p:cNvPr id="14" name="Text 12"/>
-          <p:cNvSpPr/>
-          <p:nvPr/>
-        </p:nvSpPr>
-        <p:spPr>
-          <a:xfrm>
-            <a:off x="3758184" y="1188720"/>
-            <a:ext cx="1389888" cy="603504"/>
-          </a:xfrm>
-          <a:prstGeom prst="rect">
-            <a:avLst/>
-          </a:prstGeom>
-          <a:noFill/>
-          <a:ln/>
-        </p:spPr>
-        <p:txBody>
-          <a:bodyPr wrap="square" lIns="0" tIns="0" rIns="0" bIns="0" rtlCol="0" anchor="ctr"/>
-          <a:lstStyle/>
-          <a:p>
-            <a:pPr algn="ctr" indent="0" marL="0">
-              <a:buNone/>
-            </a:pPr>
-            <a:r>
-              <a:rPr lang="en-US" sz="1250" b="1" dirty="0">
-                <a:solidFill>
-                  <a:srgbClr val="22313D"/>
-                </a:solidFill>
-                <a:latin typeface="Calibri" pitchFamily="34" charset="0"/>
-                <a:ea typeface="Calibri" pitchFamily="34" charset="-122"/>
-                <a:cs typeface="Calibri" pitchFamily="34" charset="-120"/>
-              </a:rPr>
-              <a:t>Dedupe review</a:t>
-            </a:r>
-            <a:endParaRPr lang="en-US" sz="1250" dirty="0"/>
-          </a:p>
-        </p:txBody>
-      </p:sp>
-      <p:sp>
-        <p:nvSpPr>
-          <p:cNvPr id="15" name="Text 13"/>
-          <p:cNvSpPr/>
-          <p:nvPr/>
-        </p:nvSpPr>
-        <p:spPr>
-          <a:xfrm>
-            <a:off x="5129784" y="1188720"/>
-            <a:ext cx="274320" cy="603504"/>
-          </a:xfrm>
-          <a:prstGeom prst="rect">
-            <a:avLst/>
-          </a:prstGeom>
-          <a:noFill/>
-          <a:ln/>
-        </p:spPr>
-        <p:txBody>
-          <a:bodyPr wrap="square" lIns="0" tIns="0" rIns="0" bIns="0" rtlCol="0" anchor="ctr"/>
-          <a:lstStyle/>
-          <a:p>
-            <a:pPr algn="ctr" indent="0" marL="0">
-              <a:buNone/>
-            </a:pPr>
-            <a:r>
-              <a:rPr lang="en-US" sz="1400" dirty="0">
-                <a:solidFill>
-                  <a:srgbClr val="888888"/>
-                </a:solidFill>
-              </a:rPr>
-              <a:t>→</a:t>
-            </a:r>
-            <a:endParaRPr lang="en-US" sz="1400" dirty="0"/>
-          </a:p>
-        </p:txBody>
-      </p:sp>
-      <p:sp>
-        <p:nvSpPr>
-          <p:cNvPr id="16" name="Shape 14"/>
-          <p:cNvSpPr/>
-          <p:nvPr/>
-        </p:nvSpPr>
-        <p:spPr>
-          <a:xfrm>
-            <a:off x="5385816" y="1188720"/>
-            <a:ext cx="1389888" cy="603504"/>
-          </a:xfrm>
-          <a:prstGeom prst="roundRect">
-            <a:avLst>
-              <a:gd name="adj" fmla="val 10606"/>
-            </a:avLst>
-          </a:prstGeom>
-          <a:solidFill>
-            <a:srgbClr val="EEF3F4"/>
-          </a:solidFill>
-          <a:ln w="12700">
-            <a:solidFill>
-              <a:srgbClr val="CBD8DB"/>
-            </a:solidFill>
-            <a:prstDash val="solid"/>
-          </a:ln>
-        </p:spPr>
-      </p:sp>
-      <p:sp>
-        <p:nvSpPr>
-          <p:cNvPr id="17" name="Text 15"/>
-          <p:cNvSpPr/>
-          <p:nvPr/>
-        </p:nvSpPr>
-        <p:spPr>
-          <a:xfrm>
-            <a:off x="5385816" y="1188720"/>
-            <a:ext cx="1389888" cy="603504"/>
-          </a:xfrm>
-          <a:prstGeom prst="rect">
-            <a:avLst/>
-          </a:prstGeom>
-          <a:noFill/>
-          <a:ln/>
-        </p:spPr>
-        <p:txBody>
-          <a:bodyPr wrap="square" lIns="0" tIns="0" rIns="0" bIns="0" rtlCol="0" anchor="ctr"/>
-          <a:lstStyle/>
-          <a:p>
-            <a:pPr algn="ctr" indent="0" marL="0">
-              <a:buNone/>
-            </a:pPr>
-            <a:r>
-              <a:rPr lang="en-US" sz="1250" b="1" dirty="0">
-                <a:solidFill>
-                  <a:srgbClr val="22313D"/>
-                </a:solidFill>
-                <a:latin typeface="Calibri" pitchFamily="34" charset="0"/>
-                <a:ea typeface="Calibri" pitchFamily="34" charset="-122"/>
-                <a:cs typeface="Calibri" pitchFamily="34" charset="-120"/>
-              </a:rPr>
-              <a:t>Segment</a:t>
-            </a:r>
-            <a:endParaRPr lang="en-US" sz="1250" dirty="0"/>
-          </a:p>
-        </p:txBody>
-      </p:sp>
-      <p:sp>
-        <p:nvSpPr>
-          <p:cNvPr id="18" name="Text 16"/>
-          <p:cNvSpPr/>
-          <p:nvPr/>
-        </p:nvSpPr>
-        <p:spPr>
-          <a:xfrm>
-            <a:off x="6757416" y="1188720"/>
-            <a:ext cx="274320" cy="603504"/>
-          </a:xfrm>
-          <a:prstGeom prst="rect">
-            <a:avLst/>
-          </a:prstGeom>
-          <a:noFill/>
-          <a:ln/>
-        </p:spPr>
-        <p:txBody>
-          <a:bodyPr wrap="square" lIns="0" tIns="0" rIns="0" bIns="0" rtlCol="0" anchor="ctr"/>
-          <a:lstStyle/>
-          <a:p>
-            <a:pPr algn="ctr" indent="0" marL="0">
-              <a:buNone/>
-            </a:pPr>
-            <a:r>
-              <a:rPr lang="en-US" sz="1400" dirty="0">
-                <a:solidFill>
-                  <a:srgbClr val="888888"/>
-                </a:solidFill>
-              </a:rPr>
-              <a:t>→</a:t>
-            </a:r>
-            <a:endParaRPr lang="en-US" sz="1400" dirty="0"/>
-          </a:p>
-        </p:txBody>
-      </p:sp>
-      <p:sp>
-        <p:nvSpPr>
-          <p:cNvPr id="19" name="Shape 17"/>
-          <p:cNvSpPr/>
-          <p:nvPr/>
-        </p:nvSpPr>
-        <p:spPr>
-          <a:xfrm>
-            <a:off x="7013448" y="1188720"/>
-            <a:ext cx="1389888" cy="603504"/>
-          </a:xfrm>
-          <a:prstGeom prst="roundRect">
-            <a:avLst>
-              <a:gd name="adj" fmla="val 10606"/>
-            </a:avLst>
-          </a:prstGeom>
-          <a:solidFill>
-            <a:srgbClr val="C08A2E"/>
-          </a:solidFill>
-          <a:ln w="12700">
-            <a:solidFill>
-              <a:srgbClr val="C08A2E"/>
-            </a:solidFill>
-            <a:prstDash val="solid"/>
-          </a:ln>
-        </p:spPr>
-      </p:sp>
-      <p:sp>
-        <p:nvSpPr>
-          <p:cNvPr id="20" name="Text 18"/>
-          <p:cNvSpPr/>
-          <p:nvPr/>
-        </p:nvSpPr>
-        <p:spPr>
-          <a:xfrm>
-            <a:off x="7013448" y="1188720"/>
-            <a:ext cx="1389888" cy="603504"/>
-          </a:xfrm>
-          <a:prstGeom prst="rect">
-            <a:avLst/>
-          </a:prstGeom>
-          <a:noFill/>
-          <a:ln/>
-        </p:spPr>
-        <p:txBody>
-          <a:bodyPr wrap="square" lIns="0" tIns="0" rIns="0" bIns="0" rtlCol="0" anchor="ctr"/>
-          <a:lstStyle/>
-          <a:p>
-            <a:pPr algn="ctr" indent="0" marL="0">
-              <a:buNone/>
-            </a:pPr>
-            <a:r>
-              <a:rPr lang="en-US" sz="1250" b="1" dirty="0">
-                <a:solidFill>
-                  <a:srgbClr val="FFFFFF"/>
-                </a:solidFill>
-                <a:latin typeface="Calibri" pitchFamily="34" charset="0"/>
-                <a:ea typeface="Calibri" pitchFamily="34" charset="-122"/>
-                <a:cs typeface="Calibri" pitchFamily="34" charset="-120"/>
-              </a:rPr>
-              <a:t>Master V5</a:t>
-            </a:r>
-            <a:endParaRPr lang="en-US" sz="1250" dirty="0"/>
-          </a:p>
-        </p:txBody>
-      </p:sp>
-      <p:sp>
-        <p:nvSpPr>
-          <p:cNvPr id="21" name="Shape 19"/>
-          <p:cNvSpPr/>
-          <p:nvPr/>
-        </p:nvSpPr>
-        <p:spPr>
-          <a:xfrm>
-            <a:off x="502920" y="2148840"/>
-            <a:ext cx="2606040" cy="1554480"/>
-          </a:xfrm>
-          <a:prstGeom prst="roundRect">
-            <a:avLst>
-              <a:gd name="adj" fmla="val 5294"/>
-            </a:avLst>
-          </a:prstGeom>
-          <a:solidFill>
-            <a:srgbClr val="EEF3F4"/>
-          </a:solidFill>
-          <a:ln/>
-        </p:spPr>
-      </p:sp>
-      <p:sp>
-        <p:nvSpPr>
-          <p:cNvPr id="22" name="Text 20"/>
-          <p:cNvSpPr/>
-          <p:nvPr/>
-        </p:nvSpPr>
-        <p:spPr>
-          <a:xfrm>
-            <a:off x="685800" y="2286000"/>
-            <a:ext cx="2240280" cy="1325880"/>
-          </a:xfrm>
-          <a:prstGeom prst="rect">
-            <a:avLst/>
-          </a:prstGeom>
-          <a:noFill/>
-          <a:ln/>
-        </p:spPr>
-        <p:txBody>
-          <a:bodyPr wrap="square" lIns="0" tIns="0" rIns="0" bIns="0" rtlCol="0" anchor="ctr"/>
-          <a:lstStyle/>
-          <a:p>
-            <a:pPr indent="0" marL="0">
-              <a:lnSpc>
-                <a:spcPct val="110000"/>
-              </a:lnSpc>
-              <a:buNone/>
-            </a:pPr>
-            <a:r>
-              <a:rPr lang="en-US" sz="3000" b="1" dirty="0">
-                <a:solidFill>
-                  <a:srgbClr val="C08A2E"/>
-                </a:solidFill>
-                <a:latin typeface="Calibri" pitchFamily="34" charset="0"/>
-                <a:ea typeface="Calibri" pitchFamily="34" charset="-122"/>
-                <a:cs typeface="Calibri" pitchFamily="34" charset="-120"/>
-              </a:rPr>
-              <a:t>~2,400</a:t>
-            </a:r>
-            <a:endParaRPr lang="en-US" sz="3000" dirty="0"/>
-          </a:p>
-          <a:p>
-            <a:pPr indent="0" marL="0">
-              <a:lnSpc>
-                <a:spcPct val="110000"/>
-              </a:lnSpc>
-              <a:buNone/>
-            </a:pPr>
-            <a:r>
-              <a:rPr lang="en-US" sz="1150" dirty="0">
-                <a:solidFill>
-                  <a:srgbClr val="22313D"/>
-                </a:solidFill>
-                <a:latin typeface="Calibri" pitchFamily="34" charset="0"/>
-                <a:ea typeface="Calibri" pitchFamily="34" charset="-122"/>
-                <a:cs typeface="Calibri" pitchFamily="34" charset="-120"/>
-              </a:rPr>
-              <a:t>contacts reconstructed into one verified master list (V1→V5)</a:t>
-            </a:r>
-            <a:endParaRPr lang="en-US" sz="3000" dirty="0"/>
-          </a:p>
-        </p:txBody>
-      </p:sp>
-      <p:sp>
-        <p:nvSpPr>
-          <p:cNvPr id="23" name="Shape 21"/>
-          <p:cNvSpPr/>
-          <p:nvPr/>
-        </p:nvSpPr>
-        <p:spPr>
-          <a:xfrm>
-            <a:off x="3291840" y="2148840"/>
-            <a:ext cx="2606040" cy="1554480"/>
-          </a:xfrm>
-          <a:prstGeom prst="roundRect">
-            <a:avLst>
-              <a:gd name="adj" fmla="val 5294"/>
-            </a:avLst>
-          </a:prstGeom>
-          <a:solidFill>
-            <a:srgbClr val="EEF3F4"/>
-          </a:solidFill>
-          <a:ln/>
-        </p:spPr>
-      </p:sp>
-      <p:sp>
-        <p:nvSpPr>
-          <p:cNvPr id="24" name="Text 22"/>
-          <p:cNvSpPr/>
-          <p:nvPr/>
-        </p:nvSpPr>
-        <p:spPr>
-          <a:xfrm>
-            <a:off x="3474720" y="2286000"/>
-            <a:ext cx="2240280" cy="1325880"/>
-          </a:xfrm>
-          <a:prstGeom prst="rect">
-            <a:avLst/>
-          </a:prstGeom>
-          <a:noFill/>
-          <a:ln/>
-        </p:spPr>
-        <p:txBody>
-          <a:bodyPr wrap="square" lIns="0" tIns="0" rIns="0" bIns="0" rtlCol="0" anchor="ctr"/>
-          <a:lstStyle/>
-          <a:p>
-            <a:pPr indent="0" marL="0">
-              <a:lnSpc>
-                <a:spcPct val="110000"/>
-              </a:lnSpc>
-              <a:buNone/>
-            </a:pPr>
-            <a:r>
-              <a:rPr lang="en-US" sz="3000" b="1" dirty="0">
-                <a:solidFill>
-                  <a:srgbClr val="C08A2E"/>
-                </a:solidFill>
-                <a:latin typeface="Calibri" pitchFamily="34" charset="0"/>
-                <a:ea typeface="Calibri" pitchFamily="34" charset="-122"/>
-                <a:cs typeface="Calibri" pitchFamily="34" charset="-120"/>
-              </a:rPr>
-              <a:t>n = 472</a:t>
-            </a:r>
-            <a:endParaRPr lang="en-US" sz="3000" dirty="0"/>
-          </a:p>
-          <a:p>
-            <a:pPr indent="0" marL="0">
-              <a:lnSpc>
-                <a:spcPct val="110000"/>
-              </a:lnSpc>
-              <a:buNone/>
-            </a:pPr>
-            <a:r>
-              <a:rPr lang="en-US" sz="1150" dirty="0">
-                <a:solidFill>
-                  <a:srgbClr val="22313D"/>
-                </a:solidFill>
-                <a:latin typeface="Calibri" pitchFamily="34" charset="0"/>
-                <a:ea typeface="Calibri" pitchFamily="34" charset="-122"/>
-                <a:cs typeface="Calibri" pitchFamily="34" charset="-120"/>
-              </a:rPr>
-              <a:t>known opt-in supporters, imported with provenance</a:t>
-            </a:r>
-            <a:endParaRPr lang="en-US" sz="3000" dirty="0"/>
-          </a:p>
-        </p:txBody>
-      </p:sp>
-      <p:sp>
-        <p:nvSpPr>
-          <p:cNvPr id="25" name="Shape 23"/>
-          <p:cNvSpPr/>
-          <p:nvPr/>
-        </p:nvSpPr>
-        <p:spPr>
-          <a:xfrm>
-            <a:off x="6080760" y="2148840"/>
-            <a:ext cx="2606040" cy="1554480"/>
-          </a:xfrm>
-          <a:prstGeom prst="roundRect">
-            <a:avLst>
-              <a:gd name="adj" fmla="val 5294"/>
-            </a:avLst>
-          </a:prstGeom>
-          <a:solidFill>
-            <a:srgbClr val="EEF3F4"/>
-          </a:solidFill>
-          <a:ln/>
-        </p:spPr>
-      </p:sp>
-      <p:sp>
-        <p:nvSpPr>
-          <p:cNvPr id="26" name="Text 24"/>
-          <p:cNvSpPr/>
-          <p:nvPr/>
-        </p:nvSpPr>
-        <p:spPr>
-          <a:xfrm>
-            <a:off x="6263640" y="2286000"/>
-            <a:ext cx="2240280" cy="1325880"/>
-          </a:xfrm>
-          <a:prstGeom prst="rect">
-            <a:avLst/>
-          </a:prstGeom>
-          <a:noFill/>
-          <a:ln/>
-        </p:spPr>
-        <p:txBody>
-          <a:bodyPr wrap="square" lIns="0" tIns="0" rIns="0" bIns="0" rtlCol="0" anchor="ctr"/>
-          <a:lstStyle/>
-          <a:p>
-            <a:pPr indent="0" marL="0">
-              <a:lnSpc>
-                <a:spcPct val="110000"/>
-              </a:lnSpc>
-              <a:buNone/>
-            </a:pPr>
-            <a:r>
-              <a:rPr lang="en-US" sz="3000" b="1" dirty="0">
-                <a:solidFill>
-                  <a:srgbClr val="C08A2E"/>
-                </a:solidFill>
-                <a:latin typeface="Calibri" pitchFamily="34" charset="0"/>
-                <a:ea typeface="Calibri" pitchFamily="34" charset="-122"/>
-                <a:cs typeface="Calibri" pitchFamily="34" charset="-120"/>
-              </a:rPr>
-              <a:t>n = 1,984</a:t>
-            </a:r>
-            <a:endParaRPr lang="en-US" sz="3000" dirty="0"/>
-          </a:p>
-          <a:p>
-            <a:pPr indent="0" marL="0">
-              <a:lnSpc>
-                <a:spcPct val="110000"/>
-              </a:lnSpc>
-              <a:buNone/>
-            </a:pPr>
-            <a:r>
-              <a:rPr lang="en-US" sz="1150" dirty="0">
-                <a:solidFill>
-                  <a:srgbClr val="22313D"/>
-                </a:solidFill>
-                <a:latin typeface="Calibri" pitchFamily="34" charset="0"/>
-                <a:ea typeface="Calibri" pitchFamily="34" charset="-122"/>
-                <a:cs typeface="Calibri" pitchFamily="34" charset="-120"/>
-              </a:rPr>
-              <a:t>unknown-connection contacts, segmented for consent-first outreach</a:t>
-            </a:r>
-            <a:endParaRPr lang="en-US" sz="3000" dirty="0"/>
-          </a:p>
-        </p:txBody>
-      </p:sp>
-      <p:sp>
-        <p:nvSpPr>
-          <p:cNvPr id="27" name="Text 25"/>
-          <p:cNvSpPr/>
-          <p:nvPr/>
-        </p:nvSpPr>
-        <p:spPr>
-          <a:xfrm>
-            <a:off x="502920" y="3977640"/>
-            <a:ext cx="8138160" cy="365760"/>
-          </a:xfrm>
-          <a:prstGeom prst="rect">
-            <a:avLst/>
-          </a:prstGeom>
-          <a:noFill/>
-          <a:ln/>
-        </p:spPr>
-        <p:txBody>
-          <a:bodyPr wrap="square" lIns="0" tIns="0" rIns="0" bIns="0" rtlCol="0" anchor="ctr"/>
-          <a:lstStyle/>
-          <a:p>
-            <a:pPr indent="0" marL="0">
-              <a:buNone/>
-            </a:pPr>
-            <a:r>
-              <a:rPr lang="en-US" sz="1350" dirty="0">
-                <a:solidFill>
-                  <a:srgbClr val="22313D"/>
-                </a:solidFill>
-                <a:latin typeface="Calibri" pitchFamily="34" charset="0"/>
-                <a:ea typeface="Calibri" pitchFamily="34" charset="-122"/>
-                <a:cs typeface="Calibri" pitchFamily="34" charset="-120"/>
-              </a:rPr>
-              <a:t>Plus the operating layer nobody had: </a:t>
-            </a:r>
-            <a:pPr indent="0" marL="0">
-              <a:buNone/>
-            </a:pPr>
-            <a:r>
-              <a:rPr lang="en-US" sz="1350" b="1" dirty="0">
-                <a:solidFill>
-                  <a:srgbClr val="1F3A4D"/>
-                </a:solidFill>
-                <a:latin typeface="Calibri" pitchFamily="34" charset="0"/>
-                <a:ea typeface="Calibri" pitchFamily="34" charset="-122"/>
-                <a:cs typeface="Calibri" pitchFamily="34" charset="-120"/>
-              </a:rPr>
-              <a:t>new tech stack, new website, email infrastructure, donation rails.</a:t>
-            </a:r>
-            <a:endParaRPr lang="en-US" sz="1350" dirty="0"/>
-          </a:p>
-        </p:txBody>
-      </p:sp>
-      <p:sp>
-        <p:nvSpPr>
-          <p:cNvPr id="28" name="Text 26"/>
-          <p:cNvSpPr/>
-          <p:nvPr/>
-        </p:nvSpPr>
-        <p:spPr>
-          <a:xfrm>
-            <a:off x="502920" y="4590288"/>
-            <a:ext cx="8138160" cy="365760"/>
-          </a:xfrm>
-          <a:prstGeom prst="rect">
-            <a:avLst/>
-          </a:prstGeom>
-          <a:noFill/>
-          <a:ln/>
-        </p:spPr>
-        <p:txBody>
-          <a:bodyPr wrap="square" lIns="0" tIns="0" rIns="0" bIns="0" rtlCol="0" anchor="ctr"/>
-          <a:lstStyle/>
-          <a:p>
-            <a:pPr indent="0" marL="0">
-              <a:buNone/>
-            </a:pPr>
-            <a:r>
-              <a:rPr lang="en-US" sz="1350" i="1" dirty="0">
-                <a:solidFill>
-                  <a:srgbClr val="888888"/>
-                </a:solidFill>
-                <a:latin typeface="Calibri" pitchFamily="34" charset="0"/>
-                <a:ea typeface="Calibri" pitchFamily="34" charset="-122"/>
-                <a:cs typeface="Calibri" pitchFamily="34" charset="-120"/>
-              </a:rPr>
-              <a:t>Institutional memory is a data problem before it is a story problem.</a:t>
             </a:r>
             <a:endParaRPr lang="en-US" sz="1350" dirty="0"/>
           </a:p>
@@ -4098,13 +4629,13 @@
             <a:r>
               <a:rPr lang="en-US" sz="3000" b="1" dirty="0">
                 <a:solidFill>
-                  <a:srgbClr val="2E6E6E"/>
+                  <a:srgbClr val="C08A2E"/>
                 </a:solidFill>
                 <a:latin typeface="Cambria" pitchFamily="34" charset="0"/>
                 <a:ea typeface="Cambria" pitchFamily="34" charset="-122"/>
                 <a:cs typeface="Cambria" pitchFamily="34" charset="-120"/>
               </a:rPr>
-              <a:t>We — the Season of Listening</a:t>
+              <a:t>It — forensic reconstruction</a:t>
             </a:r>
             <a:endParaRPr lang="en-US" sz="3000" dirty="0"/>
           </a:p>
@@ -4140,34 +4671,14 @@
         </p:nvSpPr>
         <p:spPr>
           <a:xfrm>
-            <a:off x="8171261" y="370332"/>
-            <a:ext cx="246888" cy="246888"/>
+            <a:off x="8212409" y="411480"/>
+            <a:ext cx="164592" cy="164592"/>
           </a:xfrm>
           <a:prstGeom prst="ellipse">
             <a:avLst/>
           </a:prstGeom>
           <a:solidFill>
-            <a:srgbClr val="2E6E6E"/>
-          </a:solidFill>
-          <a:ln/>
-        </p:spPr>
-      </p:sp>
-      <p:sp>
-        <p:nvSpPr>
-          <p:cNvPr id="5" name="Shape 3"/>
-          <p:cNvSpPr/>
-          <p:nvPr/>
-        </p:nvSpPr>
-        <p:spPr>
-          <a:xfrm>
-            <a:off x="8594263" y="411480"/>
-            <a:ext cx="164592" cy="164592"/>
-          </a:xfrm>
-          <a:prstGeom prst="ellipse">
-            <a:avLst/>
-          </a:prstGeom>
-          <a:solidFill>
-            <a:srgbClr val="C08A2E">
+            <a:srgbClr val="2E6E6E">
               <a:alpha val="35000"/>
             </a:srgbClr>
           </a:solidFill>
@@ -4176,6 +4687,26 @@
       </p:sp>
       <p:sp>
         <p:nvSpPr>
+          <p:cNvPr id="5" name="Shape 3"/>
+          <p:cNvSpPr/>
+          <p:nvPr/>
+        </p:nvSpPr>
+        <p:spPr>
+          <a:xfrm>
+            <a:off x="8553115" y="370332"/>
+            <a:ext cx="246888" cy="246888"/>
+          </a:xfrm>
+          <a:prstGeom prst="ellipse">
+            <a:avLst/>
+          </a:prstGeom>
+          <a:solidFill>
+            <a:srgbClr val="C08A2E"/>
+          </a:solidFill>
+          <a:ln/>
+        </p:spPr>
+      </p:sp>
+      <p:sp>
+        <p:nvSpPr>
           <p:cNvPr id="6" name="Text 4"/>
           <p:cNvSpPr/>
           <p:nvPr/>
@@ -4201,13 +4732,13 @@
             <a:r>
               <a:rPr lang="en-US" sz="900" b="1" spc="200" kern="0" dirty="0">
                 <a:solidFill>
-                  <a:srgbClr val="2E6E6E"/>
-                </a:solidFill>
-                <a:latin typeface="Calibri" pitchFamily="34" charset="0"/>
-                <a:ea typeface="Calibri" pitchFamily="34" charset="-122"/>
-                <a:cs typeface="Calibri" pitchFamily="34" charset="-120"/>
-              </a:rPr>
-              <a:t>We</a:t>
+                  <a:srgbClr val="C08A2E"/>
+                </a:solidFill>
+                <a:latin typeface="Calibri" pitchFamily="34" charset="0"/>
+                <a:ea typeface="Calibri" pitchFamily="34" charset="-122"/>
+                <a:cs typeface="Calibri" pitchFamily="34" charset="-120"/>
+              </a:rPr>
+              <a:t>It</a:t>
             </a:r>
             <a:endParaRPr lang="en-US" sz="900" dirty="0"/>
           </a:p>
@@ -4215,210 +4746,26 @@
       </p:sp>
       <p:sp>
         <p:nvSpPr>
-          <p:cNvPr id="7" name="Text 5"/>
-          <p:cNvSpPr/>
-          <p:nvPr/>
-        </p:nvSpPr>
-        <p:spPr>
-          <a:xfrm>
-            <a:off x="502920" y="1115568"/>
-            <a:ext cx="1627632" cy="1143000"/>
-          </a:xfrm>
-          <a:prstGeom prst="rect">
-            <a:avLst/>
-          </a:prstGeom>
-          <a:noFill/>
-          <a:ln/>
-        </p:spPr>
-        <p:txBody>
-          <a:bodyPr wrap="square" lIns="0" tIns="0" rIns="0" bIns="0" rtlCol="0" anchor="ctr"/>
-          <a:lstStyle/>
-          <a:p>
-            <a:pPr indent="0" marL="0">
-              <a:lnSpc>
-                <a:spcPct val="105000"/>
-              </a:lnSpc>
-              <a:buNone/>
-            </a:pPr>
-            <a:r>
-              <a:rPr lang="en-US" sz="3000" b="1" dirty="0">
-                <a:solidFill>
-                  <a:srgbClr val="2E6E6E"/>
-                </a:solidFill>
-                <a:latin typeface="Calibri" pitchFamily="34" charset="0"/>
-                <a:ea typeface="Calibri" pitchFamily="34" charset="-122"/>
-                <a:cs typeface="Calibri" pitchFamily="34" charset="-120"/>
-              </a:rPr>
-              <a:t>2,436</a:t>
-            </a:r>
-            <a:endParaRPr lang="en-US" sz="3000" dirty="0"/>
-          </a:p>
-          <a:p>
-            <a:pPr indent="0" marL="0">
-              <a:lnSpc>
-                <a:spcPct val="105000"/>
-              </a:lnSpc>
-              <a:buNone/>
-            </a:pPr>
-            <a:r>
-              <a:rPr lang="en-US" sz="1000" dirty="0">
-                <a:solidFill>
-                  <a:srgbClr val="22313D"/>
-                </a:solidFill>
-                <a:latin typeface="Calibri" pitchFamily="34" charset="0"/>
-                <a:ea typeface="Calibri" pitchFamily="34" charset="-122"/>
-                <a:cs typeface="Calibri" pitchFamily="34" charset="-120"/>
-              </a:rPr>
-              <a:t>campaign launch emails delivered</a:t>
-            </a:r>
-            <a:endParaRPr lang="en-US" sz="3000" dirty="0"/>
-          </a:p>
-        </p:txBody>
-      </p:sp>
-      <p:sp>
-        <p:nvSpPr>
-          <p:cNvPr id="8" name="Text 6"/>
-          <p:cNvSpPr/>
-          <p:nvPr/>
-        </p:nvSpPr>
-        <p:spPr>
-          <a:xfrm>
-            <a:off x="2258568" y="1115568"/>
-            <a:ext cx="1627632" cy="1143000"/>
-          </a:xfrm>
-          <a:prstGeom prst="rect">
-            <a:avLst/>
-          </a:prstGeom>
-          <a:noFill/>
-          <a:ln/>
-        </p:spPr>
-        <p:txBody>
-          <a:bodyPr wrap="square" lIns="0" tIns="0" rIns="0" bIns="0" rtlCol="0" anchor="ctr"/>
-          <a:lstStyle/>
-          <a:p>
-            <a:pPr indent="0" marL="0">
-              <a:lnSpc>
-                <a:spcPct val="105000"/>
-              </a:lnSpc>
-              <a:buNone/>
-            </a:pPr>
-            <a:r>
-              <a:rPr lang="en-US" sz="3000" b="1" dirty="0">
-                <a:solidFill>
-                  <a:srgbClr val="2E6E6E"/>
-                </a:solidFill>
-                <a:latin typeface="Calibri" pitchFamily="34" charset="0"/>
-                <a:ea typeface="Calibri" pitchFamily="34" charset="-122"/>
-                <a:cs typeface="Calibri" pitchFamily="34" charset="-120"/>
-              </a:rPr>
-              <a:t>97.95%</a:t>
-            </a:r>
-            <a:endParaRPr lang="en-US" sz="3000" dirty="0"/>
-          </a:p>
-          <a:p>
-            <a:pPr indent="0" marL="0">
-              <a:lnSpc>
-                <a:spcPct val="105000"/>
-              </a:lnSpc>
-              <a:buNone/>
-            </a:pPr>
-            <a:r>
-              <a:rPr lang="en-US" sz="1000" dirty="0">
-                <a:solidFill>
-                  <a:srgbClr val="22313D"/>
-                </a:solidFill>
-                <a:latin typeface="Calibri" pitchFamily="34" charset="0"/>
-                <a:ea typeface="Calibri" pitchFamily="34" charset="-122"/>
-                <a:cs typeface="Calibri" pitchFamily="34" charset="-120"/>
-              </a:rPr>
-              <a:t>delivery rate on a rebuilt list</a:t>
-            </a:r>
-            <a:endParaRPr lang="en-US" sz="3000" dirty="0"/>
-          </a:p>
-        </p:txBody>
-      </p:sp>
-      <p:sp>
-        <p:nvSpPr>
-          <p:cNvPr id="9" name="Text 7"/>
-          <p:cNvSpPr/>
-          <p:nvPr/>
-        </p:nvSpPr>
-        <p:spPr>
-          <a:xfrm>
-            <a:off x="4014216" y="1115568"/>
-            <a:ext cx="1627632" cy="1143000"/>
-          </a:xfrm>
-          <a:prstGeom prst="rect">
-            <a:avLst/>
-          </a:prstGeom>
-          <a:noFill/>
-          <a:ln/>
-        </p:spPr>
-        <p:txBody>
-          <a:bodyPr wrap="square" lIns="0" tIns="0" rIns="0" bIns="0" rtlCol="0" anchor="ctr"/>
-          <a:lstStyle/>
-          <a:p>
-            <a:pPr indent="0" marL="0">
-              <a:lnSpc>
-                <a:spcPct val="105000"/>
-              </a:lnSpc>
-              <a:buNone/>
-            </a:pPr>
-            <a:r>
-              <a:rPr lang="en-US" sz="3000" b="1" dirty="0">
-                <a:solidFill>
-                  <a:srgbClr val="2E6E6E"/>
-                </a:solidFill>
-                <a:latin typeface="Calibri" pitchFamily="34" charset="0"/>
-                <a:ea typeface="Calibri" pitchFamily="34" charset="-122"/>
-                <a:cs typeface="Calibri" pitchFamily="34" charset="-120"/>
-              </a:rPr>
-              <a:t>31.5%</a:t>
-            </a:r>
-            <a:endParaRPr lang="en-US" sz="3000" dirty="0"/>
-          </a:p>
-          <a:p>
-            <a:pPr indent="0" marL="0">
-              <a:lnSpc>
-                <a:spcPct val="105000"/>
-              </a:lnSpc>
-              <a:buNone/>
-            </a:pPr>
-            <a:r>
-              <a:rPr lang="en-US" sz="1000" dirty="0">
-                <a:solidFill>
-                  <a:srgbClr val="22313D"/>
-                </a:solidFill>
-                <a:latin typeface="Calibri" pitchFamily="34" charset="0"/>
-                <a:ea typeface="Calibri" pitchFamily="34" charset="-122"/>
-                <a:cs typeface="Calibri" pitchFamily="34" charset="-120"/>
-              </a:rPr>
-              <a:t>opens — sector average is ~28.6%</a:t>
-            </a:r>
-            <a:endParaRPr lang="en-US" sz="3000" dirty="0"/>
-          </a:p>
-        </p:txBody>
-      </p:sp>
-      <p:sp>
-        <p:nvSpPr>
-          <p:cNvPr id="10" name="Shape 8"/>
-          <p:cNvSpPr/>
-          <p:nvPr/>
-        </p:nvSpPr>
-        <p:spPr>
-          <a:xfrm>
-            <a:off x="502920" y="2487168"/>
-            <a:ext cx="2377440" cy="384048"/>
-          </a:xfrm>
-          <a:prstGeom prst="rect">
-            <a:avLst/>
+          <p:cNvPr id="7" name="Shape 5"/>
+          <p:cNvSpPr/>
+          <p:nvPr/>
+        </p:nvSpPr>
+        <p:spPr>
+          <a:xfrm>
+            <a:off x="502920" y="1188720"/>
+            <a:ext cx="1389888" cy="603504"/>
+          </a:xfrm>
+          <a:prstGeom prst="roundRect">
+            <a:avLst>
+              <a:gd name="adj" fmla="val 10606"/>
+            </a:avLst>
           </a:prstGeom>
           <a:solidFill>
-            <a:srgbClr val="2E6E6E"/>
+            <a:srgbClr val="EEF3F4"/>
           </a:solidFill>
-          <a:ln w="9525">
+          <a:ln w="12700">
             <a:solidFill>
-              <a:srgbClr val="D5DFE1"/>
+              <a:srgbClr val="CBD8DB"/>
             </a:solidFill>
             <a:prstDash val="solid"/>
           </a:ln>
@@ -4426,14 +4773,14 @@
       </p:sp>
       <p:sp>
         <p:nvSpPr>
-          <p:cNvPr id="11" name="Text 9"/>
-          <p:cNvSpPr/>
-          <p:nvPr/>
-        </p:nvSpPr>
-        <p:spPr>
-          <a:xfrm>
-            <a:off x="576072" y="2487168"/>
-            <a:ext cx="2231136" cy="384048"/>
+          <p:cNvPr id="8" name="Text 6"/>
+          <p:cNvSpPr/>
+          <p:nvPr/>
+        </p:nvSpPr>
+        <p:spPr>
+          <a:xfrm>
+            <a:off x="502920" y="1188720"/>
+            <a:ext cx="1389888" cy="603504"/>
           </a:xfrm>
           <a:prstGeom prst="rect">
             <a:avLst/>
@@ -4445,44 +4792,82 @@
           <a:bodyPr wrap="square" lIns="0" tIns="0" rIns="0" bIns="0" rtlCol="0" anchor="ctr"/>
           <a:lstStyle/>
           <a:p>
-            <a:pPr algn="l" indent="0" marL="0">
-              <a:buNone/>
-            </a:pPr>
-            <a:r>
-              <a:rPr lang="en-US" sz="1100" b="1" dirty="0">
-                <a:solidFill>
-                  <a:srgbClr val="FFFFFF"/>
-                </a:solidFill>
-                <a:latin typeface="Calibri" pitchFamily="34" charset="0"/>
-                <a:ea typeface="Calibri" pitchFamily="34" charset="-122"/>
-                <a:cs typeface="Calibri" pitchFamily="34" charset="-120"/>
-              </a:rPr>
-              <a:t>Stream</a:t>
-            </a:r>
-            <a:endParaRPr lang="en-US" sz="1100" dirty="0"/>
-          </a:p>
-        </p:txBody>
-      </p:sp>
-      <p:sp>
-        <p:nvSpPr>
-          <p:cNvPr id="12" name="Shape 10"/>
-          <p:cNvSpPr/>
-          <p:nvPr/>
-        </p:nvSpPr>
-        <p:spPr>
-          <a:xfrm>
-            <a:off x="2880360" y="2487168"/>
-            <a:ext cx="868680" cy="384048"/>
-          </a:xfrm>
-          <a:prstGeom prst="rect">
-            <a:avLst/>
+            <a:pPr algn="ctr" indent="0" marL="0">
+              <a:buNone/>
+            </a:pPr>
+            <a:r>
+              <a:rPr lang="en-US" sz="1250" b="1" dirty="0">
+                <a:solidFill>
+                  <a:srgbClr val="22313D"/>
+                </a:solidFill>
+                <a:latin typeface="Calibri" pitchFamily="34" charset="0"/>
+                <a:ea typeface="Calibri" pitchFamily="34" charset="-122"/>
+                <a:cs typeface="Calibri" pitchFamily="34" charset="-120"/>
+              </a:rPr>
+              <a:t>Fragments</a:t>
+            </a:r>
+            <a:endParaRPr lang="en-US" sz="1250" dirty="0"/>
+          </a:p>
+        </p:txBody>
+      </p:sp>
+      <p:sp>
+        <p:nvSpPr>
+          <p:cNvPr id="9" name="Text 7"/>
+          <p:cNvSpPr/>
+          <p:nvPr/>
+        </p:nvSpPr>
+        <p:spPr>
+          <a:xfrm>
+            <a:off x="1874520" y="1188720"/>
+            <a:ext cx="274320" cy="603504"/>
+          </a:xfrm>
+          <a:prstGeom prst="rect">
+            <a:avLst/>
+          </a:prstGeom>
+          <a:noFill/>
+          <a:ln/>
+        </p:spPr>
+        <p:txBody>
+          <a:bodyPr wrap="square" lIns="0" tIns="0" rIns="0" bIns="0" rtlCol="0" anchor="ctr"/>
+          <a:lstStyle/>
+          <a:p>
+            <a:pPr algn="ctr" indent="0" marL="0">
+              <a:buNone/>
+            </a:pPr>
+            <a:r>
+              <a:rPr lang="en-US" sz="1400" dirty="0">
+                <a:solidFill>
+                  <a:srgbClr val="888888"/>
+                </a:solidFill>
+              </a:rPr>
+              <a:t>→</a:t>
+            </a:r>
+            <a:endParaRPr lang="en-US" sz="1400" dirty="0"/>
+          </a:p>
+        </p:txBody>
+      </p:sp>
+      <p:sp>
+        <p:nvSpPr>
+          <p:cNvPr id="10" name="Shape 8"/>
+          <p:cNvSpPr/>
+          <p:nvPr/>
+        </p:nvSpPr>
+        <p:spPr>
+          <a:xfrm>
+            <a:off x="2130552" y="1188720"/>
+            <a:ext cx="1389888" cy="603504"/>
+          </a:xfrm>
+          <a:prstGeom prst="roundRect">
+            <a:avLst>
+              <a:gd name="adj" fmla="val 10606"/>
+            </a:avLst>
           </a:prstGeom>
           <a:solidFill>
-            <a:srgbClr val="2E6E6E"/>
+            <a:srgbClr val="EEF3F4"/>
           </a:solidFill>
-          <a:ln w="9525">
+          <a:ln w="12700">
             <a:solidFill>
-              <a:srgbClr val="D5DFE1"/>
+              <a:srgbClr val="CBD8DB"/>
             </a:solidFill>
             <a:prstDash val="solid"/>
           </a:ln>
@@ -4490,14 +4875,14 @@
       </p:sp>
       <p:sp>
         <p:nvSpPr>
-          <p:cNvPr id="13" name="Text 11"/>
-          <p:cNvSpPr/>
-          <p:nvPr/>
-        </p:nvSpPr>
-        <p:spPr>
-          <a:xfrm>
-            <a:off x="2953512" y="2487168"/>
-            <a:ext cx="722376" cy="384048"/>
+          <p:cNvPr id="11" name="Text 9"/>
+          <p:cNvSpPr/>
+          <p:nvPr/>
+        </p:nvSpPr>
+        <p:spPr>
+          <a:xfrm>
+            <a:off x="2130552" y="1188720"/>
+            <a:ext cx="1389888" cy="603504"/>
           </a:xfrm>
           <a:prstGeom prst="rect">
             <a:avLst/>
@@ -4513,40 +4898,78 @@
               <a:buNone/>
             </a:pPr>
             <a:r>
-              <a:rPr lang="en-US" sz="1100" b="1" dirty="0">
-                <a:solidFill>
-                  <a:srgbClr val="FFFFFF"/>
-                </a:solidFill>
-                <a:latin typeface="Calibri" pitchFamily="34" charset="0"/>
-                <a:ea typeface="Calibri" pitchFamily="34" charset="-122"/>
-                <a:cs typeface="Calibri" pitchFamily="34" charset="-120"/>
-              </a:rPr>
-              <a:t>Floor</a:t>
-            </a:r>
-            <a:endParaRPr lang="en-US" sz="1100" dirty="0"/>
-          </a:p>
-        </p:txBody>
-      </p:sp>
-      <p:sp>
-        <p:nvSpPr>
-          <p:cNvPr id="14" name="Shape 12"/>
-          <p:cNvSpPr/>
-          <p:nvPr/>
-        </p:nvSpPr>
-        <p:spPr>
-          <a:xfrm>
-            <a:off x="3749040" y="2487168"/>
-            <a:ext cx="868680" cy="384048"/>
-          </a:xfrm>
-          <a:prstGeom prst="rect">
-            <a:avLst/>
+              <a:rPr lang="en-US" sz="1250" b="1" dirty="0">
+                <a:solidFill>
+                  <a:srgbClr val="22313D"/>
+                </a:solidFill>
+                <a:latin typeface="Calibri" pitchFamily="34" charset="0"/>
+                <a:ea typeface="Calibri" pitchFamily="34" charset="-122"/>
+                <a:cs typeface="Calibri" pitchFamily="34" charset="-120"/>
+              </a:rPr>
+              <a:t>Merge + verify</a:t>
+            </a:r>
+            <a:endParaRPr lang="en-US" sz="1250" dirty="0"/>
+          </a:p>
+        </p:txBody>
+      </p:sp>
+      <p:sp>
+        <p:nvSpPr>
+          <p:cNvPr id="12" name="Text 10"/>
+          <p:cNvSpPr/>
+          <p:nvPr/>
+        </p:nvSpPr>
+        <p:spPr>
+          <a:xfrm>
+            <a:off x="3502152" y="1188720"/>
+            <a:ext cx="274320" cy="603504"/>
+          </a:xfrm>
+          <a:prstGeom prst="rect">
+            <a:avLst/>
+          </a:prstGeom>
+          <a:noFill/>
+          <a:ln/>
+        </p:spPr>
+        <p:txBody>
+          <a:bodyPr wrap="square" lIns="0" tIns="0" rIns="0" bIns="0" rtlCol="0" anchor="ctr"/>
+          <a:lstStyle/>
+          <a:p>
+            <a:pPr algn="ctr" indent="0" marL="0">
+              <a:buNone/>
+            </a:pPr>
+            <a:r>
+              <a:rPr lang="en-US" sz="1400" dirty="0">
+                <a:solidFill>
+                  <a:srgbClr val="888888"/>
+                </a:solidFill>
+              </a:rPr>
+              <a:t>→</a:t>
+            </a:r>
+            <a:endParaRPr lang="en-US" sz="1400" dirty="0"/>
+          </a:p>
+        </p:txBody>
+      </p:sp>
+      <p:sp>
+        <p:nvSpPr>
+          <p:cNvPr id="13" name="Shape 11"/>
+          <p:cNvSpPr/>
+          <p:nvPr/>
+        </p:nvSpPr>
+        <p:spPr>
+          <a:xfrm>
+            <a:off x="3758184" y="1188720"/>
+            <a:ext cx="1389888" cy="603504"/>
+          </a:xfrm>
+          <a:prstGeom prst="roundRect">
+            <a:avLst>
+              <a:gd name="adj" fmla="val 10606"/>
+            </a:avLst>
           </a:prstGeom>
           <a:solidFill>
-            <a:srgbClr val="2E6E6E"/>
+            <a:srgbClr val="EEF3F4"/>
           </a:solidFill>
-          <a:ln w="9525">
+          <a:ln w="12700">
             <a:solidFill>
-              <a:srgbClr val="D5DFE1"/>
+              <a:srgbClr val="CBD8DB"/>
             </a:solidFill>
             <a:prstDash val="solid"/>
           </a:ln>
@@ -4554,14 +4977,53 @@
       </p:sp>
       <p:sp>
         <p:nvSpPr>
+          <p:cNvPr id="14" name="Text 12"/>
+          <p:cNvSpPr/>
+          <p:nvPr/>
+        </p:nvSpPr>
+        <p:spPr>
+          <a:xfrm>
+            <a:off x="3758184" y="1188720"/>
+            <a:ext cx="1389888" cy="603504"/>
+          </a:xfrm>
+          <a:prstGeom prst="rect">
+            <a:avLst/>
+          </a:prstGeom>
+          <a:noFill/>
+          <a:ln/>
+        </p:spPr>
+        <p:txBody>
+          <a:bodyPr wrap="square" lIns="0" tIns="0" rIns="0" bIns="0" rtlCol="0" anchor="ctr"/>
+          <a:lstStyle/>
+          <a:p>
+            <a:pPr algn="ctr" indent="0" marL="0">
+              <a:buNone/>
+            </a:pPr>
+            <a:r>
+              <a:rPr lang="en-US" sz="1250" b="1" dirty="0">
+                <a:solidFill>
+                  <a:srgbClr val="22313D"/>
+                </a:solidFill>
+                <a:latin typeface="Calibri" pitchFamily="34" charset="0"/>
+                <a:ea typeface="Calibri" pitchFamily="34" charset="-122"/>
+                <a:cs typeface="Calibri" pitchFamily="34" charset="-120"/>
+              </a:rPr>
+              <a:t>Dedupe review</a:t>
+            </a:r>
+            <a:endParaRPr lang="en-US" sz="1250" dirty="0"/>
+          </a:p>
+        </p:txBody>
+      </p:sp>
+      <p:sp>
+        <p:nvSpPr>
           <p:cNvPr id="15" name="Text 13"/>
           <p:cNvSpPr/>
           <p:nvPr/>
         </p:nvSpPr>
         <p:spPr>
           <a:xfrm>
-            <a:off x="3822192" y="2487168"/>
-            <a:ext cx="722376" cy="384048"/>
+            <a:off x="5129784" y="1188720"/>
+            <a:ext cx="274320" cy="603504"/>
           </a:xfrm>
           <a:prstGeom prst="rect">
             <a:avLst/>
@@ -4577,17 +5039,14 @@
               <a:buNone/>
             </a:pPr>
             <a:r>
-              <a:rPr lang="en-US" sz="1100" b="1" dirty="0">
-                <a:solidFill>
-                  <a:srgbClr val="FFFFFF"/>
-                </a:solidFill>
-                <a:latin typeface="Calibri" pitchFamily="34" charset="0"/>
-                <a:ea typeface="Calibri" pitchFamily="34" charset="-122"/>
-                <a:cs typeface="Calibri" pitchFamily="34" charset="-120"/>
-              </a:rPr>
-              <a:t>Target</a:t>
-            </a:r>
-            <a:endParaRPr lang="en-US" sz="1100" dirty="0"/>
+              <a:rPr lang="en-US" sz="1400" dirty="0">
+                <a:solidFill>
+                  <a:srgbClr val="888888"/>
+                </a:solidFill>
+              </a:rPr>
+              <a:t>→</a:t>
+            </a:r>
+            <a:endParaRPr lang="en-US" sz="1400" dirty="0"/>
           </a:p>
         </p:txBody>
       </p:sp>
@@ -4599,18 +5058,20 @@
         </p:nvSpPr>
         <p:spPr>
           <a:xfrm>
-            <a:off x="4617720" y="2487168"/>
-            <a:ext cx="868680" cy="384048"/>
-          </a:xfrm>
-          <a:prstGeom prst="rect">
-            <a:avLst/>
+            <a:off x="5385816" y="1188720"/>
+            <a:ext cx="1389888" cy="603504"/>
+          </a:xfrm>
+          <a:prstGeom prst="roundRect">
+            <a:avLst>
+              <a:gd name="adj" fmla="val 10606"/>
+            </a:avLst>
           </a:prstGeom>
           <a:solidFill>
-            <a:srgbClr val="2E6E6E"/>
+            <a:srgbClr val="EEF3F4"/>
           </a:solidFill>
-          <a:ln w="9525">
+          <a:ln w="12700">
             <a:solidFill>
-              <a:srgbClr val="D5DFE1"/>
+              <a:srgbClr val="CBD8DB"/>
             </a:solidFill>
             <a:prstDash val="solid"/>
           </a:ln>
@@ -4624,8 +5085,8 @@
         </p:nvSpPr>
         <p:spPr>
           <a:xfrm>
-            <a:off x="4690872" y="2487168"/>
-            <a:ext cx="722376" cy="384048"/>
+            <a:off x="5385816" y="1188720"/>
+            <a:ext cx="1389888" cy="603504"/>
           </a:xfrm>
           <a:prstGeom prst="rect">
             <a:avLst/>
@@ -4641,7 +5102,109 @@
               <a:buNone/>
             </a:pPr>
             <a:r>
-              <a:rPr lang="en-US" sz="1100" b="1" dirty="0">
+              <a:rPr lang="en-US" sz="1250" b="1" dirty="0">
+                <a:solidFill>
+                  <a:srgbClr val="22313D"/>
+                </a:solidFill>
+                <a:latin typeface="Calibri" pitchFamily="34" charset="0"/>
+                <a:ea typeface="Calibri" pitchFamily="34" charset="-122"/>
+                <a:cs typeface="Calibri" pitchFamily="34" charset="-120"/>
+              </a:rPr>
+              <a:t>Segment</a:t>
+            </a:r>
+            <a:endParaRPr lang="en-US" sz="1250" dirty="0"/>
+          </a:p>
+        </p:txBody>
+      </p:sp>
+      <p:sp>
+        <p:nvSpPr>
+          <p:cNvPr id="18" name="Text 16"/>
+          <p:cNvSpPr/>
+          <p:nvPr/>
+        </p:nvSpPr>
+        <p:spPr>
+          <a:xfrm>
+            <a:off x="6757416" y="1188720"/>
+            <a:ext cx="274320" cy="603504"/>
+          </a:xfrm>
+          <a:prstGeom prst="rect">
+            <a:avLst/>
+          </a:prstGeom>
+          <a:noFill/>
+          <a:ln/>
+        </p:spPr>
+        <p:txBody>
+          <a:bodyPr wrap="square" lIns="0" tIns="0" rIns="0" bIns="0" rtlCol="0" anchor="ctr"/>
+          <a:lstStyle/>
+          <a:p>
+            <a:pPr algn="ctr" indent="0" marL="0">
+              <a:buNone/>
+            </a:pPr>
+            <a:r>
+              <a:rPr lang="en-US" sz="1400" dirty="0">
+                <a:solidFill>
+                  <a:srgbClr val="888888"/>
+                </a:solidFill>
+              </a:rPr>
+              <a:t>→</a:t>
+            </a:r>
+            <a:endParaRPr lang="en-US" sz="1400" dirty="0"/>
+          </a:p>
+        </p:txBody>
+      </p:sp>
+      <p:sp>
+        <p:nvSpPr>
+          <p:cNvPr id="19" name="Shape 17"/>
+          <p:cNvSpPr/>
+          <p:nvPr/>
+        </p:nvSpPr>
+        <p:spPr>
+          <a:xfrm>
+            <a:off x="7013448" y="1188720"/>
+            <a:ext cx="1389888" cy="603504"/>
+          </a:xfrm>
+          <a:prstGeom prst="roundRect">
+            <a:avLst>
+              <a:gd name="adj" fmla="val 10606"/>
+            </a:avLst>
+          </a:prstGeom>
+          <a:solidFill>
+            <a:srgbClr val="C08A2E"/>
+          </a:solidFill>
+          <a:ln w="12700">
+            <a:solidFill>
+              <a:srgbClr val="C08A2E"/>
+            </a:solidFill>
+            <a:prstDash val="solid"/>
+          </a:ln>
+        </p:spPr>
+      </p:sp>
+      <p:sp>
+        <p:nvSpPr>
+          <p:cNvPr id="20" name="Text 18"/>
+          <p:cNvSpPr/>
+          <p:nvPr/>
+        </p:nvSpPr>
+        <p:spPr>
+          <a:xfrm>
+            <a:off x="7013448" y="1188720"/>
+            <a:ext cx="1389888" cy="603504"/>
+          </a:xfrm>
+          <a:prstGeom prst="rect">
+            <a:avLst/>
+          </a:prstGeom>
+          <a:noFill/>
+          <a:ln/>
+        </p:spPr>
+        <p:txBody>
+          <a:bodyPr wrap="square" lIns="0" tIns="0" rIns="0" bIns="0" rtlCol="0" anchor="ctr"/>
+          <a:lstStyle/>
+          <a:p>
+            <a:pPr algn="ctr" indent="0" marL="0">
+              <a:buNone/>
+            </a:pPr>
+            <a:r>
+              <a:rPr lang="en-US" sz="1250" b="1" dirty="0">
                 <a:solidFill>
                   <a:srgbClr val="FFFFFF"/>
                 </a:solidFill>
@@ -4649,47 +5212,44 @@
                 <a:ea typeface="Calibri" pitchFamily="34" charset="-122"/>
                 <a:cs typeface="Calibri" pitchFamily="34" charset="-120"/>
               </a:rPr>
-              <a:t>Stretch</a:t>
-            </a:r>
-            <a:endParaRPr lang="en-US" sz="1100" dirty="0"/>
-          </a:p>
-        </p:txBody>
-      </p:sp>
-      <p:sp>
-        <p:nvSpPr>
-          <p:cNvPr id="18" name="Shape 16"/>
-          <p:cNvSpPr/>
-          <p:nvPr/>
-        </p:nvSpPr>
-        <p:spPr>
-          <a:xfrm>
-            <a:off x="502920" y="2871216"/>
-            <a:ext cx="2377440" cy="384048"/>
-          </a:xfrm>
-          <a:prstGeom prst="rect">
-            <a:avLst/>
+              <a:t>Master V5</a:t>
+            </a:r>
+            <a:endParaRPr lang="en-US" sz="1250" dirty="0"/>
+          </a:p>
+        </p:txBody>
+      </p:sp>
+      <p:sp>
+        <p:nvSpPr>
+          <p:cNvPr id="21" name="Shape 19"/>
+          <p:cNvSpPr/>
+          <p:nvPr/>
+        </p:nvSpPr>
+        <p:spPr>
+          <a:xfrm>
+            <a:off x="502920" y="2148840"/>
+            <a:ext cx="2606040" cy="1554480"/>
+          </a:xfrm>
+          <a:prstGeom prst="roundRect">
+            <a:avLst>
+              <a:gd name="adj" fmla="val 5294"/>
+            </a:avLst>
           </a:prstGeom>
           <a:solidFill>
             <a:srgbClr val="EEF3F4"/>
           </a:solidFill>
-          <a:ln w="9525">
-            <a:solidFill>
-              <a:srgbClr val="D5DFE1"/>
-            </a:solidFill>
-            <a:prstDash val="solid"/>
-          </a:ln>
-        </p:spPr>
-      </p:sp>
-      <p:sp>
-        <p:nvSpPr>
-          <p:cNvPr id="19" name="Text 17"/>
-          <p:cNvSpPr/>
-          <p:nvPr/>
-        </p:nvSpPr>
-        <p:spPr>
-          <a:xfrm>
-            <a:off x="576072" y="2871216"/>
-            <a:ext cx="2231136" cy="384048"/>
+          <a:ln/>
+        </p:spPr>
+      </p:sp>
+      <p:sp>
+        <p:nvSpPr>
+          <p:cNvPr id="22" name="Text 20"/>
+          <p:cNvSpPr/>
+          <p:nvPr/>
+        </p:nvSpPr>
+        <p:spPr>
+          <a:xfrm>
+            <a:off x="685800" y="2286000"/>
+            <a:ext cx="2240280" cy="1325880"/>
           </a:xfrm>
           <a:prstGeom prst="rect">
             <a:avLst/>
@@ -4701,11 +5261,34 @@
           <a:bodyPr wrap="square" lIns="0" tIns="0" rIns="0" bIns="0" rtlCol="0" anchor="ctr"/>
           <a:lstStyle/>
           <a:p>
-            <a:pPr algn="l" indent="0" marL="0">
-              <a:buNone/>
-            </a:pPr>
-            <a:r>
-              <a:rPr lang="en-US" sz="1100" dirty="0">
+            <a:pPr indent="0" marL="0">
+              <a:lnSpc>
+                <a:spcPct val="110000"/>
+              </a:lnSpc>
+              <a:buNone/>
+            </a:pPr>
+            <a:r>
+              <a:rPr lang="en-US" sz="3000" b="1" dirty="0">
+                <a:solidFill>
+                  <a:srgbClr val="C08A2E"/>
+                </a:solidFill>
+                <a:latin typeface="Calibri" pitchFamily="34" charset="0"/>
+                <a:ea typeface="Calibri" pitchFamily="34" charset="-122"/>
+                <a:cs typeface="Calibri" pitchFamily="34" charset="-120"/>
+              </a:rPr>
+              <a:t>~2,400</a:t>
+            </a:r>
+            <a:endParaRPr lang="en-US" sz="3000" dirty="0"/>
+          </a:p>
+          <a:p>
+            <a:pPr indent="0" marL="0">
+              <a:lnSpc>
+                <a:spcPct val="110000"/>
+              </a:lnSpc>
+              <a:buNone/>
+            </a:pPr>
+            <a:r>
+              <a:rPr lang="en-US" sz="1150" dirty="0">
                 <a:solidFill>
                   <a:srgbClr val="22313D"/>
                 </a:solidFill>
@@ -4713,47 +5296,44 @@
                 <a:ea typeface="Calibri" pitchFamily="34" charset="-122"/>
                 <a:cs typeface="Calibri" pitchFamily="34" charset="-120"/>
               </a:rPr>
-              <a:t>Survey responses</a:t>
-            </a:r>
-            <a:endParaRPr lang="en-US" sz="1100" dirty="0"/>
-          </a:p>
-        </p:txBody>
-      </p:sp>
-      <p:sp>
-        <p:nvSpPr>
-          <p:cNvPr id="20" name="Shape 18"/>
-          <p:cNvSpPr/>
-          <p:nvPr/>
-        </p:nvSpPr>
-        <p:spPr>
-          <a:xfrm>
-            <a:off x="2880360" y="2871216"/>
-            <a:ext cx="868680" cy="384048"/>
-          </a:xfrm>
-          <a:prstGeom prst="rect">
-            <a:avLst/>
+              <a:t>contacts reconstructed into one verified master list (V1→V5)</a:t>
+            </a:r>
+            <a:endParaRPr lang="en-US" sz="3000" dirty="0"/>
+          </a:p>
+        </p:txBody>
+      </p:sp>
+      <p:sp>
+        <p:nvSpPr>
+          <p:cNvPr id="23" name="Shape 21"/>
+          <p:cNvSpPr/>
+          <p:nvPr/>
+        </p:nvSpPr>
+        <p:spPr>
+          <a:xfrm>
+            <a:off x="3291840" y="2148840"/>
+            <a:ext cx="2606040" cy="1554480"/>
+          </a:xfrm>
+          <a:prstGeom prst="roundRect">
+            <a:avLst>
+              <a:gd name="adj" fmla="val 5294"/>
+            </a:avLst>
           </a:prstGeom>
           <a:solidFill>
             <a:srgbClr val="EEF3F4"/>
           </a:solidFill>
-          <a:ln w="9525">
-            <a:solidFill>
-              <a:srgbClr val="D5DFE1"/>
-            </a:solidFill>
-            <a:prstDash val="solid"/>
-          </a:ln>
-        </p:spPr>
-      </p:sp>
-      <p:sp>
-        <p:nvSpPr>
-          <p:cNvPr id="21" name="Text 19"/>
-          <p:cNvSpPr/>
-          <p:nvPr/>
-        </p:nvSpPr>
-        <p:spPr>
-          <a:xfrm>
-            <a:off x="2953512" y="2871216"/>
-            <a:ext cx="722376" cy="384048"/>
+          <a:ln/>
+        </p:spPr>
+      </p:sp>
+      <p:sp>
+        <p:nvSpPr>
+          <p:cNvPr id="24" name="Text 22"/>
+          <p:cNvSpPr/>
+          <p:nvPr/>
+        </p:nvSpPr>
+        <p:spPr>
+          <a:xfrm>
+            <a:off x="3474720" y="2286000"/>
+            <a:ext cx="2240280" cy="1325880"/>
           </a:xfrm>
           <a:prstGeom prst="rect">
             <a:avLst/>
@@ -4765,11 +5345,34 @@
           <a:bodyPr wrap="square" lIns="0" tIns="0" rIns="0" bIns="0" rtlCol="0" anchor="ctr"/>
           <a:lstStyle/>
           <a:p>
-            <a:pPr algn="ctr" indent="0" marL="0">
-              <a:buNone/>
-            </a:pPr>
-            <a:r>
-              <a:rPr lang="en-US" sz="1100" dirty="0">
+            <a:pPr indent="0" marL="0">
+              <a:lnSpc>
+                <a:spcPct val="110000"/>
+              </a:lnSpc>
+              <a:buNone/>
+            </a:pPr>
+            <a:r>
+              <a:rPr lang="en-US" sz="3000" b="1" dirty="0">
+                <a:solidFill>
+                  <a:srgbClr val="C08A2E"/>
+                </a:solidFill>
+                <a:latin typeface="Calibri" pitchFamily="34" charset="0"/>
+                <a:ea typeface="Calibri" pitchFamily="34" charset="-122"/>
+                <a:cs typeface="Calibri" pitchFamily="34" charset="-120"/>
+              </a:rPr>
+              <a:t>n = 472</a:t>
+            </a:r>
+            <a:endParaRPr lang="en-US" sz="3000" dirty="0"/>
+          </a:p>
+          <a:p>
+            <a:pPr indent="0" marL="0">
+              <a:lnSpc>
+                <a:spcPct val="110000"/>
+              </a:lnSpc>
+              <a:buNone/>
+            </a:pPr>
+            <a:r>
+              <a:rPr lang="en-US" sz="1150" dirty="0">
                 <a:solidFill>
                   <a:srgbClr val="22313D"/>
                 </a:solidFill>
@@ -4777,47 +5380,44 @@
                 <a:ea typeface="Calibri" pitchFamily="34" charset="-122"/>
                 <a:cs typeface="Calibri" pitchFamily="34" charset="-120"/>
               </a:rPr>
-              <a:t>60</a:t>
-            </a:r>
-            <a:endParaRPr lang="en-US" sz="1100" dirty="0"/>
-          </a:p>
-        </p:txBody>
-      </p:sp>
-      <p:sp>
-        <p:nvSpPr>
-          <p:cNvPr id="22" name="Shape 20"/>
-          <p:cNvSpPr/>
-          <p:nvPr/>
-        </p:nvSpPr>
-        <p:spPr>
-          <a:xfrm>
-            <a:off x="3749040" y="2871216"/>
-            <a:ext cx="868680" cy="384048"/>
-          </a:xfrm>
-          <a:prstGeom prst="rect">
-            <a:avLst/>
+              <a:t>known opt-in supporters, imported with provenance</a:t>
+            </a:r>
+            <a:endParaRPr lang="en-US" sz="3000" dirty="0"/>
+          </a:p>
+        </p:txBody>
+      </p:sp>
+      <p:sp>
+        <p:nvSpPr>
+          <p:cNvPr id="25" name="Shape 23"/>
+          <p:cNvSpPr/>
+          <p:nvPr/>
+        </p:nvSpPr>
+        <p:spPr>
+          <a:xfrm>
+            <a:off x="6080760" y="2148840"/>
+            <a:ext cx="2606040" cy="1554480"/>
+          </a:xfrm>
+          <a:prstGeom prst="roundRect">
+            <a:avLst>
+              <a:gd name="adj" fmla="val 5294"/>
+            </a:avLst>
           </a:prstGeom>
           <a:solidFill>
             <a:srgbClr val="EEF3F4"/>
           </a:solidFill>
-          <a:ln w="9525">
-            <a:solidFill>
-              <a:srgbClr val="D5DFE1"/>
-            </a:solidFill>
-            <a:prstDash val="solid"/>
-          </a:ln>
-        </p:spPr>
-      </p:sp>
-      <p:sp>
-        <p:nvSpPr>
-          <p:cNvPr id="23" name="Text 21"/>
-          <p:cNvSpPr/>
-          <p:nvPr/>
-        </p:nvSpPr>
-        <p:spPr>
-          <a:xfrm>
-            <a:off x="3822192" y="2871216"/>
-            <a:ext cx="722376" cy="384048"/>
+          <a:ln/>
+        </p:spPr>
+      </p:sp>
+      <p:sp>
+        <p:nvSpPr>
+          <p:cNvPr id="26" name="Text 24"/>
+          <p:cNvSpPr/>
+          <p:nvPr/>
+        </p:nvSpPr>
+        <p:spPr>
+          <a:xfrm>
+            <a:off x="6263640" y="2286000"/>
+            <a:ext cx="2240280" cy="1325880"/>
           </a:xfrm>
           <a:prstGeom prst="rect">
             <a:avLst/>
@@ -4829,11 +5429,34 @@
           <a:bodyPr wrap="square" lIns="0" tIns="0" rIns="0" bIns="0" rtlCol="0" anchor="ctr"/>
           <a:lstStyle/>
           <a:p>
-            <a:pPr algn="ctr" indent="0" marL="0">
-              <a:buNone/>
-            </a:pPr>
-            <a:r>
-              <a:rPr lang="en-US" sz="1100" dirty="0">
+            <a:pPr indent="0" marL="0">
+              <a:lnSpc>
+                <a:spcPct val="110000"/>
+              </a:lnSpc>
+              <a:buNone/>
+            </a:pPr>
+            <a:r>
+              <a:rPr lang="en-US" sz="3000" b="1" dirty="0">
+                <a:solidFill>
+                  <a:srgbClr val="C08A2E"/>
+                </a:solidFill>
+                <a:latin typeface="Calibri" pitchFamily="34" charset="0"/>
+                <a:ea typeface="Calibri" pitchFamily="34" charset="-122"/>
+                <a:cs typeface="Calibri" pitchFamily="34" charset="-120"/>
+              </a:rPr>
+              <a:t>n = 1,984</a:t>
+            </a:r>
+            <a:endParaRPr lang="en-US" sz="3000" dirty="0"/>
+          </a:p>
+          <a:p>
+            <a:pPr indent="0" marL="0">
+              <a:lnSpc>
+                <a:spcPct val="110000"/>
+              </a:lnSpc>
+              <a:buNone/>
+            </a:pPr>
+            <a:r>
+              <a:rPr lang="en-US" sz="1150" dirty="0">
                 <a:solidFill>
                   <a:srgbClr val="22313D"/>
                 </a:solidFill>
@@ -4841,47 +5464,22 @@
                 <a:ea typeface="Calibri" pitchFamily="34" charset="-122"/>
                 <a:cs typeface="Calibri" pitchFamily="34" charset="-120"/>
               </a:rPr>
-              <a:t>100</a:t>
-            </a:r>
-            <a:endParaRPr lang="en-US" sz="1100" dirty="0"/>
-          </a:p>
-        </p:txBody>
-      </p:sp>
-      <p:sp>
-        <p:nvSpPr>
-          <p:cNvPr id="24" name="Shape 22"/>
-          <p:cNvSpPr/>
-          <p:nvPr/>
-        </p:nvSpPr>
-        <p:spPr>
-          <a:xfrm>
-            <a:off x="4617720" y="2871216"/>
-            <a:ext cx="868680" cy="384048"/>
-          </a:xfrm>
-          <a:prstGeom prst="rect">
-            <a:avLst/>
-          </a:prstGeom>
-          <a:solidFill>
-            <a:srgbClr val="EEF3F4"/>
-          </a:solidFill>
-          <a:ln w="9525">
-            <a:solidFill>
-              <a:srgbClr val="D5DFE1"/>
-            </a:solidFill>
-            <a:prstDash val="solid"/>
-          </a:ln>
-        </p:spPr>
-      </p:sp>
-      <p:sp>
-        <p:nvSpPr>
-          <p:cNvPr id="25" name="Text 23"/>
-          <p:cNvSpPr/>
-          <p:nvPr/>
-        </p:nvSpPr>
-        <p:spPr>
-          <a:xfrm>
-            <a:off x="4690872" y="2871216"/>
-            <a:ext cx="722376" cy="384048"/>
+              <a:t>unknown-connection contacts, segmented for consent-first outreach</a:t>
+            </a:r>
+            <a:endParaRPr lang="en-US" sz="3000" dirty="0"/>
+          </a:p>
+        </p:txBody>
+      </p:sp>
+      <p:sp>
+        <p:nvSpPr>
+          <p:cNvPr id="27" name="Text 25"/>
+          <p:cNvSpPr/>
+          <p:nvPr/>
+        </p:nvSpPr>
+        <p:spPr>
+          <a:xfrm>
+            <a:off x="502920" y="3977640"/>
+            <a:ext cx="8138160" cy="365760"/>
           </a:xfrm>
           <a:prstGeom prst="rect">
             <a:avLst/>
@@ -4893,11 +5491,11 @@
           <a:bodyPr wrap="square" lIns="0" tIns="0" rIns="0" bIns="0" rtlCol="0" anchor="ctr"/>
           <a:lstStyle/>
           <a:p>
-            <a:pPr algn="ctr" indent="0" marL="0">
-              <a:buNone/>
-            </a:pPr>
-            <a:r>
-              <a:rPr lang="en-US" sz="1100" dirty="0">
+            <a:pPr indent="0" marL="0">
+              <a:buNone/>
+            </a:pPr>
+            <a:r>
+              <a:rPr lang="en-US" sz="1250" dirty="0">
                 <a:solidFill>
                   <a:srgbClr val="22313D"/>
                 </a:solidFill>
@@ -4905,47 +5503,50 @@
                 <a:ea typeface="Calibri" pitchFamily="34" charset="-122"/>
                 <a:cs typeface="Calibri" pitchFamily="34" charset="-120"/>
               </a:rPr>
-              <a:t>150</a:t>
-            </a:r>
-            <a:endParaRPr lang="en-US" sz="1100" dirty="0"/>
-          </a:p>
-        </p:txBody>
-      </p:sp>
-      <p:sp>
-        <p:nvSpPr>
-          <p:cNvPr id="26" name="Shape 24"/>
-          <p:cNvSpPr/>
-          <p:nvPr/>
-        </p:nvSpPr>
-        <p:spPr>
-          <a:xfrm>
-            <a:off x="502920" y="3255264"/>
-            <a:ext cx="2377440" cy="384048"/>
-          </a:xfrm>
-          <a:prstGeom prst="rect">
-            <a:avLst/>
-          </a:prstGeom>
-          <a:solidFill>
-            <a:srgbClr val="FFFFFF"/>
-          </a:solidFill>
-          <a:ln w="9525">
-            <a:solidFill>
-              <a:srgbClr val="D5DFE1"/>
-            </a:solidFill>
-            <a:prstDash val="solid"/>
-          </a:ln>
-        </p:spPr>
-      </p:sp>
-      <p:sp>
-        <p:nvSpPr>
-          <p:cNvPr id="27" name="Text 25"/>
-          <p:cNvSpPr/>
-          <p:nvPr/>
-        </p:nvSpPr>
-        <p:spPr>
-          <a:xfrm>
-            <a:off x="576072" y="3255264"/>
-            <a:ext cx="2231136" cy="384048"/>
+              <a:t>Plus the operating layer nobody had — </a:t>
+            </a:r>
+            <a:pPr indent="0" marL="0">
+              <a:buNone/>
+            </a:pPr>
+            <a:r>
+              <a:rPr lang="en-US" sz="1250" b="1" dirty="0">
+                <a:solidFill>
+                  <a:srgbClr val="1F3A4D"/>
+                </a:solidFill>
+                <a:latin typeface="Calibri" pitchFamily="34" charset="0"/>
+                <a:ea typeface="Calibri" pitchFamily="34" charset="-122"/>
+                <a:cs typeface="Calibri" pitchFamily="34" charset="-120"/>
+              </a:rPr>
+              <a:t>Google Workspace · MailerLite · Claude Max · Stripe · Squarespace</a:t>
+            </a:r>
+            <a:pPr indent="0" marL="0">
+              <a:buNone/>
+            </a:pPr>
+            <a:r>
+              <a:rPr lang="en-US" sz="1250" dirty="0">
+                <a:solidFill>
+                  <a:srgbClr val="22313D"/>
+                </a:solidFill>
+                <a:latin typeface="Calibri" pitchFamily="34" charset="0"/>
+                <a:ea typeface="Calibri" pitchFamily="34" charset="-122"/>
+                <a:cs typeface="Calibri" pitchFamily="34" charset="-120"/>
+              </a:rPr>
+              <a:t> — website, email, donation rails. Donations are still being received.</a:t>
+            </a:r>
+            <a:endParaRPr lang="en-US" sz="1250" dirty="0"/>
+          </a:p>
+        </p:txBody>
+      </p:sp>
+      <p:sp>
+        <p:nvSpPr>
+          <p:cNvPr id="28" name="Text 26"/>
+          <p:cNvSpPr/>
+          <p:nvPr/>
+        </p:nvSpPr>
+        <p:spPr>
+          <a:xfrm>
+            <a:off x="502920" y="4590288"/>
+            <a:ext cx="8138160" cy="365760"/>
           </a:xfrm>
           <a:prstGeom prst="rect">
             <a:avLst/>
@@ -4957,498 +5558,11 @@
           <a:bodyPr wrap="square" lIns="0" tIns="0" rIns="0" bIns="0" rtlCol="0" anchor="ctr"/>
           <a:lstStyle/>
           <a:p>
-            <a:pPr algn="l" indent="0" marL="0">
-              <a:buNone/>
-            </a:pPr>
-            <a:r>
-              <a:rPr lang="en-US" sz="1100" dirty="0">
-                <a:solidFill>
-                  <a:srgbClr val="22313D"/>
-                </a:solidFill>
-                <a:latin typeface="Calibri" pitchFamily="34" charset="0"/>
-                <a:ea typeface="Calibri" pitchFamily="34" charset="-122"/>
-                <a:cs typeface="Calibri" pitchFamily="34" charset="-120"/>
-              </a:rPr>
-              <a:t>Circle RSVPs (each)</a:t>
-            </a:r>
-            <a:endParaRPr lang="en-US" sz="1100" dirty="0"/>
-          </a:p>
-        </p:txBody>
-      </p:sp>
-      <p:sp>
-        <p:nvSpPr>
-          <p:cNvPr id="28" name="Shape 26"/>
-          <p:cNvSpPr/>
-          <p:nvPr/>
-        </p:nvSpPr>
-        <p:spPr>
-          <a:xfrm>
-            <a:off x="2880360" y="3255264"/>
-            <a:ext cx="868680" cy="384048"/>
-          </a:xfrm>
-          <a:prstGeom prst="rect">
-            <a:avLst/>
-          </a:prstGeom>
-          <a:solidFill>
-            <a:srgbClr val="FFFFFF"/>
-          </a:solidFill>
-          <a:ln w="9525">
-            <a:solidFill>
-              <a:srgbClr val="D5DFE1"/>
-            </a:solidFill>
-            <a:prstDash val="solid"/>
-          </a:ln>
-        </p:spPr>
-      </p:sp>
-      <p:sp>
-        <p:nvSpPr>
-          <p:cNvPr id="29" name="Text 27"/>
-          <p:cNvSpPr/>
-          <p:nvPr/>
-        </p:nvSpPr>
-        <p:spPr>
-          <a:xfrm>
-            <a:off x="2953512" y="3255264"/>
-            <a:ext cx="722376" cy="384048"/>
-          </a:xfrm>
-          <a:prstGeom prst="rect">
-            <a:avLst/>
-          </a:prstGeom>
-          <a:noFill/>
-          <a:ln/>
-        </p:spPr>
-        <p:txBody>
-          <a:bodyPr wrap="square" lIns="0" tIns="0" rIns="0" bIns="0" rtlCol="0" anchor="ctr"/>
-          <a:lstStyle/>
-          <a:p>
-            <a:pPr algn="ctr" indent="0" marL="0">
-              <a:buNone/>
-            </a:pPr>
-            <a:r>
-              <a:rPr lang="en-US" sz="1100" dirty="0">
-                <a:solidFill>
-                  <a:srgbClr val="22313D"/>
-                </a:solidFill>
-                <a:latin typeface="Calibri" pitchFamily="34" charset="0"/>
-                <a:ea typeface="Calibri" pitchFamily="34" charset="-122"/>
-                <a:cs typeface="Calibri" pitchFamily="34" charset="-120"/>
-              </a:rPr>
-              <a:t>10</a:t>
-            </a:r>
-            <a:endParaRPr lang="en-US" sz="1100" dirty="0"/>
-          </a:p>
-        </p:txBody>
-      </p:sp>
-      <p:sp>
-        <p:nvSpPr>
-          <p:cNvPr id="30" name="Shape 28"/>
-          <p:cNvSpPr/>
-          <p:nvPr/>
-        </p:nvSpPr>
-        <p:spPr>
-          <a:xfrm>
-            <a:off x="3749040" y="3255264"/>
-            <a:ext cx="868680" cy="384048"/>
-          </a:xfrm>
-          <a:prstGeom prst="rect">
-            <a:avLst/>
-          </a:prstGeom>
-          <a:solidFill>
-            <a:srgbClr val="FFFFFF"/>
-          </a:solidFill>
-          <a:ln w="9525">
-            <a:solidFill>
-              <a:srgbClr val="D5DFE1"/>
-            </a:solidFill>
-            <a:prstDash val="solid"/>
-          </a:ln>
-        </p:spPr>
-      </p:sp>
-      <p:sp>
-        <p:nvSpPr>
-          <p:cNvPr id="31" name="Text 29"/>
-          <p:cNvSpPr/>
-          <p:nvPr/>
-        </p:nvSpPr>
-        <p:spPr>
-          <a:xfrm>
-            <a:off x="3822192" y="3255264"/>
-            <a:ext cx="722376" cy="384048"/>
-          </a:xfrm>
-          <a:prstGeom prst="rect">
-            <a:avLst/>
-          </a:prstGeom>
-          <a:noFill/>
-          <a:ln/>
-        </p:spPr>
-        <p:txBody>
-          <a:bodyPr wrap="square" lIns="0" tIns="0" rIns="0" bIns="0" rtlCol="0" anchor="ctr"/>
-          <a:lstStyle/>
-          <a:p>
-            <a:pPr algn="ctr" indent="0" marL="0">
-              <a:buNone/>
-            </a:pPr>
-            <a:r>
-              <a:rPr lang="en-US" sz="1100" dirty="0">
-                <a:solidFill>
-                  <a:srgbClr val="22313D"/>
-                </a:solidFill>
-                <a:latin typeface="Calibri" pitchFamily="34" charset="0"/>
-                <a:ea typeface="Calibri" pitchFamily="34" charset="-122"/>
-                <a:cs typeface="Calibri" pitchFamily="34" charset="-120"/>
-              </a:rPr>
-              <a:t>20–25</a:t>
-            </a:r>
-            <a:endParaRPr lang="en-US" sz="1100" dirty="0"/>
-          </a:p>
-        </p:txBody>
-      </p:sp>
-      <p:sp>
-        <p:nvSpPr>
-          <p:cNvPr id="32" name="Shape 30"/>
-          <p:cNvSpPr/>
-          <p:nvPr/>
-        </p:nvSpPr>
-        <p:spPr>
-          <a:xfrm>
-            <a:off x="4617720" y="3255264"/>
-            <a:ext cx="868680" cy="384048"/>
-          </a:xfrm>
-          <a:prstGeom prst="rect">
-            <a:avLst/>
-          </a:prstGeom>
-          <a:solidFill>
-            <a:srgbClr val="FFFFFF"/>
-          </a:solidFill>
-          <a:ln w="9525">
-            <a:solidFill>
-              <a:srgbClr val="D5DFE1"/>
-            </a:solidFill>
-            <a:prstDash val="solid"/>
-          </a:ln>
-        </p:spPr>
-      </p:sp>
-      <p:sp>
-        <p:nvSpPr>
-          <p:cNvPr id="33" name="Text 31"/>
-          <p:cNvSpPr/>
-          <p:nvPr/>
-        </p:nvSpPr>
-        <p:spPr>
-          <a:xfrm>
-            <a:off x="4690872" y="3255264"/>
-            <a:ext cx="722376" cy="384048"/>
-          </a:xfrm>
-          <a:prstGeom prst="rect">
-            <a:avLst/>
-          </a:prstGeom>
-          <a:noFill/>
-          <a:ln/>
-        </p:spPr>
-        <p:txBody>
-          <a:bodyPr wrap="square" lIns="0" tIns="0" rIns="0" bIns="0" rtlCol="0" anchor="ctr"/>
-          <a:lstStyle/>
-          <a:p>
-            <a:pPr algn="ctr" indent="0" marL="0">
-              <a:buNone/>
-            </a:pPr>
-            <a:r>
-              <a:rPr lang="en-US" sz="1100" dirty="0">
-                <a:solidFill>
-                  <a:srgbClr val="22313D"/>
-                </a:solidFill>
-                <a:latin typeface="Calibri" pitchFamily="34" charset="0"/>
-                <a:ea typeface="Calibri" pitchFamily="34" charset="-122"/>
-                <a:cs typeface="Calibri" pitchFamily="34" charset="-120"/>
-              </a:rPr>
-              <a:t>30+</a:t>
-            </a:r>
-            <a:endParaRPr lang="en-US" sz="1100" dirty="0"/>
-          </a:p>
-        </p:txBody>
-      </p:sp>
-      <p:sp>
-        <p:nvSpPr>
-          <p:cNvPr id="34" name="Shape 32"/>
-          <p:cNvSpPr/>
-          <p:nvPr/>
-        </p:nvSpPr>
-        <p:spPr>
-          <a:xfrm>
-            <a:off x="502920" y="3639312"/>
-            <a:ext cx="2377440" cy="384048"/>
-          </a:xfrm>
-          <a:prstGeom prst="rect">
-            <a:avLst/>
-          </a:prstGeom>
-          <a:solidFill>
-            <a:srgbClr val="EEF3F4"/>
-          </a:solidFill>
-          <a:ln w="9525">
-            <a:solidFill>
-              <a:srgbClr val="D5DFE1"/>
-            </a:solidFill>
-            <a:prstDash val="solid"/>
-          </a:ln>
-        </p:spPr>
-      </p:sp>
-      <p:sp>
-        <p:nvSpPr>
-          <p:cNvPr id="35" name="Text 33"/>
-          <p:cNvSpPr/>
-          <p:nvPr/>
-        </p:nvSpPr>
-        <p:spPr>
-          <a:xfrm>
-            <a:off x="576072" y="3639312"/>
-            <a:ext cx="2231136" cy="384048"/>
-          </a:xfrm>
-          <a:prstGeom prst="rect">
-            <a:avLst/>
-          </a:prstGeom>
-          <a:noFill/>
-          <a:ln/>
-        </p:spPr>
-        <p:txBody>
-          <a:bodyPr wrap="square" lIns="0" tIns="0" rIns="0" bIns="0" rtlCol="0" anchor="ctr"/>
-          <a:lstStyle/>
-          <a:p>
-            <a:pPr algn="l" indent="0" marL="0">
-              <a:buNone/>
-            </a:pPr>
-            <a:r>
-              <a:rPr lang="en-US" sz="1100" dirty="0">
-                <a:solidFill>
-                  <a:srgbClr val="22313D"/>
-                </a:solidFill>
-                <a:latin typeface="Calibri" pitchFamily="34" charset="0"/>
-                <a:ea typeface="Calibri" pitchFamily="34" charset="-122"/>
-                <a:cs typeface="Calibri" pitchFamily="34" charset="-120"/>
-              </a:rPr>
-              <a:t>Story-archive gifts</a:t>
-            </a:r>
-            <a:endParaRPr lang="en-US" sz="1100" dirty="0"/>
-          </a:p>
-        </p:txBody>
-      </p:sp>
-      <p:sp>
-        <p:nvSpPr>
-          <p:cNvPr id="36" name="Shape 34"/>
-          <p:cNvSpPr/>
-          <p:nvPr/>
-        </p:nvSpPr>
-        <p:spPr>
-          <a:xfrm>
-            <a:off x="2880360" y="3639312"/>
-            <a:ext cx="868680" cy="384048"/>
-          </a:xfrm>
-          <a:prstGeom prst="rect">
-            <a:avLst/>
-          </a:prstGeom>
-          <a:solidFill>
-            <a:srgbClr val="EEF3F4"/>
-          </a:solidFill>
-          <a:ln w="9525">
-            <a:solidFill>
-              <a:srgbClr val="D5DFE1"/>
-            </a:solidFill>
-            <a:prstDash val="solid"/>
-          </a:ln>
-        </p:spPr>
-      </p:sp>
-      <p:sp>
-        <p:nvSpPr>
-          <p:cNvPr id="37" name="Text 35"/>
-          <p:cNvSpPr/>
-          <p:nvPr/>
-        </p:nvSpPr>
-        <p:spPr>
-          <a:xfrm>
-            <a:off x="2953512" y="3639312"/>
-            <a:ext cx="722376" cy="384048"/>
-          </a:xfrm>
-          <a:prstGeom prst="rect">
-            <a:avLst/>
-          </a:prstGeom>
-          <a:noFill/>
-          <a:ln/>
-        </p:spPr>
-        <p:txBody>
-          <a:bodyPr wrap="square" lIns="0" tIns="0" rIns="0" bIns="0" rtlCol="0" anchor="ctr"/>
-          <a:lstStyle/>
-          <a:p>
-            <a:pPr algn="ctr" indent="0" marL="0">
-              <a:buNone/>
-            </a:pPr>
-            <a:r>
-              <a:rPr lang="en-US" sz="1100" dirty="0">
-                <a:solidFill>
-                  <a:srgbClr val="22313D"/>
-                </a:solidFill>
-                <a:latin typeface="Calibri" pitchFamily="34" charset="0"/>
-                <a:ea typeface="Calibri" pitchFamily="34" charset="-122"/>
-                <a:cs typeface="Calibri" pitchFamily="34" charset="-120"/>
-              </a:rPr>
-              <a:t>10</a:t>
-            </a:r>
-            <a:endParaRPr lang="en-US" sz="1100" dirty="0"/>
-          </a:p>
-        </p:txBody>
-      </p:sp>
-      <p:sp>
-        <p:nvSpPr>
-          <p:cNvPr id="38" name="Shape 36"/>
-          <p:cNvSpPr/>
-          <p:nvPr/>
-        </p:nvSpPr>
-        <p:spPr>
-          <a:xfrm>
-            <a:off x="3749040" y="3639312"/>
-            <a:ext cx="868680" cy="384048"/>
-          </a:xfrm>
-          <a:prstGeom prst="rect">
-            <a:avLst/>
-          </a:prstGeom>
-          <a:solidFill>
-            <a:srgbClr val="EEF3F4"/>
-          </a:solidFill>
-          <a:ln w="9525">
-            <a:solidFill>
-              <a:srgbClr val="D5DFE1"/>
-            </a:solidFill>
-            <a:prstDash val="solid"/>
-          </a:ln>
-        </p:spPr>
-      </p:sp>
-      <p:sp>
-        <p:nvSpPr>
-          <p:cNvPr id="39" name="Text 37"/>
-          <p:cNvSpPr/>
-          <p:nvPr/>
-        </p:nvSpPr>
-        <p:spPr>
-          <a:xfrm>
-            <a:off x="3822192" y="3639312"/>
-            <a:ext cx="722376" cy="384048"/>
-          </a:xfrm>
-          <a:prstGeom prst="rect">
-            <a:avLst/>
-          </a:prstGeom>
-          <a:noFill/>
-          <a:ln/>
-        </p:spPr>
-        <p:txBody>
-          <a:bodyPr wrap="square" lIns="0" tIns="0" rIns="0" bIns="0" rtlCol="0" anchor="ctr"/>
-          <a:lstStyle/>
-          <a:p>
-            <a:pPr algn="ctr" indent="0" marL="0">
-              <a:buNone/>
-            </a:pPr>
-            <a:r>
-              <a:rPr lang="en-US" sz="1100" dirty="0">
-                <a:solidFill>
-                  <a:srgbClr val="22313D"/>
-                </a:solidFill>
-                <a:latin typeface="Calibri" pitchFamily="34" charset="0"/>
-                <a:ea typeface="Calibri" pitchFamily="34" charset="-122"/>
-                <a:cs typeface="Calibri" pitchFamily="34" charset="-120"/>
-              </a:rPr>
-              <a:t>25</a:t>
-            </a:r>
-            <a:endParaRPr lang="en-US" sz="1100" dirty="0"/>
-          </a:p>
-        </p:txBody>
-      </p:sp>
-      <p:sp>
-        <p:nvSpPr>
-          <p:cNvPr id="40" name="Shape 38"/>
-          <p:cNvSpPr/>
-          <p:nvPr/>
-        </p:nvSpPr>
-        <p:spPr>
-          <a:xfrm>
-            <a:off x="4617720" y="3639312"/>
-            <a:ext cx="868680" cy="384048"/>
-          </a:xfrm>
-          <a:prstGeom prst="rect">
-            <a:avLst/>
-          </a:prstGeom>
-          <a:solidFill>
-            <a:srgbClr val="EEF3F4"/>
-          </a:solidFill>
-          <a:ln w="9525">
-            <a:solidFill>
-              <a:srgbClr val="D5DFE1"/>
-            </a:solidFill>
-            <a:prstDash val="solid"/>
-          </a:ln>
-        </p:spPr>
-      </p:sp>
-      <p:sp>
-        <p:nvSpPr>
-          <p:cNvPr id="41" name="Text 39"/>
-          <p:cNvSpPr/>
-          <p:nvPr/>
-        </p:nvSpPr>
-        <p:spPr>
-          <a:xfrm>
-            <a:off x="4690872" y="3639312"/>
-            <a:ext cx="722376" cy="384048"/>
-          </a:xfrm>
-          <a:prstGeom prst="rect">
-            <a:avLst/>
-          </a:prstGeom>
-          <a:noFill/>
-          <a:ln/>
-        </p:spPr>
-        <p:txBody>
-          <a:bodyPr wrap="square" lIns="0" tIns="0" rIns="0" bIns="0" rtlCol="0" anchor="ctr"/>
-          <a:lstStyle/>
-          <a:p>
-            <a:pPr algn="ctr" indent="0" marL="0">
-              <a:buNone/>
-            </a:pPr>
-            <a:r>
-              <a:rPr lang="en-US" sz="1100" dirty="0">
-                <a:solidFill>
-                  <a:srgbClr val="22313D"/>
-                </a:solidFill>
-                <a:latin typeface="Calibri" pitchFamily="34" charset="0"/>
-                <a:ea typeface="Calibri" pitchFamily="34" charset="-122"/>
-                <a:cs typeface="Calibri" pitchFamily="34" charset="-120"/>
-              </a:rPr>
-              <a:t>50</a:t>
-            </a:r>
-            <a:endParaRPr lang="en-US" sz="1100" dirty="0"/>
-          </a:p>
-        </p:txBody>
-      </p:sp>
-      <p:sp>
-        <p:nvSpPr>
-          <p:cNvPr id="42" name="Text 40"/>
-          <p:cNvSpPr/>
-          <p:nvPr/>
-        </p:nvSpPr>
-        <p:spPr>
-          <a:xfrm>
-            <a:off x="502920" y="4224528"/>
-            <a:ext cx="4937760" cy="640080"/>
-          </a:xfrm>
-          <a:prstGeom prst="rect">
-            <a:avLst/>
-          </a:prstGeom>
-          <a:noFill/>
-          <a:ln/>
-        </p:spPr>
-        <p:txBody>
-          <a:bodyPr wrap="square" lIns="0" tIns="0" rIns="0" bIns="0" rtlCol="0" anchor="ctr"/>
-          <a:lstStyle/>
-          <a:p>
-            <a:pPr indent="0" marL="0">
-              <a:buNone/>
-            </a:pPr>
-            <a:r>
-              <a:rPr lang="en-US" sz="1250" i="1" dirty="0">
+            <a:pPr indent="0" marL="0">
+              <a:buNone/>
+            </a:pPr>
+            <a:r>
+              <a:rPr lang="en-US" sz="1350" i="1" dirty="0">
                 <a:solidFill>
                   <a:srgbClr val="888888"/>
                 </a:solidFill>
@@ -5456,220 +5570,9 @@
                 <a:ea typeface="Calibri" pitchFamily="34" charset="-122"/>
                 <a:cs typeface="Calibri" pitchFamily="34" charset="-120"/>
               </a:rPr>
-              <a:t>Listening Circles · community survey · story archive — a goodbye run on a scorecard.</a:t>
-            </a:r>
-            <a:endParaRPr lang="en-US" sz="1250" dirty="0"/>
-          </a:p>
-        </p:txBody>
-      </p:sp>
-      <p:sp>
-        <p:nvSpPr>
-          <p:cNvPr id="43" name="Shape 41"/>
-          <p:cNvSpPr/>
-          <p:nvPr/>
-        </p:nvSpPr>
-        <p:spPr>
-          <a:xfrm>
-            <a:off x="5806440" y="1115568"/>
-            <a:ext cx="2880360" cy="3291840"/>
-          </a:xfrm>
-          <a:prstGeom prst="roundRect">
-            <a:avLst>
-              <a:gd name="adj" fmla="val 2857"/>
-            </a:avLst>
-          </a:prstGeom>
-          <a:solidFill>
-            <a:srgbClr val="1F3A4D"/>
-          </a:solidFill>
-          <a:ln/>
-          <a:effectLst>
-            <a:outerShdw sx="100000" sy="100000" kx="0" ky="0" algn="bl" rotWithShape="0" blurRad="101600" dist="38100" dir="5400000">
-              <a:srgbClr val="9AA7AE">
-                <a:alpha val="35000"/>
-              </a:srgbClr>
-            </a:outerShdw>
-          </a:effectLst>
-        </p:spPr>
-      </p:sp>
-      <p:sp>
-        <p:nvSpPr>
-          <p:cNvPr id="44" name="Text 42"/>
-          <p:cNvSpPr/>
-          <p:nvPr/>
-        </p:nvSpPr>
-        <p:spPr>
-          <a:xfrm>
-            <a:off x="5989320" y="1325880"/>
-            <a:ext cx="2514600" cy="2926080"/>
-          </a:xfrm>
-          <a:prstGeom prst="rect">
-            <a:avLst/>
-          </a:prstGeom>
-          <a:noFill/>
-          <a:ln/>
-        </p:spPr>
-        <p:txBody>
-          <a:bodyPr wrap="square" rtlCol="0" anchor="ctr"/>
-          <a:lstStyle/>
-          <a:p>
-            <a:pPr indent="0" marL="0">
-              <a:lnSpc>
-                <a:spcPct val="118000"/>
-              </a:lnSpc>
-              <a:buNone/>
-            </a:pPr>
-            <a:r>
-              <a:rPr lang="en-US" sz="1000" dirty="0">
-                <a:solidFill>
-                  <a:srgbClr val="7BC9A3"/>
-                </a:solidFill>
-                <a:latin typeface="Courier New" pitchFamily="34" charset="0"/>
-                <a:ea typeface="Courier New" pitchFamily="34" charset="-122"/>
-                <a:cs typeface="Courier New" pitchFamily="34" charset="-120"/>
-              </a:rPr>
-              <a:t>● live — agent run</a:t>
-            </a:r>
-            <a:endParaRPr lang="en-US" sz="1000" dirty="0"/>
-          </a:p>
-          <a:p>
-            <a:pPr indent="0" marL="0">
-              <a:lnSpc>
-                <a:spcPct val="118000"/>
-              </a:lnSpc>
-              <a:buNone/>
-            </a:pPr>
-            <a:r>
-              <a:rPr lang="en-US" sz="1000" dirty="0">
-                <a:solidFill>
-                  <a:srgbClr val="8FA3AE"/>
-                </a:solidFill>
-                <a:latin typeface="Courier New" pitchFamily="34" charset="0"/>
-                <a:ea typeface="Courier New" pitchFamily="34" charset="-122"/>
-                <a:cs typeface="Courier New" pitchFamily="34" charset="-120"/>
-              </a:rPr>
-              <a:t>FRI AUG 21 · 8:00 AM</a:t>
-            </a:r>
-            <a:endParaRPr lang="en-US" sz="1000" dirty="0"/>
-          </a:p>
-          <a:p>
-            <a:pPr indent="0" marL="0">
-              <a:lnSpc>
-                <a:spcPct val="118000"/>
-              </a:lnSpc>
-              <a:buNone/>
-            </a:pPr>
-            <a:r>
-              <a:rPr lang="en-US" sz="600" dirty="0">
-                <a:solidFill>
-                  <a:srgbClr val="000000"/>
-                </a:solidFill>
-                <a:latin typeface="Courier New" pitchFamily="34" charset="0"/>
-                <a:ea typeface="Courier New" pitchFamily="34" charset="-122"/>
-                <a:cs typeface="Courier New" pitchFamily="34" charset="-120"/>
-              </a:rPr>
-              <a:t> </a:t>
-            </a:r>
-            <a:endParaRPr lang="en-US" sz="1000" dirty="0"/>
-          </a:p>
-          <a:p>
-            <a:pPr indent="0" marL="0">
-              <a:lnSpc>
-                <a:spcPct val="118000"/>
-              </a:lnSpc>
-              <a:buNone/>
-            </a:pPr>
-            <a:r>
-              <a:rPr lang="en-US" sz="1600" b="1" dirty="0">
-                <a:solidFill>
-                  <a:srgbClr val="C08A2E"/>
-                </a:solidFill>
-                <a:latin typeface="Courier New" pitchFamily="34" charset="0"/>
-                <a:ea typeface="Courier New" pitchFamily="34" charset="-122"/>
-                <a:cs typeface="Courier New" pitchFamily="34" charset="-120"/>
-              </a:rPr>
-              <a:t>[ FRESH NUMBERS ]</a:t>
-            </a:r>
-            <a:endParaRPr lang="en-US" sz="1000" dirty="0"/>
-          </a:p>
-          <a:p>
-            <a:pPr indent="0" marL="0">
-              <a:lnSpc>
-                <a:spcPct val="118000"/>
-              </a:lnSpc>
-              <a:buNone/>
-            </a:pPr>
-            <a:r>
-              <a:rPr lang="en-US" sz="1050" dirty="0">
-                <a:solidFill>
-                  <a:srgbClr val="FFFFFF"/>
-                </a:solidFill>
-                <a:latin typeface="Courier New" pitchFamily="34" charset="0"/>
-                <a:ea typeface="Courier New" pitchFamily="34" charset="-122"/>
-                <a:cs typeface="Courier New" pitchFamily="34" charset="-120"/>
-              </a:rPr>
-              <a:t>filled morning-of from the</a:t>
-            </a:r>
-            <a:endParaRPr lang="en-US" sz="1000" dirty="0"/>
-          </a:p>
-          <a:p>
-            <a:pPr indent="0" marL="0">
-              <a:lnSpc>
-                <a:spcPct val="118000"/>
-              </a:lnSpc>
-              <a:buNone/>
-            </a:pPr>
-            <a:r>
-              <a:rPr lang="en-US" sz="1050" dirty="0">
-                <a:solidFill>
-                  <a:srgbClr val="FFFFFF"/>
-                </a:solidFill>
-                <a:latin typeface="Courier New" pitchFamily="34" charset="0"/>
-                <a:ea typeface="Courier New" pitchFamily="34" charset="-122"/>
-                <a:cs typeface="Courier New" pitchFamily="34" charset="-120"/>
-              </a:rPr>
-              <a:t>daily report agent —</a:t>
-            </a:r>
-            <a:endParaRPr lang="en-US" sz="1000" dirty="0"/>
-          </a:p>
-          <a:p>
-            <a:pPr indent="0" marL="0">
-              <a:lnSpc>
-                <a:spcPct val="118000"/>
-              </a:lnSpc>
-              <a:buNone/>
-            </a:pPr>
-            <a:r>
-              <a:rPr lang="en-US" sz="1050" dirty="0">
-                <a:solidFill>
-                  <a:srgbClr val="FFFFFF"/>
-                </a:solidFill>
-                <a:latin typeface="Courier New" pitchFamily="34" charset="0"/>
-                <a:ea typeface="Courier New" pitchFamily="34" charset="-122"/>
-                <a:cs typeface="Courier New" pitchFamily="34" charset="-120"/>
-              </a:rPr>
-              <a:t>including last night's</a:t>
-            </a:r>
-            <a:endParaRPr lang="en-US" sz="1000" dirty="0"/>
-          </a:p>
-          <a:p>
-            <a:pPr indent="0" marL="0">
-              <a:lnSpc>
-                <a:spcPct val="118000"/>
-              </a:lnSpc>
-              <a:buNone/>
-            </a:pPr>
-            <a:r>
-              <a:rPr lang="en-US" sz="1050" b="1" dirty="0">
-                <a:solidFill>
-                  <a:srgbClr val="FFFFFF"/>
-                </a:solidFill>
-                <a:latin typeface="Courier New" pitchFamily="34" charset="0"/>
-                <a:ea typeface="Courier New" pitchFamily="34" charset="-122"/>
-                <a:cs typeface="Courier New" pitchFamily="34" charset="-120"/>
-              </a:rPr>
-              <a:t>Listening Circle (Aug 20).</a:t>
-            </a:r>
-            <a:endParaRPr lang="en-US" sz="1000" dirty="0"/>
+              <a:t>Institutional memory is a data problem before it is a story problem.</a:t>
+            </a:r>
+            <a:endParaRPr lang="en-US" sz="1350" dirty="0"/>
           </a:p>
         </p:txBody>
       </p:sp>
@@ -5684,6 +5587,1679 @@
 <file path=ppt/slides/slide6.xml><?xml version="1.0" encoding="utf-8"?>
 <p:sld xmlns:a="http://schemas.openxmlformats.org/drawingml/2006/main" xmlns:r="http://schemas.openxmlformats.org/officeDocument/2006/relationships" xmlns:p="http://schemas.openxmlformats.org/presentationml/2006/main">
   <p:cSld name="Slide 6">
+    <p:bg>
+      <p:bgPr>
+        <a:solidFill>
+          <a:srgbClr val="FFFFFF"/>
+        </a:solidFill>
+      </p:bgPr>
+    </p:bg>
+    <p:spTree>
+      <p:nvGrpSpPr>
+        <p:cNvPr id="1" name=""/>
+        <p:cNvGrpSpPr/>
+        <p:nvPr/>
+      </p:nvGrpSpPr>
+      <p:grpSpPr>
+        <a:xfrm>
+          <a:off x="0" y="0"/>
+          <a:ext cx="0" cy="0"/>
+          <a:chOff x="0" y="0"/>
+          <a:chExt cx="0" cy="0"/>
+        </a:xfrm>
+      </p:grpSpPr>
+      <p:sp>
+        <p:nvSpPr>
+          <p:cNvPr id="2" name="Text 0"/>
+          <p:cNvSpPr/>
+          <p:nvPr/>
+        </p:nvSpPr>
+        <p:spPr>
+          <a:xfrm>
+            <a:off x="502920" y="292608"/>
+            <a:ext cx="7498080" cy="566928"/>
+          </a:xfrm>
+          <a:prstGeom prst="rect">
+            <a:avLst/>
+          </a:prstGeom>
+          <a:noFill/>
+          <a:ln/>
+        </p:spPr>
+        <p:txBody>
+          <a:bodyPr wrap="square" lIns="0" tIns="0" rIns="0" bIns="0" rtlCol="0" anchor="ctr"/>
+          <a:lstStyle/>
+          <a:p>
+            <a:pPr indent="0" marL="0">
+              <a:buNone/>
+            </a:pPr>
+            <a:r>
+              <a:rPr lang="en-US" sz="3000" b="1" dirty="0">
+                <a:solidFill>
+                  <a:srgbClr val="2E6E6E"/>
+                </a:solidFill>
+                <a:latin typeface="Cambria" pitchFamily="34" charset="0"/>
+                <a:ea typeface="Cambria" pitchFamily="34" charset="-122"/>
+                <a:cs typeface="Cambria" pitchFamily="34" charset="-120"/>
+              </a:rPr>
+              <a:t>We — the Season of Listening</a:t>
+            </a:r>
+            <a:endParaRPr lang="en-US" sz="3000" dirty="0"/>
+          </a:p>
+        </p:txBody>
+      </p:sp>
+      <p:sp>
+        <p:nvSpPr>
+          <p:cNvPr id="3" name="Shape 1"/>
+          <p:cNvSpPr/>
+          <p:nvPr/>
+        </p:nvSpPr>
+        <p:spPr>
+          <a:xfrm>
+            <a:off x="8403336" y="82296"/>
+            <a:ext cx="164592" cy="164592"/>
+          </a:xfrm>
+          <a:prstGeom prst="ellipse">
+            <a:avLst/>
+          </a:prstGeom>
+          <a:solidFill>
+            <a:srgbClr val="1F3A4D">
+              <a:alpha val="35000"/>
+            </a:srgbClr>
+          </a:solidFill>
+          <a:ln/>
+        </p:spPr>
+      </p:sp>
+      <p:sp>
+        <p:nvSpPr>
+          <p:cNvPr id="4" name="Shape 2"/>
+          <p:cNvSpPr/>
+          <p:nvPr/>
+        </p:nvSpPr>
+        <p:spPr>
+          <a:xfrm>
+            <a:off x="8171261" y="370332"/>
+            <a:ext cx="246888" cy="246888"/>
+          </a:xfrm>
+          <a:prstGeom prst="ellipse">
+            <a:avLst/>
+          </a:prstGeom>
+          <a:solidFill>
+            <a:srgbClr val="2E6E6E"/>
+          </a:solidFill>
+          <a:ln/>
+        </p:spPr>
+      </p:sp>
+      <p:sp>
+        <p:nvSpPr>
+          <p:cNvPr id="5" name="Shape 3"/>
+          <p:cNvSpPr/>
+          <p:nvPr/>
+        </p:nvSpPr>
+        <p:spPr>
+          <a:xfrm>
+            <a:off x="8594263" y="411480"/>
+            <a:ext cx="164592" cy="164592"/>
+          </a:xfrm>
+          <a:prstGeom prst="ellipse">
+            <a:avLst/>
+          </a:prstGeom>
+          <a:solidFill>
+            <a:srgbClr val="C08A2E">
+              <a:alpha val="35000"/>
+            </a:srgbClr>
+          </a:solidFill>
+          <a:ln/>
+        </p:spPr>
+      </p:sp>
+      <p:sp>
+        <p:nvSpPr>
+          <p:cNvPr id="6" name="Text 4"/>
+          <p:cNvSpPr/>
+          <p:nvPr/>
+        </p:nvSpPr>
+        <p:spPr>
+          <a:xfrm>
+            <a:off x="8028432" y="658368"/>
+            <a:ext cx="914400" cy="201168"/>
+          </a:xfrm>
+          <a:prstGeom prst="rect">
+            <a:avLst/>
+          </a:prstGeom>
+          <a:noFill/>
+          <a:ln/>
+        </p:spPr>
+        <p:txBody>
+          <a:bodyPr wrap="square" rtlCol="0" anchor="ctr"/>
+          <a:lstStyle/>
+          <a:p>
+            <a:pPr algn="ctr" indent="0" marL="0">
+              <a:buNone/>
+            </a:pPr>
+            <a:r>
+              <a:rPr lang="en-US" sz="900" b="1" spc="200" kern="0" dirty="0">
+                <a:solidFill>
+                  <a:srgbClr val="2E6E6E"/>
+                </a:solidFill>
+                <a:latin typeface="Calibri" pitchFamily="34" charset="0"/>
+                <a:ea typeface="Calibri" pitchFamily="34" charset="-122"/>
+                <a:cs typeface="Calibri" pitchFamily="34" charset="-120"/>
+              </a:rPr>
+              <a:t>We</a:t>
+            </a:r>
+            <a:endParaRPr lang="en-US" sz="900" dirty="0"/>
+          </a:p>
+        </p:txBody>
+      </p:sp>
+      <p:sp>
+        <p:nvSpPr>
+          <p:cNvPr id="7" name="Text 5"/>
+          <p:cNvSpPr/>
+          <p:nvPr/>
+        </p:nvSpPr>
+        <p:spPr>
+          <a:xfrm>
+            <a:off x="502920" y="841248"/>
+            <a:ext cx="7315200" cy="256032"/>
+          </a:xfrm>
+          <a:prstGeom prst="rect">
+            <a:avLst/>
+          </a:prstGeom>
+          <a:noFill/>
+          <a:ln/>
+        </p:spPr>
+        <p:txBody>
+          <a:bodyPr wrap="square" lIns="0" tIns="0" rIns="0" bIns="0" rtlCol="0" anchor="ctr"/>
+          <a:lstStyle/>
+          <a:p>
+            <a:pPr indent="0" marL="0">
+              <a:buNone/>
+            </a:pPr>
+            <a:r>
+              <a:rPr lang="en-US" sz="1150" i="1" dirty="0">
+                <a:solidFill>
+                  <a:srgbClr val="2E6E6E"/>
+                </a:solidFill>
+                <a:latin typeface="Calibri" pitchFamily="34" charset="0"/>
+                <a:ea typeface="Calibri" pitchFamily="34" charset="-122"/>
+                <a:cs typeface="Calibri" pitchFamily="34" charset="-120"/>
+              </a:rPr>
+              <a:t>The We: former retreatants — individuals, churches, organizations — plus volunteers, donors, staff, and board members.</a:t>
+            </a:r>
+            <a:endParaRPr lang="en-US" sz="1150" dirty="0"/>
+          </a:p>
+        </p:txBody>
+      </p:sp>
+      <p:sp>
+        <p:nvSpPr>
+          <p:cNvPr id="8" name="Text 6"/>
+          <p:cNvSpPr/>
+          <p:nvPr/>
+        </p:nvSpPr>
+        <p:spPr>
+          <a:xfrm>
+            <a:off x="502920" y="1115568"/>
+            <a:ext cx="1627632" cy="1143000"/>
+          </a:xfrm>
+          <a:prstGeom prst="rect">
+            <a:avLst/>
+          </a:prstGeom>
+          <a:noFill/>
+          <a:ln/>
+        </p:spPr>
+        <p:txBody>
+          <a:bodyPr wrap="square" lIns="0" tIns="0" rIns="0" bIns="0" rtlCol="0" anchor="ctr"/>
+          <a:lstStyle/>
+          <a:p>
+            <a:pPr indent="0" marL="0">
+              <a:lnSpc>
+                <a:spcPct val="105000"/>
+              </a:lnSpc>
+              <a:buNone/>
+            </a:pPr>
+            <a:r>
+              <a:rPr lang="en-US" sz="3000" b="1" dirty="0">
+                <a:solidFill>
+                  <a:srgbClr val="2E6E6E"/>
+                </a:solidFill>
+                <a:latin typeface="Calibri" pitchFamily="34" charset="0"/>
+                <a:ea typeface="Calibri" pitchFamily="34" charset="-122"/>
+                <a:cs typeface="Calibri" pitchFamily="34" charset="-120"/>
+              </a:rPr>
+              <a:t>2,436</a:t>
+            </a:r>
+            <a:endParaRPr lang="en-US" sz="3000" dirty="0"/>
+          </a:p>
+          <a:p>
+            <a:pPr indent="0" marL="0">
+              <a:lnSpc>
+                <a:spcPct val="105000"/>
+              </a:lnSpc>
+              <a:buNone/>
+            </a:pPr>
+            <a:r>
+              <a:rPr lang="en-US" sz="1000" dirty="0">
+                <a:solidFill>
+                  <a:srgbClr val="22313D"/>
+                </a:solidFill>
+                <a:latin typeface="Calibri" pitchFamily="34" charset="0"/>
+                <a:ea typeface="Calibri" pitchFamily="34" charset="-122"/>
+                <a:cs typeface="Calibri" pitchFamily="34" charset="-120"/>
+              </a:rPr>
+              <a:t>campaign launch emails delivered</a:t>
+            </a:r>
+            <a:endParaRPr lang="en-US" sz="3000" dirty="0"/>
+          </a:p>
+        </p:txBody>
+      </p:sp>
+      <p:sp>
+        <p:nvSpPr>
+          <p:cNvPr id="9" name="Text 7"/>
+          <p:cNvSpPr/>
+          <p:nvPr/>
+        </p:nvSpPr>
+        <p:spPr>
+          <a:xfrm>
+            <a:off x="2258568" y="1115568"/>
+            <a:ext cx="1627632" cy="1143000"/>
+          </a:xfrm>
+          <a:prstGeom prst="rect">
+            <a:avLst/>
+          </a:prstGeom>
+          <a:noFill/>
+          <a:ln/>
+        </p:spPr>
+        <p:txBody>
+          <a:bodyPr wrap="square" lIns="0" tIns="0" rIns="0" bIns="0" rtlCol="0" anchor="ctr"/>
+          <a:lstStyle/>
+          <a:p>
+            <a:pPr indent="0" marL="0">
+              <a:lnSpc>
+                <a:spcPct val="105000"/>
+              </a:lnSpc>
+              <a:buNone/>
+            </a:pPr>
+            <a:r>
+              <a:rPr lang="en-US" sz="3000" b="1" dirty="0">
+                <a:solidFill>
+                  <a:srgbClr val="2E6E6E"/>
+                </a:solidFill>
+                <a:latin typeface="Calibri" pitchFamily="34" charset="0"/>
+                <a:ea typeface="Calibri" pitchFamily="34" charset="-122"/>
+                <a:cs typeface="Calibri" pitchFamily="34" charset="-120"/>
+              </a:rPr>
+              <a:t>97.95%</a:t>
+            </a:r>
+            <a:endParaRPr lang="en-US" sz="3000" dirty="0"/>
+          </a:p>
+          <a:p>
+            <a:pPr indent="0" marL="0">
+              <a:lnSpc>
+                <a:spcPct val="105000"/>
+              </a:lnSpc>
+              <a:buNone/>
+            </a:pPr>
+            <a:r>
+              <a:rPr lang="en-US" sz="1000" dirty="0">
+                <a:solidFill>
+                  <a:srgbClr val="22313D"/>
+                </a:solidFill>
+                <a:latin typeface="Calibri" pitchFamily="34" charset="0"/>
+                <a:ea typeface="Calibri" pitchFamily="34" charset="-122"/>
+                <a:cs typeface="Calibri" pitchFamily="34" charset="-120"/>
+              </a:rPr>
+              <a:t>delivery rate on a rebuilt list</a:t>
+            </a:r>
+            <a:endParaRPr lang="en-US" sz="3000" dirty="0"/>
+          </a:p>
+        </p:txBody>
+      </p:sp>
+      <p:sp>
+        <p:nvSpPr>
+          <p:cNvPr id="10" name="Text 8"/>
+          <p:cNvSpPr/>
+          <p:nvPr/>
+        </p:nvSpPr>
+        <p:spPr>
+          <a:xfrm>
+            <a:off x="4014216" y="1115568"/>
+            <a:ext cx="1627632" cy="1143000"/>
+          </a:xfrm>
+          <a:prstGeom prst="rect">
+            <a:avLst/>
+          </a:prstGeom>
+          <a:noFill/>
+          <a:ln/>
+        </p:spPr>
+        <p:txBody>
+          <a:bodyPr wrap="square" lIns="0" tIns="0" rIns="0" bIns="0" rtlCol="0" anchor="ctr"/>
+          <a:lstStyle/>
+          <a:p>
+            <a:pPr indent="0" marL="0">
+              <a:lnSpc>
+                <a:spcPct val="105000"/>
+              </a:lnSpc>
+              <a:buNone/>
+            </a:pPr>
+            <a:r>
+              <a:rPr lang="en-US" sz="3000" b="1" dirty="0">
+                <a:solidFill>
+                  <a:srgbClr val="2E6E6E"/>
+                </a:solidFill>
+                <a:latin typeface="Calibri" pitchFamily="34" charset="0"/>
+                <a:ea typeface="Calibri" pitchFamily="34" charset="-122"/>
+                <a:cs typeface="Calibri" pitchFamily="34" charset="-120"/>
+              </a:rPr>
+              <a:t>31.5%</a:t>
+            </a:r>
+            <a:endParaRPr lang="en-US" sz="3000" dirty="0"/>
+          </a:p>
+          <a:p>
+            <a:pPr indent="0" marL="0">
+              <a:lnSpc>
+                <a:spcPct val="105000"/>
+              </a:lnSpc>
+              <a:buNone/>
+            </a:pPr>
+            <a:r>
+              <a:rPr lang="en-US" sz="1000" dirty="0">
+                <a:solidFill>
+                  <a:srgbClr val="22313D"/>
+                </a:solidFill>
+                <a:latin typeface="Calibri" pitchFamily="34" charset="0"/>
+                <a:ea typeface="Calibri" pitchFamily="34" charset="-122"/>
+                <a:cs typeface="Calibri" pitchFamily="34" charset="-120"/>
+              </a:rPr>
+              <a:t>opens — sector average is ~28.6%</a:t>
+            </a:r>
+            <a:endParaRPr lang="en-US" sz="3000" dirty="0"/>
+          </a:p>
+        </p:txBody>
+      </p:sp>
+      <p:sp>
+        <p:nvSpPr>
+          <p:cNvPr id="11" name="Shape 9"/>
+          <p:cNvSpPr/>
+          <p:nvPr/>
+        </p:nvSpPr>
+        <p:spPr>
+          <a:xfrm>
+            <a:off x="502920" y="2487168"/>
+            <a:ext cx="2377440" cy="384048"/>
+          </a:xfrm>
+          <a:prstGeom prst="rect">
+            <a:avLst/>
+          </a:prstGeom>
+          <a:solidFill>
+            <a:srgbClr val="2E6E6E"/>
+          </a:solidFill>
+          <a:ln w="9525">
+            <a:solidFill>
+              <a:srgbClr val="D5DFE1"/>
+            </a:solidFill>
+            <a:prstDash val="solid"/>
+          </a:ln>
+        </p:spPr>
+      </p:sp>
+      <p:sp>
+        <p:nvSpPr>
+          <p:cNvPr id="12" name="Text 10"/>
+          <p:cNvSpPr/>
+          <p:nvPr/>
+        </p:nvSpPr>
+        <p:spPr>
+          <a:xfrm>
+            <a:off x="576072" y="2487168"/>
+            <a:ext cx="2231136" cy="384048"/>
+          </a:xfrm>
+          <a:prstGeom prst="rect">
+            <a:avLst/>
+          </a:prstGeom>
+          <a:noFill/>
+          <a:ln/>
+        </p:spPr>
+        <p:txBody>
+          <a:bodyPr wrap="square" lIns="0" tIns="0" rIns="0" bIns="0" rtlCol="0" anchor="ctr"/>
+          <a:lstStyle/>
+          <a:p>
+            <a:pPr algn="l" indent="0" marL="0">
+              <a:buNone/>
+            </a:pPr>
+            <a:r>
+              <a:rPr lang="en-US" sz="1100" b="1" dirty="0">
+                <a:solidFill>
+                  <a:srgbClr val="FFFFFF"/>
+                </a:solidFill>
+                <a:latin typeface="Calibri" pitchFamily="34" charset="0"/>
+                <a:ea typeface="Calibri" pitchFamily="34" charset="-122"/>
+                <a:cs typeface="Calibri" pitchFamily="34" charset="-120"/>
+              </a:rPr>
+              <a:t>Stream</a:t>
+            </a:r>
+            <a:endParaRPr lang="en-US" sz="1100" dirty="0"/>
+          </a:p>
+        </p:txBody>
+      </p:sp>
+      <p:sp>
+        <p:nvSpPr>
+          <p:cNvPr id="13" name="Shape 11"/>
+          <p:cNvSpPr/>
+          <p:nvPr/>
+        </p:nvSpPr>
+        <p:spPr>
+          <a:xfrm>
+            <a:off x="2880360" y="2487168"/>
+            <a:ext cx="868680" cy="384048"/>
+          </a:xfrm>
+          <a:prstGeom prst="rect">
+            <a:avLst/>
+          </a:prstGeom>
+          <a:solidFill>
+            <a:srgbClr val="2E6E6E"/>
+          </a:solidFill>
+          <a:ln w="9525">
+            <a:solidFill>
+              <a:srgbClr val="D5DFE1"/>
+            </a:solidFill>
+            <a:prstDash val="solid"/>
+          </a:ln>
+        </p:spPr>
+      </p:sp>
+      <p:sp>
+        <p:nvSpPr>
+          <p:cNvPr id="14" name="Text 12"/>
+          <p:cNvSpPr/>
+          <p:nvPr/>
+        </p:nvSpPr>
+        <p:spPr>
+          <a:xfrm>
+            <a:off x="2953512" y="2487168"/>
+            <a:ext cx="722376" cy="384048"/>
+          </a:xfrm>
+          <a:prstGeom prst="rect">
+            <a:avLst/>
+          </a:prstGeom>
+          <a:noFill/>
+          <a:ln/>
+        </p:spPr>
+        <p:txBody>
+          <a:bodyPr wrap="square" lIns="0" tIns="0" rIns="0" bIns="0" rtlCol="0" anchor="ctr"/>
+          <a:lstStyle/>
+          <a:p>
+            <a:pPr algn="ctr" indent="0" marL="0">
+              <a:buNone/>
+            </a:pPr>
+            <a:r>
+              <a:rPr lang="en-US" sz="1100" b="1" dirty="0">
+                <a:solidFill>
+                  <a:srgbClr val="FFFFFF"/>
+                </a:solidFill>
+                <a:latin typeface="Calibri" pitchFamily="34" charset="0"/>
+                <a:ea typeface="Calibri" pitchFamily="34" charset="-122"/>
+                <a:cs typeface="Calibri" pitchFamily="34" charset="-120"/>
+              </a:rPr>
+              <a:t>Floor</a:t>
+            </a:r>
+            <a:endParaRPr lang="en-US" sz="1100" dirty="0"/>
+          </a:p>
+        </p:txBody>
+      </p:sp>
+      <p:sp>
+        <p:nvSpPr>
+          <p:cNvPr id="15" name="Shape 13"/>
+          <p:cNvSpPr/>
+          <p:nvPr/>
+        </p:nvSpPr>
+        <p:spPr>
+          <a:xfrm>
+            <a:off x="3749040" y="2487168"/>
+            <a:ext cx="868680" cy="384048"/>
+          </a:xfrm>
+          <a:prstGeom prst="rect">
+            <a:avLst/>
+          </a:prstGeom>
+          <a:solidFill>
+            <a:srgbClr val="2E6E6E"/>
+          </a:solidFill>
+          <a:ln w="9525">
+            <a:solidFill>
+              <a:srgbClr val="D5DFE1"/>
+            </a:solidFill>
+            <a:prstDash val="solid"/>
+          </a:ln>
+        </p:spPr>
+      </p:sp>
+      <p:sp>
+        <p:nvSpPr>
+          <p:cNvPr id="16" name="Text 14"/>
+          <p:cNvSpPr/>
+          <p:nvPr/>
+        </p:nvSpPr>
+        <p:spPr>
+          <a:xfrm>
+            <a:off x="3822192" y="2487168"/>
+            <a:ext cx="722376" cy="384048"/>
+          </a:xfrm>
+          <a:prstGeom prst="rect">
+            <a:avLst/>
+          </a:prstGeom>
+          <a:noFill/>
+          <a:ln/>
+        </p:spPr>
+        <p:txBody>
+          <a:bodyPr wrap="square" lIns="0" tIns="0" rIns="0" bIns="0" rtlCol="0" anchor="ctr"/>
+          <a:lstStyle/>
+          <a:p>
+            <a:pPr algn="ctr" indent="0" marL="0">
+              <a:buNone/>
+            </a:pPr>
+            <a:r>
+              <a:rPr lang="en-US" sz="1100" b="1" dirty="0">
+                <a:solidFill>
+                  <a:srgbClr val="FFFFFF"/>
+                </a:solidFill>
+                <a:latin typeface="Calibri" pitchFamily="34" charset="0"/>
+                <a:ea typeface="Calibri" pitchFamily="34" charset="-122"/>
+                <a:cs typeface="Calibri" pitchFamily="34" charset="-120"/>
+              </a:rPr>
+              <a:t>Target</a:t>
+            </a:r>
+            <a:endParaRPr lang="en-US" sz="1100" dirty="0"/>
+          </a:p>
+        </p:txBody>
+      </p:sp>
+      <p:sp>
+        <p:nvSpPr>
+          <p:cNvPr id="17" name="Shape 15"/>
+          <p:cNvSpPr/>
+          <p:nvPr/>
+        </p:nvSpPr>
+        <p:spPr>
+          <a:xfrm>
+            <a:off x="4617720" y="2487168"/>
+            <a:ext cx="868680" cy="384048"/>
+          </a:xfrm>
+          <a:prstGeom prst="rect">
+            <a:avLst/>
+          </a:prstGeom>
+          <a:solidFill>
+            <a:srgbClr val="2E6E6E"/>
+          </a:solidFill>
+          <a:ln w="9525">
+            <a:solidFill>
+              <a:srgbClr val="D5DFE1"/>
+            </a:solidFill>
+            <a:prstDash val="solid"/>
+          </a:ln>
+        </p:spPr>
+      </p:sp>
+      <p:sp>
+        <p:nvSpPr>
+          <p:cNvPr id="18" name="Text 16"/>
+          <p:cNvSpPr/>
+          <p:nvPr/>
+        </p:nvSpPr>
+        <p:spPr>
+          <a:xfrm>
+            <a:off x="4690872" y="2487168"/>
+            <a:ext cx="722376" cy="384048"/>
+          </a:xfrm>
+          <a:prstGeom prst="rect">
+            <a:avLst/>
+          </a:prstGeom>
+          <a:noFill/>
+          <a:ln/>
+        </p:spPr>
+        <p:txBody>
+          <a:bodyPr wrap="square" lIns="0" tIns="0" rIns="0" bIns="0" rtlCol="0" anchor="ctr"/>
+          <a:lstStyle/>
+          <a:p>
+            <a:pPr algn="ctr" indent="0" marL="0">
+              <a:buNone/>
+            </a:pPr>
+            <a:r>
+              <a:rPr lang="en-US" sz="1100" b="1" dirty="0">
+                <a:solidFill>
+                  <a:srgbClr val="FFFFFF"/>
+                </a:solidFill>
+                <a:latin typeface="Calibri" pitchFamily="34" charset="0"/>
+                <a:ea typeface="Calibri" pitchFamily="34" charset="-122"/>
+                <a:cs typeface="Calibri" pitchFamily="34" charset="-120"/>
+              </a:rPr>
+              <a:t>Stretch</a:t>
+            </a:r>
+            <a:endParaRPr lang="en-US" sz="1100" dirty="0"/>
+          </a:p>
+        </p:txBody>
+      </p:sp>
+      <p:sp>
+        <p:nvSpPr>
+          <p:cNvPr id="19" name="Shape 17"/>
+          <p:cNvSpPr/>
+          <p:nvPr/>
+        </p:nvSpPr>
+        <p:spPr>
+          <a:xfrm>
+            <a:off x="502920" y="2871216"/>
+            <a:ext cx="2377440" cy="384048"/>
+          </a:xfrm>
+          <a:prstGeom prst="rect">
+            <a:avLst/>
+          </a:prstGeom>
+          <a:solidFill>
+            <a:srgbClr val="EEF3F4"/>
+          </a:solidFill>
+          <a:ln w="9525">
+            <a:solidFill>
+              <a:srgbClr val="D5DFE1"/>
+            </a:solidFill>
+            <a:prstDash val="solid"/>
+          </a:ln>
+        </p:spPr>
+      </p:sp>
+      <p:sp>
+        <p:nvSpPr>
+          <p:cNvPr id="20" name="Text 18"/>
+          <p:cNvSpPr/>
+          <p:nvPr/>
+        </p:nvSpPr>
+        <p:spPr>
+          <a:xfrm>
+            <a:off x="576072" y="2871216"/>
+            <a:ext cx="2231136" cy="384048"/>
+          </a:xfrm>
+          <a:prstGeom prst="rect">
+            <a:avLst/>
+          </a:prstGeom>
+          <a:noFill/>
+          <a:ln/>
+        </p:spPr>
+        <p:txBody>
+          <a:bodyPr wrap="square" lIns="0" tIns="0" rIns="0" bIns="0" rtlCol="0" anchor="ctr"/>
+          <a:lstStyle/>
+          <a:p>
+            <a:pPr algn="l" indent="0" marL="0">
+              <a:buNone/>
+            </a:pPr>
+            <a:r>
+              <a:rPr lang="en-US" sz="1100" dirty="0">
+                <a:solidFill>
+                  <a:srgbClr val="22313D"/>
+                </a:solidFill>
+                <a:latin typeface="Calibri" pitchFamily="34" charset="0"/>
+                <a:ea typeface="Calibri" pitchFamily="34" charset="-122"/>
+                <a:cs typeface="Calibri" pitchFamily="34" charset="-120"/>
+              </a:rPr>
+              <a:t>Survey responses</a:t>
+            </a:r>
+            <a:endParaRPr lang="en-US" sz="1100" dirty="0"/>
+          </a:p>
+        </p:txBody>
+      </p:sp>
+      <p:sp>
+        <p:nvSpPr>
+          <p:cNvPr id="21" name="Shape 19"/>
+          <p:cNvSpPr/>
+          <p:nvPr/>
+        </p:nvSpPr>
+        <p:spPr>
+          <a:xfrm>
+            <a:off x="2880360" y="2871216"/>
+            <a:ext cx="868680" cy="384048"/>
+          </a:xfrm>
+          <a:prstGeom prst="rect">
+            <a:avLst/>
+          </a:prstGeom>
+          <a:solidFill>
+            <a:srgbClr val="EEF3F4"/>
+          </a:solidFill>
+          <a:ln w="9525">
+            <a:solidFill>
+              <a:srgbClr val="D5DFE1"/>
+            </a:solidFill>
+            <a:prstDash val="solid"/>
+          </a:ln>
+        </p:spPr>
+      </p:sp>
+      <p:sp>
+        <p:nvSpPr>
+          <p:cNvPr id="22" name="Text 20"/>
+          <p:cNvSpPr/>
+          <p:nvPr/>
+        </p:nvSpPr>
+        <p:spPr>
+          <a:xfrm>
+            <a:off x="2953512" y="2871216"/>
+            <a:ext cx="722376" cy="384048"/>
+          </a:xfrm>
+          <a:prstGeom prst="rect">
+            <a:avLst/>
+          </a:prstGeom>
+          <a:noFill/>
+          <a:ln/>
+        </p:spPr>
+        <p:txBody>
+          <a:bodyPr wrap="square" lIns="0" tIns="0" rIns="0" bIns="0" rtlCol="0" anchor="ctr"/>
+          <a:lstStyle/>
+          <a:p>
+            <a:pPr algn="ctr" indent="0" marL="0">
+              <a:buNone/>
+            </a:pPr>
+            <a:r>
+              <a:rPr lang="en-US" sz="1100" dirty="0">
+                <a:solidFill>
+                  <a:srgbClr val="22313D"/>
+                </a:solidFill>
+                <a:latin typeface="Calibri" pitchFamily="34" charset="0"/>
+                <a:ea typeface="Calibri" pitchFamily="34" charset="-122"/>
+                <a:cs typeface="Calibri" pitchFamily="34" charset="-120"/>
+              </a:rPr>
+              <a:t>60</a:t>
+            </a:r>
+            <a:endParaRPr lang="en-US" sz="1100" dirty="0"/>
+          </a:p>
+        </p:txBody>
+      </p:sp>
+      <p:sp>
+        <p:nvSpPr>
+          <p:cNvPr id="23" name="Shape 21"/>
+          <p:cNvSpPr/>
+          <p:nvPr/>
+        </p:nvSpPr>
+        <p:spPr>
+          <a:xfrm>
+            <a:off x="3749040" y="2871216"/>
+            <a:ext cx="868680" cy="384048"/>
+          </a:xfrm>
+          <a:prstGeom prst="rect">
+            <a:avLst/>
+          </a:prstGeom>
+          <a:solidFill>
+            <a:srgbClr val="EEF3F4"/>
+          </a:solidFill>
+          <a:ln w="9525">
+            <a:solidFill>
+              <a:srgbClr val="D5DFE1"/>
+            </a:solidFill>
+            <a:prstDash val="solid"/>
+          </a:ln>
+        </p:spPr>
+      </p:sp>
+      <p:sp>
+        <p:nvSpPr>
+          <p:cNvPr id="24" name="Text 22"/>
+          <p:cNvSpPr/>
+          <p:nvPr/>
+        </p:nvSpPr>
+        <p:spPr>
+          <a:xfrm>
+            <a:off x="3822192" y="2871216"/>
+            <a:ext cx="722376" cy="384048"/>
+          </a:xfrm>
+          <a:prstGeom prst="rect">
+            <a:avLst/>
+          </a:prstGeom>
+          <a:noFill/>
+          <a:ln/>
+        </p:spPr>
+        <p:txBody>
+          <a:bodyPr wrap="square" lIns="0" tIns="0" rIns="0" bIns="0" rtlCol="0" anchor="ctr"/>
+          <a:lstStyle/>
+          <a:p>
+            <a:pPr algn="ctr" indent="0" marL="0">
+              <a:buNone/>
+            </a:pPr>
+            <a:r>
+              <a:rPr lang="en-US" sz="1100" dirty="0">
+                <a:solidFill>
+                  <a:srgbClr val="22313D"/>
+                </a:solidFill>
+                <a:latin typeface="Calibri" pitchFamily="34" charset="0"/>
+                <a:ea typeface="Calibri" pitchFamily="34" charset="-122"/>
+                <a:cs typeface="Calibri" pitchFamily="34" charset="-120"/>
+              </a:rPr>
+              <a:t>100</a:t>
+            </a:r>
+            <a:endParaRPr lang="en-US" sz="1100" dirty="0"/>
+          </a:p>
+        </p:txBody>
+      </p:sp>
+      <p:sp>
+        <p:nvSpPr>
+          <p:cNvPr id="25" name="Shape 23"/>
+          <p:cNvSpPr/>
+          <p:nvPr/>
+        </p:nvSpPr>
+        <p:spPr>
+          <a:xfrm>
+            <a:off x="4617720" y="2871216"/>
+            <a:ext cx="868680" cy="384048"/>
+          </a:xfrm>
+          <a:prstGeom prst="rect">
+            <a:avLst/>
+          </a:prstGeom>
+          <a:solidFill>
+            <a:srgbClr val="EEF3F4"/>
+          </a:solidFill>
+          <a:ln w="9525">
+            <a:solidFill>
+              <a:srgbClr val="D5DFE1"/>
+            </a:solidFill>
+            <a:prstDash val="solid"/>
+          </a:ln>
+        </p:spPr>
+      </p:sp>
+      <p:sp>
+        <p:nvSpPr>
+          <p:cNvPr id="26" name="Text 24"/>
+          <p:cNvSpPr/>
+          <p:nvPr/>
+        </p:nvSpPr>
+        <p:spPr>
+          <a:xfrm>
+            <a:off x="4690872" y="2871216"/>
+            <a:ext cx="722376" cy="384048"/>
+          </a:xfrm>
+          <a:prstGeom prst="rect">
+            <a:avLst/>
+          </a:prstGeom>
+          <a:noFill/>
+          <a:ln/>
+        </p:spPr>
+        <p:txBody>
+          <a:bodyPr wrap="square" lIns="0" tIns="0" rIns="0" bIns="0" rtlCol="0" anchor="ctr"/>
+          <a:lstStyle/>
+          <a:p>
+            <a:pPr algn="ctr" indent="0" marL="0">
+              <a:buNone/>
+            </a:pPr>
+            <a:r>
+              <a:rPr lang="en-US" sz="1100" dirty="0">
+                <a:solidFill>
+                  <a:srgbClr val="22313D"/>
+                </a:solidFill>
+                <a:latin typeface="Calibri" pitchFamily="34" charset="0"/>
+                <a:ea typeface="Calibri" pitchFamily="34" charset="-122"/>
+                <a:cs typeface="Calibri" pitchFamily="34" charset="-120"/>
+              </a:rPr>
+              <a:t>150</a:t>
+            </a:r>
+            <a:endParaRPr lang="en-US" sz="1100" dirty="0"/>
+          </a:p>
+        </p:txBody>
+      </p:sp>
+      <p:sp>
+        <p:nvSpPr>
+          <p:cNvPr id="27" name="Shape 25"/>
+          <p:cNvSpPr/>
+          <p:nvPr/>
+        </p:nvSpPr>
+        <p:spPr>
+          <a:xfrm>
+            <a:off x="502920" y="3255264"/>
+            <a:ext cx="2377440" cy="384048"/>
+          </a:xfrm>
+          <a:prstGeom prst="rect">
+            <a:avLst/>
+          </a:prstGeom>
+          <a:solidFill>
+            <a:srgbClr val="FFFFFF"/>
+          </a:solidFill>
+          <a:ln w="9525">
+            <a:solidFill>
+              <a:srgbClr val="D5DFE1"/>
+            </a:solidFill>
+            <a:prstDash val="solid"/>
+          </a:ln>
+        </p:spPr>
+      </p:sp>
+      <p:sp>
+        <p:nvSpPr>
+          <p:cNvPr id="28" name="Text 26"/>
+          <p:cNvSpPr/>
+          <p:nvPr/>
+        </p:nvSpPr>
+        <p:spPr>
+          <a:xfrm>
+            <a:off x="576072" y="3255264"/>
+            <a:ext cx="2231136" cy="384048"/>
+          </a:xfrm>
+          <a:prstGeom prst="rect">
+            <a:avLst/>
+          </a:prstGeom>
+          <a:noFill/>
+          <a:ln/>
+        </p:spPr>
+        <p:txBody>
+          <a:bodyPr wrap="square" lIns="0" tIns="0" rIns="0" bIns="0" rtlCol="0" anchor="ctr"/>
+          <a:lstStyle/>
+          <a:p>
+            <a:pPr algn="l" indent="0" marL="0">
+              <a:buNone/>
+            </a:pPr>
+            <a:r>
+              <a:rPr lang="en-US" sz="1100" dirty="0">
+                <a:solidFill>
+                  <a:srgbClr val="22313D"/>
+                </a:solidFill>
+                <a:latin typeface="Calibri" pitchFamily="34" charset="0"/>
+                <a:ea typeface="Calibri" pitchFamily="34" charset="-122"/>
+                <a:cs typeface="Calibri" pitchFamily="34" charset="-120"/>
+              </a:rPr>
+              <a:t>Circle RSVPs (each)</a:t>
+            </a:r>
+            <a:endParaRPr lang="en-US" sz="1100" dirty="0"/>
+          </a:p>
+        </p:txBody>
+      </p:sp>
+      <p:sp>
+        <p:nvSpPr>
+          <p:cNvPr id="29" name="Shape 27"/>
+          <p:cNvSpPr/>
+          <p:nvPr/>
+        </p:nvSpPr>
+        <p:spPr>
+          <a:xfrm>
+            <a:off x="2880360" y="3255264"/>
+            <a:ext cx="868680" cy="384048"/>
+          </a:xfrm>
+          <a:prstGeom prst="rect">
+            <a:avLst/>
+          </a:prstGeom>
+          <a:solidFill>
+            <a:srgbClr val="FFFFFF"/>
+          </a:solidFill>
+          <a:ln w="9525">
+            <a:solidFill>
+              <a:srgbClr val="D5DFE1"/>
+            </a:solidFill>
+            <a:prstDash val="solid"/>
+          </a:ln>
+        </p:spPr>
+      </p:sp>
+      <p:sp>
+        <p:nvSpPr>
+          <p:cNvPr id="30" name="Text 28"/>
+          <p:cNvSpPr/>
+          <p:nvPr/>
+        </p:nvSpPr>
+        <p:spPr>
+          <a:xfrm>
+            <a:off x="2953512" y="3255264"/>
+            <a:ext cx="722376" cy="384048"/>
+          </a:xfrm>
+          <a:prstGeom prst="rect">
+            <a:avLst/>
+          </a:prstGeom>
+          <a:noFill/>
+          <a:ln/>
+        </p:spPr>
+        <p:txBody>
+          <a:bodyPr wrap="square" lIns="0" tIns="0" rIns="0" bIns="0" rtlCol="0" anchor="ctr"/>
+          <a:lstStyle/>
+          <a:p>
+            <a:pPr algn="ctr" indent="0" marL="0">
+              <a:buNone/>
+            </a:pPr>
+            <a:r>
+              <a:rPr lang="en-US" sz="1100" dirty="0">
+                <a:solidFill>
+                  <a:srgbClr val="22313D"/>
+                </a:solidFill>
+                <a:latin typeface="Calibri" pitchFamily="34" charset="0"/>
+                <a:ea typeface="Calibri" pitchFamily="34" charset="-122"/>
+                <a:cs typeface="Calibri" pitchFamily="34" charset="-120"/>
+              </a:rPr>
+              <a:t>10</a:t>
+            </a:r>
+            <a:endParaRPr lang="en-US" sz="1100" dirty="0"/>
+          </a:p>
+        </p:txBody>
+      </p:sp>
+      <p:sp>
+        <p:nvSpPr>
+          <p:cNvPr id="31" name="Shape 29"/>
+          <p:cNvSpPr/>
+          <p:nvPr/>
+        </p:nvSpPr>
+        <p:spPr>
+          <a:xfrm>
+            <a:off x="3749040" y="3255264"/>
+            <a:ext cx="868680" cy="384048"/>
+          </a:xfrm>
+          <a:prstGeom prst="rect">
+            <a:avLst/>
+          </a:prstGeom>
+          <a:solidFill>
+            <a:srgbClr val="FFFFFF"/>
+          </a:solidFill>
+          <a:ln w="9525">
+            <a:solidFill>
+              <a:srgbClr val="D5DFE1"/>
+            </a:solidFill>
+            <a:prstDash val="solid"/>
+          </a:ln>
+        </p:spPr>
+      </p:sp>
+      <p:sp>
+        <p:nvSpPr>
+          <p:cNvPr id="32" name="Text 30"/>
+          <p:cNvSpPr/>
+          <p:nvPr/>
+        </p:nvSpPr>
+        <p:spPr>
+          <a:xfrm>
+            <a:off x="3822192" y="3255264"/>
+            <a:ext cx="722376" cy="384048"/>
+          </a:xfrm>
+          <a:prstGeom prst="rect">
+            <a:avLst/>
+          </a:prstGeom>
+          <a:noFill/>
+          <a:ln/>
+        </p:spPr>
+        <p:txBody>
+          <a:bodyPr wrap="square" lIns="0" tIns="0" rIns="0" bIns="0" rtlCol="0" anchor="ctr"/>
+          <a:lstStyle/>
+          <a:p>
+            <a:pPr algn="ctr" indent="0" marL="0">
+              <a:buNone/>
+            </a:pPr>
+            <a:r>
+              <a:rPr lang="en-US" sz="1100" dirty="0">
+                <a:solidFill>
+                  <a:srgbClr val="22313D"/>
+                </a:solidFill>
+                <a:latin typeface="Calibri" pitchFamily="34" charset="0"/>
+                <a:ea typeface="Calibri" pitchFamily="34" charset="-122"/>
+                <a:cs typeface="Calibri" pitchFamily="34" charset="-120"/>
+              </a:rPr>
+              <a:t>20–25</a:t>
+            </a:r>
+            <a:endParaRPr lang="en-US" sz="1100" dirty="0"/>
+          </a:p>
+        </p:txBody>
+      </p:sp>
+      <p:sp>
+        <p:nvSpPr>
+          <p:cNvPr id="33" name="Shape 31"/>
+          <p:cNvSpPr/>
+          <p:nvPr/>
+        </p:nvSpPr>
+        <p:spPr>
+          <a:xfrm>
+            <a:off x="4617720" y="3255264"/>
+            <a:ext cx="868680" cy="384048"/>
+          </a:xfrm>
+          <a:prstGeom prst="rect">
+            <a:avLst/>
+          </a:prstGeom>
+          <a:solidFill>
+            <a:srgbClr val="FFFFFF"/>
+          </a:solidFill>
+          <a:ln w="9525">
+            <a:solidFill>
+              <a:srgbClr val="D5DFE1"/>
+            </a:solidFill>
+            <a:prstDash val="solid"/>
+          </a:ln>
+        </p:spPr>
+      </p:sp>
+      <p:sp>
+        <p:nvSpPr>
+          <p:cNvPr id="34" name="Text 32"/>
+          <p:cNvSpPr/>
+          <p:nvPr/>
+        </p:nvSpPr>
+        <p:spPr>
+          <a:xfrm>
+            <a:off x="4690872" y="3255264"/>
+            <a:ext cx="722376" cy="384048"/>
+          </a:xfrm>
+          <a:prstGeom prst="rect">
+            <a:avLst/>
+          </a:prstGeom>
+          <a:noFill/>
+          <a:ln/>
+        </p:spPr>
+        <p:txBody>
+          <a:bodyPr wrap="square" lIns="0" tIns="0" rIns="0" bIns="0" rtlCol="0" anchor="ctr"/>
+          <a:lstStyle/>
+          <a:p>
+            <a:pPr algn="ctr" indent="0" marL="0">
+              <a:buNone/>
+            </a:pPr>
+            <a:r>
+              <a:rPr lang="en-US" sz="1100" dirty="0">
+                <a:solidFill>
+                  <a:srgbClr val="22313D"/>
+                </a:solidFill>
+                <a:latin typeface="Calibri" pitchFamily="34" charset="0"/>
+                <a:ea typeface="Calibri" pitchFamily="34" charset="-122"/>
+                <a:cs typeface="Calibri" pitchFamily="34" charset="-120"/>
+              </a:rPr>
+              <a:t>30+</a:t>
+            </a:r>
+            <a:endParaRPr lang="en-US" sz="1100" dirty="0"/>
+          </a:p>
+        </p:txBody>
+      </p:sp>
+      <p:sp>
+        <p:nvSpPr>
+          <p:cNvPr id="35" name="Shape 33"/>
+          <p:cNvSpPr/>
+          <p:nvPr/>
+        </p:nvSpPr>
+        <p:spPr>
+          <a:xfrm>
+            <a:off x="502920" y="3639312"/>
+            <a:ext cx="2377440" cy="384048"/>
+          </a:xfrm>
+          <a:prstGeom prst="rect">
+            <a:avLst/>
+          </a:prstGeom>
+          <a:solidFill>
+            <a:srgbClr val="EEF3F4"/>
+          </a:solidFill>
+          <a:ln w="9525">
+            <a:solidFill>
+              <a:srgbClr val="D5DFE1"/>
+            </a:solidFill>
+            <a:prstDash val="solid"/>
+          </a:ln>
+        </p:spPr>
+      </p:sp>
+      <p:sp>
+        <p:nvSpPr>
+          <p:cNvPr id="36" name="Text 34"/>
+          <p:cNvSpPr/>
+          <p:nvPr/>
+        </p:nvSpPr>
+        <p:spPr>
+          <a:xfrm>
+            <a:off x="576072" y="3639312"/>
+            <a:ext cx="2231136" cy="384048"/>
+          </a:xfrm>
+          <a:prstGeom prst="rect">
+            <a:avLst/>
+          </a:prstGeom>
+          <a:noFill/>
+          <a:ln/>
+        </p:spPr>
+        <p:txBody>
+          <a:bodyPr wrap="square" lIns="0" tIns="0" rIns="0" bIns="0" rtlCol="0" anchor="ctr"/>
+          <a:lstStyle/>
+          <a:p>
+            <a:pPr algn="l" indent="0" marL="0">
+              <a:buNone/>
+            </a:pPr>
+            <a:r>
+              <a:rPr lang="en-US" sz="1100" dirty="0">
+                <a:solidFill>
+                  <a:srgbClr val="22313D"/>
+                </a:solidFill>
+                <a:latin typeface="Calibri" pitchFamily="34" charset="0"/>
+                <a:ea typeface="Calibri" pitchFamily="34" charset="-122"/>
+                <a:cs typeface="Calibri" pitchFamily="34" charset="-120"/>
+              </a:rPr>
+              <a:t>Story-archive gifts</a:t>
+            </a:r>
+            <a:endParaRPr lang="en-US" sz="1100" dirty="0"/>
+          </a:p>
+        </p:txBody>
+      </p:sp>
+      <p:sp>
+        <p:nvSpPr>
+          <p:cNvPr id="37" name="Shape 35"/>
+          <p:cNvSpPr/>
+          <p:nvPr/>
+        </p:nvSpPr>
+        <p:spPr>
+          <a:xfrm>
+            <a:off x="2880360" y="3639312"/>
+            <a:ext cx="868680" cy="384048"/>
+          </a:xfrm>
+          <a:prstGeom prst="rect">
+            <a:avLst/>
+          </a:prstGeom>
+          <a:solidFill>
+            <a:srgbClr val="EEF3F4"/>
+          </a:solidFill>
+          <a:ln w="9525">
+            <a:solidFill>
+              <a:srgbClr val="D5DFE1"/>
+            </a:solidFill>
+            <a:prstDash val="solid"/>
+          </a:ln>
+        </p:spPr>
+      </p:sp>
+      <p:sp>
+        <p:nvSpPr>
+          <p:cNvPr id="38" name="Text 36"/>
+          <p:cNvSpPr/>
+          <p:nvPr/>
+        </p:nvSpPr>
+        <p:spPr>
+          <a:xfrm>
+            <a:off x="2953512" y="3639312"/>
+            <a:ext cx="722376" cy="384048"/>
+          </a:xfrm>
+          <a:prstGeom prst="rect">
+            <a:avLst/>
+          </a:prstGeom>
+          <a:noFill/>
+          <a:ln/>
+        </p:spPr>
+        <p:txBody>
+          <a:bodyPr wrap="square" lIns="0" tIns="0" rIns="0" bIns="0" rtlCol="0" anchor="ctr"/>
+          <a:lstStyle/>
+          <a:p>
+            <a:pPr algn="ctr" indent="0" marL="0">
+              <a:buNone/>
+            </a:pPr>
+            <a:r>
+              <a:rPr lang="en-US" sz="1100" dirty="0">
+                <a:solidFill>
+                  <a:srgbClr val="22313D"/>
+                </a:solidFill>
+                <a:latin typeface="Calibri" pitchFamily="34" charset="0"/>
+                <a:ea typeface="Calibri" pitchFamily="34" charset="-122"/>
+                <a:cs typeface="Calibri" pitchFamily="34" charset="-120"/>
+              </a:rPr>
+              <a:t>10</a:t>
+            </a:r>
+            <a:endParaRPr lang="en-US" sz="1100" dirty="0"/>
+          </a:p>
+        </p:txBody>
+      </p:sp>
+      <p:sp>
+        <p:nvSpPr>
+          <p:cNvPr id="39" name="Shape 37"/>
+          <p:cNvSpPr/>
+          <p:nvPr/>
+        </p:nvSpPr>
+        <p:spPr>
+          <a:xfrm>
+            <a:off x="3749040" y="3639312"/>
+            <a:ext cx="868680" cy="384048"/>
+          </a:xfrm>
+          <a:prstGeom prst="rect">
+            <a:avLst/>
+          </a:prstGeom>
+          <a:solidFill>
+            <a:srgbClr val="EEF3F4"/>
+          </a:solidFill>
+          <a:ln w="9525">
+            <a:solidFill>
+              <a:srgbClr val="D5DFE1"/>
+            </a:solidFill>
+            <a:prstDash val="solid"/>
+          </a:ln>
+        </p:spPr>
+      </p:sp>
+      <p:sp>
+        <p:nvSpPr>
+          <p:cNvPr id="40" name="Text 38"/>
+          <p:cNvSpPr/>
+          <p:nvPr/>
+        </p:nvSpPr>
+        <p:spPr>
+          <a:xfrm>
+            <a:off x="3822192" y="3639312"/>
+            <a:ext cx="722376" cy="384048"/>
+          </a:xfrm>
+          <a:prstGeom prst="rect">
+            <a:avLst/>
+          </a:prstGeom>
+          <a:noFill/>
+          <a:ln/>
+        </p:spPr>
+        <p:txBody>
+          <a:bodyPr wrap="square" lIns="0" tIns="0" rIns="0" bIns="0" rtlCol="0" anchor="ctr"/>
+          <a:lstStyle/>
+          <a:p>
+            <a:pPr algn="ctr" indent="0" marL="0">
+              <a:buNone/>
+            </a:pPr>
+            <a:r>
+              <a:rPr lang="en-US" sz="1100" dirty="0">
+                <a:solidFill>
+                  <a:srgbClr val="22313D"/>
+                </a:solidFill>
+                <a:latin typeface="Calibri" pitchFamily="34" charset="0"/>
+                <a:ea typeface="Calibri" pitchFamily="34" charset="-122"/>
+                <a:cs typeface="Calibri" pitchFamily="34" charset="-120"/>
+              </a:rPr>
+              <a:t>25</a:t>
+            </a:r>
+            <a:endParaRPr lang="en-US" sz="1100" dirty="0"/>
+          </a:p>
+        </p:txBody>
+      </p:sp>
+      <p:sp>
+        <p:nvSpPr>
+          <p:cNvPr id="41" name="Shape 39"/>
+          <p:cNvSpPr/>
+          <p:nvPr/>
+        </p:nvSpPr>
+        <p:spPr>
+          <a:xfrm>
+            <a:off x="4617720" y="3639312"/>
+            <a:ext cx="868680" cy="384048"/>
+          </a:xfrm>
+          <a:prstGeom prst="rect">
+            <a:avLst/>
+          </a:prstGeom>
+          <a:solidFill>
+            <a:srgbClr val="EEF3F4"/>
+          </a:solidFill>
+          <a:ln w="9525">
+            <a:solidFill>
+              <a:srgbClr val="D5DFE1"/>
+            </a:solidFill>
+            <a:prstDash val="solid"/>
+          </a:ln>
+        </p:spPr>
+      </p:sp>
+      <p:sp>
+        <p:nvSpPr>
+          <p:cNvPr id="42" name="Text 40"/>
+          <p:cNvSpPr/>
+          <p:nvPr/>
+        </p:nvSpPr>
+        <p:spPr>
+          <a:xfrm>
+            <a:off x="4690872" y="3639312"/>
+            <a:ext cx="722376" cy="384048"/>
+          </a:xfrm>
+          <a:prstGeom prst="rect">
+            <a:avLst/>
+          </a:prstGeom>
+          <a:noFill/>
+          <a:ln/>
+        </p:spPr>
+        <p:txBody>
+          <a:bodyPr wrap="square" lIns="0" tIns="0" rIns="0" bIns="0" rtlCol="0" anchor="ctr"/>
+          <a:lstStyle/>
+          <a:p>
+            <a:pPr algn="ctr" indent="0" marL="0">
+              <a:buNone/>
+            </a:pPr>
+            <a:r>
+              <a:rPr lang="en-US" sz="1100" dirty="0">
+                <a:solidFill>
+                  <a:srgbClr val="22313D"/>
+                </a:solidFill>
+                <a:latin typeface="Calibri" pitchFamily="34" charset="0"/>
+                <a:ea typeface="Calibri" pitchFamily="34" charset="-122"/>
+                <a:cs typeface="Calibri" pitchFamily="34" charset="-120"/>
+              </a:rPr>
+              <a:t>50</a:t>
+            </a:r>
+            <a:endParaRPr lang="en-US" sz="1100" dirty="0"/>
+          </a:p>
+        </p:txBody>
+      </p:sp>
+      <p:sp>
+        <p:nvSpPr>
+          <p:cNvPr id="43" name="Text 41"/>
+          <p:cNvSpPr/>
+          <p:nvPr/>
+        </p:nvSpPr>
+        <p:spPr>
+          <a:xfrm>
+            <a:off x="502920" y="4224528"/>
+            <a:ext cx="4937760" cy="640080"/>
+          </a:xfrm>
+          <a:prstGeom prst="rect">
+            <a:avLst/>
+          </a:prstGeom>
+          <a:noFill/>
+          <a:ln/>
+        </p:spPr>
+        <p:txBody>
+          <a:bodyPr wrap="square" lIns="0" tIns="0" rIns="0" bIns="0" rtlCol="0" anchor="ctr"/>
+          <a:lstStyle/>
+          <a:p>
+            <a:pPr indent="0" marL="0">
+              <a:buNone/>
+            </a:pPr>
+            <a:r>
+              <a:rPr lang="en-US" sz="1250" i="1" dirty="0">
+                <a:solidFill>
+                  <a:srgbClr val="888888"/>
+                </a:solidFill>
+                <a:latin typeface="Calibri" pitchFamily="34" charset="0"/>
+                <a:ea typeface="Calibri" pitchFamily="34" charset="-122"/>
+                <a:cs typeface="Calibri" pitchFamily="34" charset="-120"/>
+              </a:rPr>
+              <a:t>Listening Circles · community survey · story archive — a goodbye run on a scorecard.</a:t>
+            </a:r>
+            <a:endParaRPr lang="en-US" sz="1250" dirty="0"/>
+          </a:p>
+        </p:txBody>
+      </p:sp>
+      <p:sp>
+        <p:nvSpPr>
+          <p:cNvPr id="44" name="Shape 42"/>
+          <p:cNvSpPr/>
+          <p:nvPr/>
+        </p:nvSpPr>
+        <p:spPr>
+          <a:xfrm>
+            <a:off x="5806440" y="1115568"/>
+            <a:ext cx="2880360" cy="3291840"/>
+          </a:xfrm>
+          <a:prstGeom prst="roundRect">
+            <a:avLst>
+              <a:gd name="adj" fmla="val 2857"/>
+            </a:avLst>
+          </a:prstGeom>
+          <a:solidFill>
+            <a:srgbClr val="1F3A4D"/>
+          </a:solidFill>
+          <a:ln/>
+          <a:effectLst>
+            <a:outerShdw sx="100000" sy="100000" kx="0" ky="0" algn="bl" rotWithShape="0" blurRad="101600" dist="38100" dir="5400000">
+              <a:srgbClr val="9AA7AE">
+                <a:alpha val="35000"/>
+              </a:srgbClr>
+            </a:outerShdw>
+          </a:effectLst>
+        </p:spPr>
+      </p:sp>
+      <p:sp>
+        <p:nvSpPr>
+          <p:cNvPr id="45" name="Text 43"/>
+          <p:cNvSpPr/>
+          <p:nvPr/>
+        </p:nvSpPr>
+        <p:spPr>
+          <a:xfrm>
+            <a:off x="5989320" y="1325880"/>
+            <a:ext cx="2514600" cy="2926080"/>
+          </a:xfrm>
+          <a:prstGeom prst="rect">
+            <a:avLst/>
+          </a:prstGeom>
+          <a:noFill/>
+          <a:ln/>
+        </p:spPr>
+        <p:txBody>
+          <a:bodyPr wrap="square" rtlCol="0" anchor="ctr"/>
+          <a:lstStyle/>
+          <a:p>
+            <a:pPr indent="0" marL="0">
+              <a:lnSpc>
+                <a:spcPct val="118000"/>
+              </a:lnSpc>
+              <a:buNone/>
+            </a:pPr>
+            <a:r>
+              <a:rPr lang="en-US" sz="1000" dirty="0">
+                <a:solidFill>
+                  <a:srgbClr val="7BC9A3"/>
+                </a:solidFill>
+                <a:latin typeface="Courier New" pitchFamily="34" charset="0"/>
+                <a:ea typeface="Courier New" pitchFamily="34" charset="-122"/>
+                <a:cs typeface="Courier New" pitchFamily="34" charset="-120"/>
+              </a:rPr>
+              <a:t>● live — agent run</a:t>
+            </a:r>
+            <a:endParaRPr lang="en-US" sz="1000" dirty="0"/>
+          </a:p>
+          <a:p>
+            <a:pPr indent="0" marL="0">
+              <a:lnSpc>
+                <a:spcPct val="118000"/>
+              </a:lnSpc>
+              <a:buNone/>
+            </a:pPr>
+            <a:r>
+              <a:rPr lang="en-US" sz="1000" dirty="0">
+                <a:solidFill>
+                  <a:srgbClr val="8FA3AE"/>
+                </a:solidFill>
+                <a:latin typeface="Courier New" pitchFamily="34" charset="0"/>
+                <a:ea typeface="Courier New" pitchFamily="34" charset="-122"/>
+                <a:cs typeface="Courier New" pitchFamily="34" charset="-120"/>
+              </a:rPr>
+              <a:t>FRI AUG 21 · 8:00 AM</a:t>
+            </a:r>
+            <a:endParaRPr lang="en-US" sz="1000" dirty="0"/>
+          </a:p>
+          <a:p>
+            <a:pPr indent="0" marL="0">
+              <a:lnSpc>
+                <a:spcPct val="118000"/>
+              </a:lnSpc>
+              <a:buNone/>
+            </a:pPr>
+            <a:r>
+              <a:rPr lang="en-US" sz="600" dirty="0">
+                <a:solidFill>
+                  <a:srgbClr val="000000"/>
+                </a:solidFill>
+                <a:latin typeface="Courier New" pitchFamily="34" charset="0"/>
+                <a:ea typeface="Courier New" pitchFamily="34" charset="-122"/>
+                <a:cs typeface="Courier New" pitchFamily="34" charset="-120"/>
+              </a:rPr>
+              <a:t> </a:t>
+            </a:r>
+            <a:endParaRPr lang="en-US" sz="1000" dirty="0"/>
+          </a:p>
+          <a:p>
+            <a:pPr indent="0" marL="0">
+              <a:lnSpc>
+                <a:spcPct val="118000"/>
+              </a:lnSpc>
+              <a:buNone/>
+            </a:pPr>
+            <a:r>
+              <a:rPr lang="en-US" sz="1600" b="1" dirty="0">
+                <a:solidFill>
+                  <a:srgbClr val="C08A2E"/>
+                </a:solidFill>
+                <a:latin typeface="Courier New" pitchFamily="34" charset="0"/>
+                <a:ea typeface="Courier New" pitchFamily="34" charset="-122"/>
+                <a:cs typeface="Courier New" pitchFamily="34" charset="-120"/>
+              </a:rPr>
+              <a:t>[ FRESH NUMBERS ]</a:t>
+            </a:r>
+            <a:endParaRPr lang="en-US" sz="1000" dirty="0"/>
+          </a:p>
+          <a:p>
+            <a:pPr indent="0" marL="0">
+              <a:lnSpc>
+                <a:spcPct val="118000"/>
+              </a:lnSpc>
+              <a:buNone/>
+            </a:pPr>
+            <a:r>
+              <a:rPr lang="en-US" sz="1050" dirty="0">
+                <a:solidFill>
+                  <a:srgbClr val="FFFFFF"/>
+                </a:solidFill>
+                <a:latin typeface="Courier New" pitchFamily="34" charset="0"/>
+                <a:ea typeface="Courier New" pitchFamily="34" charset="-122"/>
+                <a:cs typeface="Courier New" pitchFamily="34" charset="-120"/>
+              </a:rPr>
+              <a:t>filled morning-of from the</a:t>
+            </a:r>
+            <a:endParaRPr lang="en-US" sz="1000" dirty="0"/>
+          </a:p>
+          <a:p>
+            <a:pPr indent="0" marL="0">
+              <a:lnSpc>
+                <a:spcPct val="118000"/>
+              </a:lnSpc>
+              <a:buNone/>
+            </a:pPr>
+            <a:r>
+              <a:rPr lang="en-US" sz="1050" dirty="0">
+                <a:solidFill>
+                  <a:srgbClr val="FFFFFF"/>
+                </a:solidFill>
+                <a:latin typeface="Courier New" pitchFamily="34" charset="0"/>
+                <a:ea typeface="Courier New" pitchFamily="34" charset="-122"/>
+                <a:cs typeface="Courier New" pitchFamily="34" charset="-120"/>
+              </a:rPr>
+              <a:t>daily report agent —</a:t>
+            </a:r>
+            <a:endParaRPr lang="en-US" sz="1000" dirty="0"/>
+          </a:p>
+          <a:p>
+            <a:pPr indent="0" marL="0">
+              <a:lnSpc>
+                <a:spcPct val="118000"/>
+              </a:lnSpc>
+              <a:buNone/>
+            </a:pPr>
+            <a:r>
+              <a:rPr lang="en-US" sz="1050" dirty="0">
+                <a:solidFill>
+                  <a:srgbClr val="FFFFFF"/>
+                </a:solidFill>
+                <a:latin typeface="Courier New" pitchFamily="34" charset="0"/>
+                <a:ea typeface="Courier New" pitchFamily="34" charset="-122"/>
+                <a:cs typeface="Courier New" pitchFamily="34" charset="-120"/>
+              </a:rPr>
+              <a:t>including last night's</a:t>
+            </a:r>
+            <a:endParaRPr lang="en-US" sz="1000" dirty="0"/>
+          </a:p>
+          <a:p>
+            <a:pPr indent="0" marL="0">
+              <a:lnSpc>
+                <a:spcPct val="118000"/>
+              </a:lnSpc>
+              <a:buNone/>
+            </a:pPr>
+            <a:r>
+              <a:rPr lang="en-US" sz="1050" b="1" dirty="0">
+                <a:solidFill>
+                  <a:srgbClr val="FFFFFF"/>
+                </a:solidFill>
+                <a:latin typeface="Courier New" pitchFamily="34" charset="0"/>
+                <a:ea typeface="Courier New" pitchFamily="34" charset="-122"/>
+                <a:cs typeface="Courier New" pitchFamily="34" charset="-120"/>
+              </a:rPr>
+              <a:t>Listening Circle (Aug 20).</a:t>
+            </a:r>
+            <a:endParaRPr lang="en-US" sz="1000" dirty="0"/>
+          </a:p>
+        </p:txBody>
+      </p:sp>
+    </p:spTree>
+  </p:cSld>
+  <p:clrMapOvr>
+    <a:masterClrMapping/>
+  </p:clrMapOvr>
+</p:sld>
+</file>
+
+<file path=ppt/slides/slide7.xml><?xml version="1.0" encoding="utf-8"?>
+<p:sld xmlns:a="http://schemas.openxmlformats.org/drawingml/2006/main" xmlns:r="http://schemas.openxmlformats.org/officeDocument/2006/relationships" xmlns:p="http://schemas.openxmlformats.org/presentationml/2006/main">
+  <p:cSld name="Slide 7">
     <p:bg>
       <p:bgPr>
         <a:solidFill>
@@ -6594,9 +8170,9 @@
 </p:sld>
 </file>
 
-<file path=ppt/slides/slide7.xml><?xml version="1.0" encoding="utf-8"?>
+<file path=ppt/slides/slide8.xml><?xml version="1.0" encoding="utf-8"?>
 <p:sld xmlns:a="http://schemas.openxmlformats.org/drawingml/2006/main" xmlns:r="http://schemas.openxmlformats.org/officeDocument/2006/relationships" xmlns:p="http://schemas.openxmlformats.org/presentationml/2006/main">
-  <p:cSld name="Slide 7">
+  <p:cSld name="Slide 8">
     <p:bg>
       <p:bgPr>
         <a:solidFill>
@@ -7176,9 +8752,9 @@
 </p:sld>
 </file>
 
-<file path=ppt/slides/slide8.xml><?xml version="1.0" encoding="utf-8"?>
+<file path=ppt/slides/slide9.xml><?xml version="1.0" encoding="utf-8"?>
 <p:sld xmlns:a="http://schemas.openxmlformats.org/drawingml/2006/main" xmlns:r="http://schemas.openxmlformats.org/officeDocument/2006/relationships" xmlns:p="http://schemas.openxmlformats.org/presentationml/2006/main">
-  <p:cSld name="Slide 8">
+  <p:cSld name="Slide 9">
     <p:bg>
       <p:bgPr>
         <a:solidFill>
@@ -7825,511 +9401,6 @@
               <a:t>And the transcript of this session feeds the next revision. The loop is the product.</a:t>
             </a:r>
             <a:endParaRPr lang="en-US" sz="1250" dirty="0"/>
-          </a:p>
-        </p:txBody>
-      </p:sp>
-    </p:spTree>
-  </p:cSld>
-  <p:clrMapOvr>
-    <a:masterClrMapping/>
-  </p:clrMapOvr>
-</p:sld>
-</file>
-
-<file path=ppt/slides/slide9.xml><?xml version="1.0" encoding="utf-8"?>
-<p:sld xmlns:a="http://schemas.openxmlformats.org/drawingml/2006/main" xmlns:r="http://schemas.openxmlformats.org/officeDocument/2006/relationships" xmlns:p="http://schemas.openxmlformats.org/presentationml/2006/main">
-  <p:cSld name="Slide 9">
-    <p:bg>
-      <p:bgPr>
-        <a:solidFill>
-          <a:srgbClr val="1F3A4D"/>
-        </a:solidFill>
-      </p:bgPr>
-    </p:bg>
-    <p:spTree>
-      <p:nvGrpSpPr>
-        <p:cNvPr id="1" name=""/>
-        <p:cNvGrpSpPr/>
-        <p:nvPr/>
-      </p:nvGrpSpPr>
-      <p:grpSpPr>
-        <a:xfrm>
-          <a:off x="0" y="0"/>
-          <a:ext cx="0" cy="0"/>
-          <a:chOff x="0" y="0"/>
-          <a:chExt cx="0" cy="0"/>
-        </a:xfrm>
-      </p:grpSpPr>
-      <p:sp>
-        <p:nvSpPr>
-          <p:cNvPr id="2" name="Text 0"/>
-          <p:cNvSpPr/>
-          <p:nvPr/>
-        </p:nvSpPr>
-        <p:spPr>
-          <a:xfrm>
-            <a:off x="457200" y="457200"/>
-            <a:ext cx="8229600" cy="548640"/>
-          </a:xfrm>
-          <a:prstGeom prst="rect">
-            <a:avLst/>
-          </a:prstGeom>
-          <a:noFill/>
-          <a:ln/>
-        </p:spPr>
-        <p:txBody>
-          <a:bodyPr wrap="square" rtlCol="0" anchor="ctr"/>
-          <a:lstStyle/>
-          <a:p>
-            <a:pPr algn="ctr" indent="0" marL="0">
-              <a:buNone/>
-            </a:pPr>
-            <a:r>
-              <a:rPr lang="en-US" sz="2800" b="1" dirty="0">
-                <a:solidFill>
-                  <a:srgbClr val="FFFFFF"/>
-                </a:solidFill>
-                <a:latin typeface="Cambria" pitchFamily="34" charset="0"/>
-                <a:ea typeface="Cambria" pitchFamily="34" charset="-122"/>
-                <a:cs typeface="Cambria" pitchFamily="34" charset="-120"/>
-              </a:rPr>
-              <a:t>Two gifts. One field. Your choice.</a:t>
-            </a:r>
-            <a:endParaRPr lang="en-US" sz="2800" dirty="0"/>
-          </a:p>
-        </p:txBody>
-      </p:sp>
-      <p:sp>
-        <p:nvSpPr>
-          <p:cNvPr id="3" name="Shape 1"/>
-          <p:cNvSpPr/>
-          <p:nvPr/>
-        </p:nvSpPr>
-        <p:spPr>
-          <a:xfrm>
-            <a:off x="640080" y="1325880"/>
-            <a:ext cx="2606040" cy="1737360"/>
-          </a:xfrm>
-          <a:prstGeom prst="roundRect">
-            <a:avLst>
-              <a:gd name="adj" fmla="val 4737"/>
-            </a:avLst>
-          </a:prstGeom>
-          <a:solidFill>
-            <a:srgbClr val="16303F"/>
-          </a:solidFill>
-          <a:ln w="15875">
-            <a:solidFill>
-              <a:srgbClr val="C08A2E"/>
-            </a:solidFill>
-            <a:prstDash val="solid"/>
-          </a:ln>
-        </p:spPr>
-      </p:sp>
-      <p:sp>
-        <p:nvSpPr>
-          <p:cNvPr id="4" name="Text 2"/>
-          <p:cNvSpPr/>
-          <p:nvPr/>
-        </p:nvSpPr>
-        <p:spPr>
-          <a:xfrm>
-            <a:off x="822960" y="1517904"/>
-            <a:ext cx="2240280" cy="1371600"/>
-          </a:xfrm>
-          <a:prstGeom prst="rect">
-            <a:avLst/>
-          </a:prstGeom>
-          <a:noFill/>
-          <a:ln/>
-        </p:spPr>
-        <p:txBody>
-          <a:bodyPr wrap="square" rtlCol="0" anchor="ctr"/>
-          <a:lstStyle/>
-          <a:p>
-            <a:pPr indent="0" marL="0">
-              <a:lnSpc>
-                <a:spcPct val="112000"/>
-              </a:lnSpc>
-              <a:buNone/>
-            </a:pPr>
-            <a:r>
-              <a:rPr lang="en-US" sz="1300" b="1" spc="200" kern="0" dirty="0">
-                <a:solidFill>
-                  <a:srgbClr val="C08A2E"/>
-                </a:solidFill>
-                <a:latin typeface="Calibri" pitchFamily="34" charset="0"/>
-                <a:ea typeface="Calibri" pitchFamily="34" charset="-122"/>
-                <a:cs typeface="Calibri" pitchFamily="34" charset="-120"/>
-              </a:rPr>
-              <a:t>THE PROMPT</a:t>
-            </a:r>
-            <a:endParaRPr lang="en-US" sz="1300" dirty="0"/>
-          </a:p>
-          <a:p>
-            <a:pPr indent="0" marL="0">
-              <a:lnSpc>
-                <a:spcPct val="112000"/>
-              </a:lnSpc>
-              <a:buNone/>
-            </a:pPr>
-            <a:r>
-              <a:rPr lang="en-US" sz="600" dirty="0">
-                <a:solidFill>
-                  <a:srgbClr val="000000"/>
-                </a:solidFill>
-                <a:latin typeface="Calibri" pitchFamily="34" charset="0"/>
-                <a:ea typeface="Calibri" pitchFamily="34" charset="-122"/>
-                <a:cs typeface="Calibri" pitchFamily="34" charset="-120"/>
-              </a:rPr>
-              <a:t> </a:t>
-            </a:r>
-            <a:endParaRPr lang="en-US" sz="1300" dirty="0"/>
-          </a:p>
-          <a:p>
-            <a:pPr indent="0" marL="0">
-              <a:lnSpc>
-                <a:spcPct val="112000"/>
-              </a:lnSpc>
-              <a:buNone/>
-            </a:pPr>
-            <a:r>
-              <a:rPr lang="en-US" sz="1150" dirty="0">
-                <a:solidFill>
-                  <a:srgbClr val="FFFFFF"/>
-                </a:solidFill>
-                <a:latin typeface="Calibri" pitchFamily="34" charset="0"/>
-                <a:ea typeface="Calibri" pitchFamily="34" charset="-122"/>
-                <a:cs typeface="Calibri" pitchFamily="34" charset="-120"/>
-              </a:rPr>
-              <a:t>Proof-to-Pipeline — the parameterized prompt that produced this talk</a:t>
-            </a:r>
-            <a:endParaRPr lang="en-US" sz="1300" dirty="0"/>
-          </a:p>
-        </p:txBody>
-      </p:sp>
-      <p:sp>
-        <p:nvSpPr>
-          <p:cNvPr id="5" name="Shape 3"/>
-          <p:cNvSpPr/>
-          <p:nvPr/>
-        </p:nvSpPr>
-        <p:spPr>
-          <a:xfrm>
-            <a:off x="3474720" y="1325880"/>
-            <a:ext cx="2606040" cy="1737360"/>
-          </a:xfrm>
-          <a:prstGeom prst="roundRect">
-            <a:avLst>
-              <a:gd name="adj" fmla="val 4737"/>
-            </a:avLst>
-          </a:prstGeom>
-          <a:solidFill>
-            <a:srgbClr val="16303F"/>
-          </a:solidFill>
-          <a:ln w="15875">
-            <a:solidFill>
-              <a:srgbClr val="C08A2E"/>
-            </a:solidFill>
-            <a:prstDash val="solid"/>
-          </a:ln>
-        </p:spPr>
-      </p:sp>
-      <p:sp>
-        <p:nvSpPr>
-          <p:cNvPr id="6" name="Text 4"/>
-          <p:cNvSpPr/>
-          <p:nvPr/>
-        </p:nvSpPr>
-        <p:spPr>
-          <a:xfrm>
-            <a:off x="3657600" y="1517904"/>
-            <a:ext cx="2240280" cy="1371600"/>
-          </a:xfrm>
-          <a:prstGeom prst="rect">
-            <a:avLst/>
-          </a:prstGeom>
-          <a:noFill/>
-          <a:ln/>
-        </p:spPr>
-        <p:txBody>
-          <a:bodyPr wrap="square" rtlCol="0" anchor="ctr"/>
-          <a:lstStyle/>
-          <a:p>
-            <a:pPr indent="0" marL="0">
-              <a:lnSpc>
-                <a:spcPct val="112000"/>
-              </a:lnSpc>
-              <a:buNone/>
-            </a:pPr>
-            <a:r>
-              <a:rPr lang="en-US" sz="1300" b="1" spc="200" kern="0" dirty="0">
-                <a:solidFill>
-                  <a:srgbClr val="C08A2E"/>
-                </a:solidFill>
-                <a:latin typeface="Calibri" pitchFamily="34" charset="0"/>
-                <a:ea typeface="Calibri" pitchFamily="34" charset="-122"/>
-                <a:cs typeface="Calibri" pitchFamily="34" charset="-120"/>
-              </a:rPr>
-              <a:t>THE AGENT</a:t>
-            </a:r>
-            <a:endParaRPr lang="en-US" sz="1300" dirty="0"/>
-          </a:p>
-          <a:p>
-            <a:pPr indent="0" marL="0">
-              <a:lnSpc>
-                <a:spcPct val="112000"/>
-              </a:lnSpc>
-              <a:buNone/>
-            </a:pPr>
-            <a:r>
-              <a:rPr lang="en-US" sz="600" dirty="0">
-                <a:solidFill>
-                  <a:srgbClr val="000000"/>
-                </a:solidFill>
-                <a:latin typeface="Calibri" pitchFamily="34" charset="0"/>
-                <a:ea typeface="Calibri" pitchFamily="34" charset="-122"/>
-                <a:cs typeface="Calibri" pitchFamily="34" charset="-120"/>
-              </a:rPr>
-              <a:t> </a:t>
-            </a:r>
-            <a:endParaRPr lang="en-US" sz="1300" dirty="0"/>
-          </a:p>
-          <a:p>
-            <a:pPr indent="0" marL="0">
-              <a:lnSpc>
-                <a:spcPct val="112000"/>
-              </a:lnSpc>
-              <a:buNone/>
-            </a:pPr>
-            <a:r>
-              <a:rPr lang="en-US" sz="1150" dirty="0">
-                <a:solidFill>
-                  <a:srgbClr val="FFFFFF"/>
-                </a:solidFill>
-                <a:latin typeface="Calibri" pitchFamily="34" charset="0"/>
-                <a:ea typeface="Calibri" pitchFamily="34" charset="-122"/>
-                <a:cs typeface="Calibri" pitchFamily="34" charset="-120"/>
-              </a:rPr>
-              <a:t>Transition Listening Report — the sanitized production skill, judgment rules intact</a:t>
-            </a:r>
-            <a:endParaRPr lang="en-US" sz="1300" dirty="0"/>
-          </a:p>
-        </p:txBody>
-      </p:sp>
-      <p:sp>
-        <p:nvSpPr>
-          <p:cNvPr id="7" name="Shape 5"/>
-          <p:cNvSpPr/>
-          <p:nvPr/>
-        </p:nvSpPr>
-        <p:spPr>
-          <a:xfrm>
-            <a:off x="6400800" y="1325880"/>
-            <a:ext cx="2103120" cy="1737360"/>
-          </a:xfrm>
-          <a:prstGeom prst="roundRect">
-            <a:avLst>
-              <a:gd name="adj" fmla="val 4737"/>
-            </a:avLst>
-          </a:prstGeom>
-          <a:solidFill>
-            <a:srgbClr val="FFFFFF"/>
-          </a:solidFill>
-          <a:ln/>
-        </p:spPr>
-      </p:sp>
-      <p:pic>
-        <p:nvPicPr>
-          <p:cNvPr id="8" name="Image 0" descr="/home/user/agnt-neo/proof-to-pipeline/deck/form_qr.png">    </p:cNvPr>
-          <p:cNvPicPr>
-            <a:picLocks noChangeAspect="1"/>
-          </p:cNvPicPr>
-          <p:nvPr/>
-        </p:nvPicPr>
-        <p:blipFill>
-          <a:blip r:embed="rId1"/>
-          <a:stretch>
-            <a:fillRect/>
-          </a:stretch>
-        </p:blipFill>
-        <p:spPr>
-          <a:xfrm>
-            <a:off x="6556248" y="1371600"/>
-            <a:ext cx="1645920" cy="1645920"/>
-          </a:xfrm>
-          <a:prstGeom prst="rect">
-            <a:avLst/>
-          </a:prstGeom>
-        </p:spPr>
-      </p:pic>
-      <p:sp>
-        <p:nvSpPr>
-          <p:cNvPr id="9" name="Text 6"/>
-          <p:cNvSpPr/>
-          <p:nvPr/>
-        </p:nvSpPr>
-        <p:spPr>
-          <a:xfrm>
-            <a:off x="457200" y="3310128"/>
-            <a:ext cx="8229600" cy="411480"/>
-          </a:xfrm>
-          <a:prstGeom prst="rect">
-            <a:avLst/>
-          </a:prstGeom>
-          <a:noFill/>
-          <a:ln/>
-        </p:spPr>
-        <p:txBody>
-          <a:bodyPr wrap="square" lIns="0" tIns="0" rIns="0" bIns="0" rtlCol="0" anchor="ctr"/>
-          <a:lstStyle/>
-          <a:p>
-            <a:pPr algn="ctr" indent="0" marL="0">
-              <a:buNone/>
-            </a:pPr>
-            <a:r>
-              <a:rPr lang="en-US" sz="1500" b="1" dirty="0">
-                <a:solidFill>
-                  <a:srgbClr val="FFFFFF"/>
-                </a:solidFill>
-                <a:latin typeface="Calibri" pitchFamily="34" charset="0"/>
-                <a:ea typeface="Calibri" pitchFamily="34" charset="-122"/>
-                <a:cs typeface="Calibri" pitchFamily="34" charset="-120"/>
-              </a:rPr>
-              <a:t>LinkedIn or email — whichever you prefer. </a:t>
-            </a:r>
-            <a:pPr algn="ctr" indent="0" marL="0">
-              <a:buNone/>
-            </a:pPr>
-            <a:r>
-              <a:rPr lang="en-US" sz="1500" dirty="0">
-                <a:solidFill>
-                  <a:srgbClr val="B9C6CE"/>
-                </a:solidFill>
-                <a:latin typeface="Calibri" pitchFamily="34" charset="0"/>
-                <a:ea typeface="Calibri" pitchFamily="34" charset="-122"/>
-                <a:cs typeface="Calibri" pitchFamily="34" charset="-120"/>
-              </a:rPr>
-              <a:t>The kit arrives within the hour.</a:t>
-            </a:r>
-            <a:endParaRPr lang="en-US" sz="1500" dirty="0"/>
-          </a:p>
-        </p:txBody>
-      </p:sp>
-      <p:sp>
-        <p:nvSpPr>
-          <p:cNvPr id="10" name="Text 7"/>
-          <p:cNvSpPr/>
-          <p:nvPr/>
-        </p:nvSpPr>
-        <p:spPr>
-          <a:xfrm>
-            <a:off x="457200" y="3886200"/>
-            <a:ext cx="8229600" cy="365760"/>
-          </a:xfrm>
-          <a:prstGeom prst="rect">
-            <a:avLst/>
-          </a:prstGeom>
-          <a:noFill/>
-          <a:ln/>
-        </p:spPr>
-        <p:txBody>
-          <a:bodyPr wrap="square" lIns="0" tIns="0" rIns="0" bIns="0" rtlCol="0" anchor="ctr"/>
-          <a:lstStyle/>
-          <a:p>
-            <a:pPr algn="ctr" indent="0" marL="0">
-              <a:buNone/>
-            </a:pPr>
-            <a:r>
-              <a:rPr lang="en-US" sz="1250" i="1" dirty="0">
-                <a:solidFill>
-                  <a:srgbClr val="B9C6CE"/>
-                </a:solidFill>
-                <a:latin typeface="Calibri" pitchFamily="34" charset="0"/>
-                <a:ea typeface="Calibri" pitchFamily="34" charset="-122"/>
-                <a:cs typeface="Calibri" pitchFamily="34" charset="-120"/>
-              </a:rPr>
-              <a:t>I take a small number of fractional engagements for organizations in transition — if you have one, or know one:</a:t>
-            </a:r>
-            <a:endParaRPr lang="en-US" sz="1250" dirty="0"/>
-          </a:p>
-        </p:txBody>
-      </p:sp>
-      <p:sp>
-        <p:nvSpPr>
-          <p:cNvPr id="11" name="Text 8"/>
-          <p:cNvSpPr/>
-          <p:nvPr/>
-        </p:nvSpPr>
-        <p:spPr>
-          <a:xfrm>
-            <a:off x="457200" y="4279392"/>
-            <a:ext cx="8229600" cy="457200"/>
-          </a:xfrm>
-          <a:prstGeom prst="rect">
-            <a:avLst/>
-          </a:prstGeom>
-          <a:noFill/>
-          <a:ln/>
-        </p:spPr>
-        <p:txBody>
-          <a:bodyPr wrap="square" lIns="0" tIns="0" rIns="0" bIns="0" rtlCol="0" anchor="ctr"/>
-          <a:lstStyle/>
-          <a:p>
-            <a:pPr algn="ctr" indent="0" marL="0">
-              <a:buNone/>
-            </a:pPr>
-            <a:r>
-              <a:rPr lang="en-US" sz="2100" b="1" dirty="0">
-                <a:solidFill>
-                  <a:srgbClr val="C08A2E"/>
-                </a:solidFill>
-                <a:latin typeface="Cambria" pitchFamily="34" charset="0"/>
-                <a:ea typeface="Cambria" pitchFamily="34" charset="-122"/>
-                <a:cs typeface="Cambria" pitchFamily="34" charset="-120"/>
-              </a:rPr>
-              <a:t>scheduler.zoom.us/paul-halvorson</a:t>
-            </a:r>
-            <a:endParaRPr lang="en-US" sz="2100" dirty="0"/>
-          </a:p>
-        </p:txBody>
-      </p:sp>
-      <p:sp>
-        <p:nvSpPr>
-          <p:cNvPr id="12" name="Text 9"/>
-          <p:cNvSpPr/>
-          <p:nvPr/>
-        </p:nvSpPr>
-        <p:spPr>
-          <a:xfrm>
-            <a:off x="457200" y="4773168"/>
-            <a:ext cx="8229600" cy="274320"/>
-          </a:xfrm>
-          <a:prstGeom prst="rect">
-            <a:avLst/>
-          </a:prstGeom>
-          <a:noFill/>
-          <a:ln/>
-        </p:spPr>
-        <p:txBody>
-          <a:bodyPr wrap="square" lIns="0" tIns="0" rIns="0" bIns="0" rtlCol="0" anchor="ctr"/>
-          <a:lstStyle/>
-          <a:p>
-            <a:pPr algn="ctr" indent="0" marL="0">
-              <a:buNone/>
-            </a:pPr>
-            <a:r>
-              <a:rPr lang="en-US" sz="950" dirty="0">
-                <a:solidFill>
-                  <a:srgbClr val="8FA3AE"/>
-                </a:solidFill>
-                <a:latin typeface="Calibri" pitchFamily="34" charset="0"/>
-                <a:ea typeface="Calibri" pitchFamily="34" charset="-122"/>
-                <a:cs typeface="Calibri" pitchFamily="34" charset="-120"/>
-              </a:rPr>
-              <a:t>Paul Halvorson · TRIAD Synergy · DrPaul@TriadSynergy.com · Purpose Driven Action for Business and Community Leaders</a:t>
-            </a:r>
-            <a:endParaRPr lang="en-US" sz="950" dirty="0"/>
           </a:p>
         </p:txBody>
       </p:sp>

--- a/proof-to-pipeline/deck/EAIO_TriadSynergy_Deck_V1.pptx
+++ b/proof-to-pipeline/deck/EAIO_TriadSynergy_Deck_V1.pptx
@@ -863,7 +863,7 @@
           <a:p>
             <a:r>
               <a:rPr lang="en-US" dirty="0"/>
-              <a:t>2:00–3:00. This is the map for the next three slides — watch the key in the corner. The framework is the brand and the brand is the framework.</a:t>
+              <a:t>2:00–3:00. This is the map for the next three slides — watch the Q1/Q2/Q3 key in the corner. Each question gets answered with real artifacts from the ARC engagement.</a:t>
             </a:r>
             <a:endParaRPr lang="en-US" dirty="0"/>
           </a:p>
@@ -1215,7 +1215,7 @@
           <a:p>
             <a:r>
               <a:rPr lang="en-US" dirty="0"/>
-              <a:t>7:30–8:30. The I of the triad: leadership through an ending. The fund amount now appears on the mandate slide — remove it there if Mike's written consent (due Tue Aug 18) doesn't cover it; this slide stays general. Land the positioning line.</a:t>
+              <a:t>7:30–8:30. Q3 — leadership through an ending. The fund amount now appears on the mandate slide — remove it there if Mike's written consent (due Tue Aug 18) doesn't cover it; this slide stays general. Land the positioning line.</a:t>
             </a:r>
             <a:endParaRPr lang="en-US" dirty="0"/>
           </a:p>
@@ -4033,7 +4033,7 @@
                 <a:ea typeface="Cambria" pitchFamily="34" charset="-122"/>
                 <a:cs typeface="Cambria" pitchFamily="34" charset="-120"/>
               </a:rPr>
-              <a:t>The method: I · We · It</a:t>
+              <a:t>Three questions every ending must answer</a:t>
             </a:r>
             <a:endParaRPr lang="en-US" sz="3000" dirty="0"/>
           </a:p>
@@ -4047,92 +4047,66 @@
         </p:nvSpPr>
         <p:spPr>
           <a:xfrm>
-            <a:off x="1490472" y="1417320"/>
-            <a:ext cx="768096" cy="768096"/>
-          </a:xfrm>
-          <a:prstGeom prst="ellipse">
-            <a:avLst/>
+            <a:off x="502920" y="1143000"/>
+            <a:ext cx="8138160" cy="914400"/>
+          </a:xfrm>
+          <a:prstGeom prst="roundRect">
+            <a:avLst>
+              <a:gd name="adj" fmla="val 9000"/>
+            </a:avLst>
           </a:prstGeom>
           <a:solidFill>
-            <a:srgbClr val="1F3A4D"/>
+            <a:srgbClr val="FFFFFF"/>
           </a:solidFill>
-          <a:ln/>
-        </p:spPr>
-      </p:sp>
-      <p:sp>
-        <p:nvSpPr>
-          <p:cNvPr id="4" name="Shape 2"/>
-          <p:cNvSpPr/>
-          <p:nvPr/>
-        </p:nvSpPr>
-        <p:spPr>
-          <a:xfrm>
-            <a:off x="576072" y="3017520"/>
-            <a:ext cx="768096" cy="768096"/>
-          </a:xfrm>
-          <a:prstGeom prst="ellipse">
-            <a:avLst/>
-          </a:prstGeom>
-          <a:solidFill>
-            <a:srgbClr val="2E6E6E"/>
-          </a:solidFill>
-          <a:ln/>
-        </p:spPr>
-      </p:sp>
-      <p:sp>
-        <p:nvSpPr>
-          <p:cNvPr id="5" name="Shape 3"/>
-          <p:cNvSpPr/>
-          <p:nvPr/>
-        </p:nvSpPr>
-        <p:spPr>
-          <a:xfrm>
-            <a:off x="2404872" y="3017520"/>
-            <a:ext cx="768096" cy="768096"/>
-          </a:xfrm>
-          <a:prstGeom prst="ellipse">
-            <a:avLst/>
-          </a:prstGeom>
-          <a:solidFill>
-            <a:srgbClr val="C08A2E"/>
-          </a:solidFill>
-          <a:ln/>
-        </p:spPr>
-      </p:sp>
-      <p:sp>
-        <p:nvSpPr>
-          <p:cNvPr id="6" name="Text 4"/>
-          <p:cNvSpPr/>
-          <p:nvPr/>
-        </p:nvSpPr>
-        <p:spPr>
-          <a:xfrm>
-            <a:off x="1490472" y="1417320"/>
-            <a:ext cx="768096" cy="768096"/>
-          </a:xfrm>
-          <a:prstGeom prst="rect">
-            <a:avLst/>
-          </a:prstGeom>
-          <a:noFill/>
-          <a:ln/>
-        </p:spPr>
-        <p:txBody>
-          <a:bodyPr wrap="square" lIns="0" tIns="0" rIns="0" bIns="0" rtlCol="0" anchor="ctr"/>
-          <a:lstStyle/>
-          <a:p>
-            <a:pPr algn="ctr" indent="0" marL="0">
+          <a:ln w="12700">
+            <a:solidFill>
+              <a:srgbClr val="D5DFE1"/>
+            </a:solidFill>
+            <a:prstDash val="solid"/>
+          </a:ln>
+          <a:effectLst>
+            <a:outerShdw sx="100000" sy="100000" kx="0" ky="0" algn="bl" rotWithShape="0" blurRad="76200" dist="25400" dir="5400000">
+              <a:srgbClr val="AEB9BD">
+                <a:alpha val="25000"/>
+              </a:srgbClr>
+            </a:outerShdw>
+          </a:effectLst>
+        </p:spPr>
+      </p:sp>
+      <p:sp>
+        <p:nvSpPr>
+          <p:cNvPr id="4" name="Text 2"/>
+          <p:cNvSpPr/>
+          <p:nvPr/>
+        </p:nvSpPr>
+        <p:spPr>
+          <a:xfrm>
+            <a:off x="777240" y="1143000"/>
+            <a:ext cx="777240" cy="914400"/>
+          </a:xfrm>
+          <a:prstGeom prst="rect">
+            <a:avLst/>
+          </a:prstGeom>
+          <a:noFill/>
+          <a:ln/>
+        </p:spPr>
+        <p:txBody>
+          <a:bodyPr wrap="square" lIns="0" tIns="0" rIns="0" bIns="0" rtlCol="0" anchor="ctr"/>
+          <a:lstStyle/>
+          <a:p>
+            <a:pPr indent="0" marL="0">
               <a:buNone/>
             </a:pPr>
             <a:r>
               <a:rPr lang="en-US" sz="2600" b="1" dirty="0">
                 <a:solidFill>
-                  <a:srgbClr val="FFFFFF"/>
+                  <a:srgbClr val="C08A2E"/>
                 </a:solidFill>
                 <a:latin typeface="Cambria" pitchFamily="34" charset="0"/>
                 <a:ea typeface="Cambria" pitchFamily="34" charset="-122"/>
                 <a:cs typeface="Cambria" pitchFamily="34" charset="-120"/>
               </a:rPr>
-              <a:t>I</a:t>
+              <a:t>Q1</a:t>
             </a:r>
             <a:endParaRPr lang="en-US" sz="2600" dirty="0"/>
           </a:p>
@@ -4140,40 +4114,136 @@
       </p:sp>
       <p:sp>
         <p:nvSpPr>
+          <p:cNvPr id="5" name="Text 3"/>
+          <p:cNvSpPr/>
+          <p:nvPr/>
+        </p:nvSpPr>
+        <p:spPr>
+          <a:xfrm>
+            <a:off x="1691640" y="1271016"/>
+            <a:ext cx="6766560" cy="685800"/>
+          </a:xfrm>
+          <a:prstGeom prst="rect">
+            <a:avLst/>
+          </a:prstGeom>
+          <a:noFill/>
+          <a:ln/>
+        </p:spPr>
+        <p:txBody>
+          <a:bodyPr wrap="square" lIns="0" tIns="0" rIns="0" bIns="0" rtlCol="0" anchor="ctr"/>
+          <a:lstStyle/>
+          <a:p>
+            <a:pPr indent="0" marL="0">
+              <a:lnSpc>
+                <a:spcPct val="112000"/>
+              </a:lnSpc>
+              <a:buNone/>
+            </a:pPr>
+            <a:r>
+              <a:rPr lang="en-US" sz="1700" b="1" dirty="0">
+                <a:solidFill>
+                  <a:srgbClr val="22313D"/>
+                </a:solidFill>
+                <a:latin typeface="Calibri" pitchFamily="34" charset="0"/>
+                <a:ea typeface="Calibri" pitchFamily="34" charset="-122"/>
+                <a:cs typeface="Calibri" pitchFamily="34" charset="-120"/>
+              </a:rPr>
+              <a:t>What do we actually have?</a:t>
+            </a:r>
+            <a:endParaRPr lang="en-US" sz="1700" dirty="0"/>
+          </a:p>
+          <a:p>
+            <a:pPr indent="0" marL="0">
+              <a:lnSpc>
+                <a:spcPct val="112000"/>
+              </a:lnSpc>
+              <a:buNone/>
+            </a:pPr>
+            <a:r>
+              <a:rPr lang="en-US" sz="1150" dirty="0">
+                <a:solidFill>
+                  <a:srgbClr val="888888"/>
+                </a:solidFill>
+                <a:latin typeface="Calibri" pitchFamily="34" charset="0"/>
+                <a:ea typeface="Calibri" pitchFamily="34" charset="-122"/>
+                <a:cs typeface="Calibri" pitchFamily="34" charset="-120"/>
+              </a:rPr>
+              <a:t>Records, money, tech, data — the institutional memory. Answered by forensic reconstruction.</a:t>
+            </a:r>
+            <a:endParaRPr lang="en-US" sz="1700" dirty="0"/>
+          </a:p>
+        </p:txBody>
+      </p:sp>
+      <p:sp>
+        <p:nvSpPr>
+          <p:cNvPr id="6" name="Shape 4"/>
+          <p:cNvSpPr/>
+          <p:nvPr/>
+        </p:nvSpPr>
+        <p:spPr>
+          <a:xfrm>
+            <a:off x="502920" y="2221992"/>
+            <a:ext cx="8138160" cy="914400"/>
+          </a:xfrm>
+          <a:prstGeom prst="roundRect">
+            <a:avLst>
+              <a:gd name="adj" fmla="val 9000"/>
+            </a:avLst>
+          </a:prstGeom>
+          <a:solidFill>
+            <a:srgbClr val="FFFFFF"/>
+          </a:solidFill>
+          <a:ln w="12700">
+            <a:solidFill>
+              <a:srgbClr val="D5DFE1"/>
+            </a:solidFill>
+            <a:prstDash val="solid"/>
+          </a:ln>
+          <a:effectLst>
+            <a:outerShdw sx="100000" sy="100000" kx="0" ky="0" algn="bl" rotWithShape="0" blurRad="76200" dist="25400" dir="5400000">
+              <a:srgbClr val="AEB9BD">
+                <a:alpha val="25000"/>
+              </a:srgbClr>
+            </a:outerShdw>
+          </a:effectLst>
+        </p:spPr>
+      </p:sp>
+      <p:sp>
+        <p:nvSpPr>
           <p:cNvPr id="7" name="Text 5"/>
           <p:cNvSpPr/>
           <p:nvPr/>
         </p:nvSpPr>
         <p:spPr>
           <a:xfrm>
-            <a:off x="576072" y="3017520"/>
-            <a:ext cx="768096" cy="768096"/>
-          </a:xfrm>
-          <a:prstGeom prst="rect">
-            <a:avLst/>
-          </a:prstGeom>
-          <a:noFill/>
-          <a:ln/>
-        </p:spPr>
-        <p:txBody>
-          <a:bodyPr wrap="square" lIns="0" tIns="0" rIns="0" bIns="0" rtlCol="0" anchor="ctr"/>
-          <a:lstStyle/>
-          <a:p>
-            <a:pPr algn="ctr" indent="0" marL="0">
-              <a:buNone/>
-            </a:pPr>
-            <a:r>
-              <a:rPr lang="en-US" sz="2200" b="1" dirty="0">
-                <a:solidFill>
-                  <a:srgbClr val="FFFFFF"/>
+            <a:off x="777240" y="2221992"/>
+            <a:ext cx="777240" cy="914400"/>
+          </a:xfrm>
+          <a:prstGeom prst="rect">
+            <a:avLst/>
+          </a:prstGeom>
+          <a:noFill/>
+          <a:ln/>
+        </p:spPr>
+        <p:txBody>
+          <a:bodyPr wrap="square" lIns="0" tIns="0" rIns="0" bIns="0" rtlCol="0" anchor="ctr"/>
+          <a:lstStyle/>
+          <a:p>
+            <a:pPr indent="0" marL="0">
+              <a:buNone/>
+            </a:pPr>
+            <a:r>
+              <a:rPr lang="en-US" sz="2600" b="1" dirty="0">
+                <a:solidFill>
+                  <a:srgbClr val="2E6E6E"/>
                 </a:solidFill>
                 <a:latin typeface="Cambria" pitchFamily="34" charset="0"/>
                 <a:ea typeface="Cambria" pitchFamily="34" charset="-122"/>
                 <a:cs typeface="Cambria" pitchFamily="34" charset="-120"/>
               </a:rPr>
-              <a:t>We</a:t>
-            </a:r>
-            <a:endParaRPr lang="en-US" sz="2200" dirty="0"/>
+              <a:t>Q2</a:t>
+            </a:r>
+            <a:endParaRPr lang="en-US" sz="2600" dirty="0"/>
           </a:p>
         </p:txBody>
       </p:sp>
@@ -4185,136 +4255,143 @@
         </p:nvSpPr>
         <p:spPr>
           <a:xfrm>
-            <a:off x="2404872" y="3017520"/>
-            <a:ext cx="768096" cy="768096"/>
-          </a:xfrm>
-          <a:prstGeom prst="rect">
-            <a:avLst/>
-          </a:prstGeom>
-          <a:noFill/>
-          <a:ln/>
-        </p:spPr>
-        <p:txBody>
-          <a:bodyPr wrap="square" lIns="0" tIns="0" rIns="0" bIns="0" rtlCol="0" anchor="ctr"/>
-          <a:lstStyle/>
-          <a:p>
-            <a:pPr algn="ctr" indent="0" marL="0">
-              <a:buNone/>
-            </a:pPr>
-            <a:r>
-              <a:rPr lang="en-US" sz="2200" b="1" dirty="0">
-                <a:solidFill>
-                  <a:srgbClr val="FFFFFF"/>
+            <a:off x="1691640" y="2350008"/>
+            <a:ext cx="6766560" cy="685800"/>
+          </a:xfrm>
+          <a:prstGeom prst="rect">
+            <a:avLst/>
+          </a:prstGeom>
+          <a:noFill/>
+          <a:ln/>
+        </p:spPr>
+        <p:txBody>
+          <a:bodyPr wrap="square" lIns="0" tIns="0" rIns="0" bIns="0" rtlCol="0" anchor="ctr"/>
+          <a:lstStyle/>
+          <a:p>
+            <a:pPr indent="0" marL="0">
+              <a:lnSpc>
+                <a:spcPct val="112000"/>
+              </a:lnSpc>
+              <a:buNone/>
+            </a:pPr>
+            <a:r>
+              <a:rPr lang="en-US" sz="1700" b="1" dirty="0">
+                <a:solidFill>
+                  <a:srgbClr val="22313D"/>
+                </a:solidFill>
+                <a:latin typeface="Calibri" pitchFamily="34" charset="0"/>
+                <a:ea typeface="Calibri" pitchFamily="34" charset="-122"/>
+                <a:cs typeface="Calibri" pitchFamily="34" charset="-120"/>
+              </a:rPr>
+              <a:t>Who deserves a goodbye?</a:t>
+            </a:r>
+            <a:endParaRPr lang="en-US" sz="1700" dirty="0"/>
+          </a:p>
+          <a:p>
+            <a:pPr indent="0" marL="0">
+              <a:lnSpc>
+                <a:spcPct val="112000"/>
+              </a:lnSpc>
+              <a:buNone/>
+            </a:pPr>
+            <a:r>
+              <a:rPr lang="en-US" sz="1150" dirty="0">
+                <a:solidFill>
+                  <a:srgbClr val="888888"/>
+                </a:solidFill>
+                <a:latin typeface="Calibri" pitchFamily="34" charset="0"/>
+                <a:ea typeface="Calibri" pitchFamily="34" charset="-122"/>
+                <a:cs typeface="Calibri" pitchFamily="34" charset="-120"/>
+              </a:rPr>
+              <a:t>The community behind 50 years of relationships. Answered by the Season of Listening.</a:t>
+            </a:r>
+            <a:endParaRPr lang="en-US" sz="1700" dirty="0"/>
+          </a:p>
+        </p:txBody>
+      </p:sp>
+      <p:sp>
+        <p:nvSpPr>
+          <p:cNvPr id="9" name="Shape 7"/>
+          <p:cNvSpPr/>
+          <p:nvPr/>
+        </p:nvSpPr>
+        <p:spPr>
+          <a:xfrm>
+            <a:off x="502920" y="3300984"/>
+            <a:ext cx="8138160" cy="914400"/>
+          </a:xfrm>
+          <a:prstGeom prst="roundRect">
+            <a:avLst>
+              <a:gd name="adj" fmla="val 9000"/>
+            </a:avLst>
+          </a:prstGeom>
+          <a:solidFill>
+            <a:srgbClr val="FFFFFF"/>
+          </a:solidFill>
+          <a:ln w="12700">
+            <a:solidFill>
+              <a:srgbClr val="D5DFE1"/>
+            </a:solidFill>
+            <a:prstDash val="solid"/>
+          </a:ln>
+          <a:effectLst>
+            <a:outerShdw sx="100000" sy="100000" kx="0" ky="0" algn="bl" rotWithShape="0" blurRad="76200" dist="25400" dir="5400000">
+              <a:srgbClr val="AEB9BD">
+                <a:alpha val="25000"/>
+              </a:srgbClr>
+            </a:outerShdw>
+          </a:effectLst>
+        </p:spPr>
+      </p:sp>
+      <p:sp>
+        <p:nvSpPr>
+          <p:cNvPr id="10" name="Text 8"/>
+          <p:cNvSpPr/>
+          <p:nvPr/>
+        </p:nvSpPr>
+        <p:spPr>
+          <a:xfrm>
+            <a:off x="777240" y="3300984"/>
+            <a:ext cx="777240" cy="914400"/>
+          </a:xfrm>
+          <a:prstGeom prst="rect">
+            <a:avLst/>
+          </a:prstGeom>
+          <a:noFill/>
+          <a:ln/>
+        </p:spPr>
+        <p:txBody>
+          <a:bodyPr wrap="square" lIns="0" tIns="0" rIns="0" bIns="0" rtlCol="0" anchor="ctr"/>
+          <a:lstStyle/>
+          <a:p>
+            <a:pPr indent="0" marL="0">
+              <a:buNone/>
+            </a:pPr>
+            <a:r>
+              <a:rPr lang="en-US" sz="2600" b="1" dirty="0">
+                <a:solidFill>
+                  <a:srgbClr val="1F3A4D"/>
                 </a:solidFill>
                 <a:latin typeface="Cambria" pitchFamily="34" charset="0"/>
                 <a:ea typeface="Cambria" pitchFamily="34" charset="-122"/>
                 <a:cs typeface="Cambria" pitchFamily="34" charset="-120"/>
               </a:rPr>
-              <a:t>It</a:t>
-            </a:r>
-            <a:endParaRPr lang="en-US" sz="2200" dirty="0"/>
-          </a:p>
-        </p:txBody>
-      </p:sp>
-      <p:sp>
-        <p:nvSpPr>
-          <p:cNvPr id="9" name="Shape 7"/>
-          <p:cNvSpPr/>
-          <p:nvPr/>
-        </p:nvSpPr>
-        <p:spPr>
-          <a:xfrm>
-            <a:off x="1307592" y="2130552"/>
-            <a:ext cx="-256032" cy="841248"/>
-          </a:xfrm>
-          <a:prstGeom prst="line">
-            <a:avLst/>
-          </a:prstGeom>
-          <a:noFill/>
-          <a:ln w="22225">
-            <a:solidFill>
-              <a:srgbClr val="888888"/>
-            </a:solidFill>
-            <a:prstDash val="solid"/>
-          </a:ln>
-        </p:spPr>
-      </p:sp>
-      <p:sp>
-        <p:nvSpPr>
-          <p:cNvPr id="10" name="Shape 8"/>
-          <p:cNvSpPr/>
-          <p:nvPr/>
-        </p:nvSpPr>
-        <p:spPr>
-          <a:xfrm>
-            <a:off x="2441448" y="2130552"/>
-            <a:ext cx="256032" cy="841248"/>
-          </a:xfrm>
-          <a:prstGeom prst="line">
-            <a:avLst/>
-          </a:prstGeom>
-          <a:noFill/>
-          <a:ln w="22225">
-            <a:solidFill>
-              <a:srgbClr val="888888"/>
-            </a:solidFill>
-            <a:prstDash val="solid"/>
-          </a:ln>
-        </p:spPr>
-      </p:sp>
-      <p:sp>
-        <p:nvSpPr>
-          <p:cNvPr id="11" name="Shape 9"/>
-          <p:cNvSpPr/>
-          <p:nvPr/>
-        </p:nvSpPr>
-        <p:spPr>
-          <a:xfrm>
-            <a:off x="1399032" y="3401568"/>
-            <a:ext cx="950976" cy="0"/>
-          </a:xfrm>
-          <a:prstGeom prst="line">
-            <a:avLst/>
-          </a:prstGeom>
-          <a:noFill/>
-          <a:ln w="22225">
-            <a:solidFill>
-              <a:srgbClr val="888888"/>
-            </a:solidFill>
-            <a:prstDash val="solid"/>
-          </a:ln>
-        </p:spPr>
-      </p:sp>
-      <p:sp>
-        <p:nvSpPr>
-          <p:cNvPr id="12" name="Shape 10"/>
-          <p:cNvSpPr/>
-          <p:nvPr/>
-        </p:nvSpPr>
-        <p:spPr>
-          <a:xfrm>
-            <a:off x="3977640" y="1344168"/>
-            <a:ext cx="274320" cy="274320"/>
-          </a:xfrm>
-          <a:prstGeom prst="ellipse">
-            <a:avLst/>
-          </a:prstGeom>
-          <a:solidFill>
-            <a:srgbClr val="1F3A4D"/>
-          </a:solidFill>
-          <a:ln/>
-        </p:spPr>
-      </p:sp>
-      <p:sp>
-        <p:nvSpPr>
-          <p:cNvPr id="13" name="Text 11"/>
-          <p:cNvSpPr/>
-          <p:nvPr/>
-        </p:nvSpPr>
-        <p:spPr>
-          <a:xfrm>
-            <a:off x="4434840" y="1207008"/>
-            <a:ext cx="4206240" cy="914400"/>
+              <a:t>Q3</a:t>
+            </a:r>
+            <a:endParaRPr lang="en-US" sz="2600" dirty="0"/>
+          </a:p>
+        </p:txBody>
+      </p:sp>
+      <p:sp>
+        <p:nvSpPr>
+          <p:cNvPr id="11" name="Text 9"/>
+          <p:cNvSpPr/>
+          <p:nvPr/>
+        </p:nvSpPr>
+        <p:spPr>
+          <a:xfrm>
+            <a:off x="1691640" y="3429000"/>
+            <a:ext cx="6766560" cy="685800"/>
           </a:xfrm>
           <a:prstGeom prst="rect">
             <a:avLst/>
@@ -4328,212 +4405,48 @@
           <a:p>
             <a:pPr indent="0" marL="0">
               <a:lnSpc>
-                <a:spcPct val="108000"/>
+                <a:spcPct val="112000"/>
               </a:lnSpc>
               <a:buNone/>
             </a:pPr>
             <a:r>
-              <a:rPr lang="en-US" sz="1550" b="1" dirty="0">
-                <a:solidFill>
-                  <a:srgbClr val="1F3A4D"/>
-                </a:solidFill>
-                <a:latin typeface="Calibri" pitchFamily="34" charset="0"/>
-                <a:ea typeface="Calibri" pitchFamily="34" charset="-122"/>
-                <a:cs typeface="Calibri" pitchFamily="34" charset="-120"/>
-              </a:rPr>
-              <a:t>I — the leader</a:t>
-            </a:r>
-            <a:endParaRPr lang="en-US" sz="1550" dirty="0"/>
+              <a:rPr lang="en-US" sz="1700" b="1" dirty="0">
+                <a:solidFill>
+                  <a:srgbClr val="22313D"/>
+                </a:solidFill>
+                <a:latin typeface="Calibri" pitchFamily="34" charset="0"/>
+                <a:ea typeface="Calibri" pitchFamily="34" charset="-122"/>
+                <a:cs typeface="Calibri" pitchFamily="34" charset="-120"/>
+              </a:rPr>
+              <a:t>What lives on?</a:t>
+            </a:r>
+            <a:endParaRPr lang="en-US" sz="1700" dirty="0"/>
           </a:p>
           <a:p>
             <a:pPr indent="0" marL="0">
               <a:lnSpc>
-                <a:spcPct val="108000"/>
+                <a:spcPct val="112000"/>
               </a:lnSpc>
               <a:buNone/>
             </a:pPr>
             <a:r>
-              <a:rPr lang="en-US" sz="1250" dirty="0">
-                <a:solidFill>
-                  <a:srgbClr val="22313D"/>
-                </a:solidFill>
-                <a:latin typeface="Calibri" pitchFamily="34" charset="0"/>
-                <a:ea typeface="Calibri" pitchFamily="34" charset="-122"/>
-                <a:cs typeface="Calibri" pitchFamily="34" charset="-120"/>
-              </a:rPr>
-              <a:t>Succession, identity, letting go. Someone has to own the ending.</a:t>
-            </a:r>
-            <a:endParaRPr lang="en-US" sz="1550" dirty="0"/>
-          </a:p>
-        </p:txBody>
-      </p:sp>
-      <p:sp>
-        <p:nvSpPr>
-          <p:cNvPr id="14" name="Shape 12"/>
-          <p:cNvSpPr/>
-          <p:nvPr/>
-        </p:nvSpPr>
-        <p:spPr>
-          <a:xfrm>
-            <a:off x="3977640" y="2331720"/>
-            <a:ext cx="274320" cy="274320"/>
-          </a:xfrm>
-          <a:prstGeom prst="ellipse">
-            <a:avLst/>
-          </a:prstGeom>
-          <a:solidFill>
-            <a:srgbClr val="2E6E6E"/>
-          </a:solidFill>
-          <a:ln/>
-        </p:spPr>
-      </p:sp>
-      <p:sp>
-        <p:nvSpPr>
-          <p:cNvPr id="15" name="Text 13"/>
-          <p:cNvSpPr/>
-          <p:nvPr/>
-        </p:nvSpPr>
-        <p:spPr>
-          <a:xfrm>
-            <a:off x="4434840" y="2194560"/>
-            <a:ext cx="4206240" cy="914400"/>
-          </a:xfrm>
-          <a:prstGeom prst="rect">
-            <a:avLst/>
-          </a:prstGeom>
-          <a:noFill/>
-          <a:ln/>
-        </p:spPr>
-        <p:txBody>
-          <a:bodyPr wrap="square" lIns="0" tIns="0" rIns="0" bIns="0" rtlCol="0" anchor="ctr"/>
-          <a:lstStyle/>
-          <a:p>
-            <a:pPr indent="0" marL="0">
-              <a:lnSpc>
-                <a:spcPct val="108000"/>
-              </a:lnSpc>
-              <a:buNone/>
-            </a:pPr>
-            <a:r>
-              <a:rPr lang="en-US" sz="1550" b="1" dirty="0">
-                <a:solidFill>
-                  <a:srgbClr val="2E6E6E"/>
-                </a:solidFill>
-                <a:latin typeface="Calibri" pitchFamily="34" charset="0"/>
-                <a:ea typeface="Calibri" pitchFamily="34" charset="-122"/>
-                <a:cs typeface="Calibri" pitchFamily="34" charset="-120"/>
-              </a:rPr>
-              <a:t>We — the community</a:t>
-            </a:r>
-            <a:endParaRPr lang="en-US" sz="1550" dirty="0"/>
-          </a:p>
-          <a:p>
-            <a:pPr indent="0" marL="0">
-              <a:lnSpc>
-                <a:spcPct val="108000"/>
-              </a:lnSpc>
-              <a:buNone/>
-            </a:pPr>
-            <a:r>
-              <a:rPr lang="en-US" sz="1250" dirty="0">
-                <a:solidFill>
-                  <a:srgbClr val="22313D"/>
-                </a:solidFill>
-                <a:latin typeface="Calibri" pitchFamily="34" charset="0"/>
-                <a:ea typeface="Calibri" pitchFamily="34" charset="-122"/>
-                <a:cs typeface="Calibri" pitchFamily="34" charset="-120"/>
-              </a:rPr>
-              <a:t>Being heard before goodbye. Listening as infrastructure, not sentiment.</a:t>
-            </a:r>
-            <a:endParaRPr lang="en-US" sz="1550" dirty="0"/>
-          </a:p>
-        </p:txBody>
-      </p:sp>
-      <p:sp>
-        <p:nvSpPr>
-          <p:cNvPr id="16" name="Shape 14"/>
-          <p:cNvSpPr/>
-          <p:nvPr/>
-        </p:nvSpPr>
-        <p:spPr>
-          <a:xfrm>
-            <a:off x="3977640" y="3319272"/>
-            <a:ext cx="274320" cy="274320"/>
-          </a:xfrm>
-          <a:prstGeom prst="ellipse">
-            <a:avLst/>
-          </a:prstGeom>
-          <a:solidFill>
-            <a:srgbClr val="C08A2E"/>
-          </a:solidFill>
-          <a:ln/>
-        </p:spPr>
-      </p:sp>
-      <p:sp>
-        <p:nvSpPr>
-          <p:cNvPr id="17" name="Text 15"/>
-          <p:cNvSpPr/>
-          <p:nvPr/>
-        </p:nvSpPr>
-        <p:spPr>
-          <a:xfrm>
-            <a:off x="4434840" y="3182112"/>
-            <a:ext cx="4206240" cy="914400"/>
-          </a:xfrm>
-          <a:prstGeom prst="rect">
-            <a:avLst/>
-          </a:prstGeom>
-          <a:noFill/>
-          <a:ln/>
-        </p:spPr>
-        <p:txBody>
-          <a:bodyPr wrap="square" lIns="0" tIns="0" rIns="0" bIns="0" rtlCol="0" anchor="ctr"/>
-          <a:lstStyle/>
-          <a:p>
-            <a:pPr indent="0" marL="0">
-              <a:lnSpc>
-                <a:spcPct val="108000"/>
-              </a:lnSpc>
-              <a:buNone/>
-            </a:pPr>
-            <a:r>
-              <a:rPr lang="en-US" sz="1550" b="1" dirty="0">
-                <a:solidFill>
-                  <a:srgbClr val="C08A2E"/>
-                </a:solidFill>
-                <a:latin typeface="Calibri" pitchFamily="34" charset="0"/>
-                <a:ea typeface="Calibri" pitchFamily="34" charset="-122"/>
-                <a:cs typeface="Calibri" pitchFamily="34" charset="-120"/>
-              </a:rPr>
-              <a:t>It — the systems</a:t>
-            </a:r>
-            <a:endParaRPr lang="en-US" sz="1550" dirty="0"/>
-          </a:p>
-          <a:p>
-            <a:pPr indent="0" marL="0">
-              <a:lnSpc>
-                <a:spcPct val="108000"/>
-              </a:lnSpc>
-              <a:buNone/>
-            </a:pPr>
-            <a:r>
-              <a:rPr lang="en-US" sz="1250" dirty="0">
-                <a:solidFill>
-                  <a:srgbClr val="22313D"/>
-                </a:solidFill>
-                <a:latin typeface="Calibri" pitchFamily="34" charset="0"/>
-                <a:ea typeface="Calibri" pitchFamily="34" charset="-122"/>
-                <a:cs typeface="Calibri" pitchFamily="34" charset="-120"/>
-              </a:rPr>
-              <a:t>Data, money, tech. Institutional memory is a systems problem.</a:t>
-            </a:r>
-            <a:endParaRPr lang="en-US" sz="1550" dirty="0"/>
-          </a:p>
-        </p:txBody>
-      </p:sp>
-      <p:sp>
-        <p:nvSpPr>
-          <p:cNvPr id="18" name="Text 16"/>
+              <a:rPr lang="en-US" sz="1150" dirty="0">
+                <a:solidFill>
+                  <a:srgbClr val="888888"/>
+                </a:solidFill>
+                <a:latin typeface="Calibri" pitchFamily="34" charset="0"/>
+                <a:ea typeface="Calibri" pitchFamily="34" charset="-122"/>
+                <a:cs typeface="Calibri" pitchFamily="34" charset="-120"/>
+              </a:rPr>
+              <a:t>The mission, the stories, the assets. Answered by the legacy plan — and a celebration.</a:t>
+            </a:r>
+            <a:endParaRPr lang="en-US" sz="1700" dirty="0"/>
+          </a:p>
+        </p:txBody>
+      </p:sp>
+      <p:sp>
+        <p:nvSpPr>
+          <p:cNvPr id="12" name="Text 10"/>
           <p:cNvSpPr/>
           <p:nvPr/>
         </p:nvSpPr>
@@ -4564,7 +4477,7 @@
                 <a:ea typeface="Calibri" pitchFamily="34" charset="-122"/>
                 <a:cs typeface="Calibri" pitchFamily="34" charset="-120"/>
               </a:rPr>
-              <a:t>Transitions fail when you optimize one dimension and neglect the other two.</a:t>
+              <a:t>Transitions fail when you answer one question and skip the other two.</a:t>
             </a:r>
             <a:endParaRPr lang="en-US" sz="1350" dirty="0"/>
           </a:p>
@@ -4635,7 +4548,7 @@
                 <a:ea typeface="Cambria" pitchFamily="34" charset="-122"/>
                 <a:cs typeface="Cambria" pitchFamily="34" charset="-120"/>
               </a:rPr>
-              <a:t>It — forensic reconstruction</a:t>
+              <a:t>What do we actually have?</a:t>
             </a:r>
             <a:endParaRPr lang="en-US" sz="3000" dirty="0"/>
           </a:p>
@@ -4643,110 +4556,85 @@
       </p:sp>
       <p:sp>
         <p:nvSpPr>
-          <p:cNvPr id="3" name="Shape 1"/>
-          <p:cNvSpPr/>
-          <p:nvPr/>
-        </p:nvSpPr>
-        <p:spPr>
-          <a:xfrm>
-            <a:off x="8403336" y="82296"/>
-            <a:ext cx="164592" cy="164592"/>
-          </a:xfrm>
-          <a:prstGeom prst="ellipse">
-            <a:avLst/>
-          </a:prstGeom>
-          <a:solidFill>
-            <a:srgbClr val="1F3A4D">
-              <a:alpha val="35000"/>
-            </a:srgbClr>
-          </a:solidFill>
-          <a:ln/>
-        </p:spPr>
-      </p:sp>
-      <p:sp>
-        <p:nvSpPr>
-          <p:cNvPr id="4" name="Shape 2"/>
-          <p:cNvSpPr/>
-          <p:nvPr/>
-        </p:nvSpPr>
-        <p:spPr>
-          <a:xfrm>
-            <a:off x="8212409" y="411480"/>
-            <a:ext cx="164592" cy="164592"/>
-          </a:xfrm>
-          <a:prstGeom prst="ellipse">
-            <a:avLst/>
-          </a:prstGeom>
-          <a:solidFill>
-            <a:srgbClr val="2E6E6E">
-              <a:alpha val="35000"/>
-            </a:srgbClr>
-          </a:solidFill>
-          <a:ln/>
-        </p:spPr>
+          <p:cNvPr id="3" name="Text 1"/>
+          <p:cNvSpPr/>
+          <p:nvPr/>
+        </p:nvSpPr>
+        <p:spPr>
+          <a:xfrm>
+            <a:off x="7726680" y="237744"/>
+            <a:ext cx="960120" cy="402336"/>
+          </a:xfrm>
+          <a:prstGeom prst="rect">
+            <a:avLst/>
+          </a:prstGeom>
+          <a:noFill/>
+          <a:ln/>
+        </p:spPr>
+        <p:txBody>
+          <a:bodyPr wrap="square" lIns="0" tIns="0" rIns="0" bIns="0" rtlCol="0" anchor="ctr"/>
+          <a:lstStyle/>
+          <a:p>
+            <a:pPr algn="r" indent="0" marL="0">
+              <a:buNone/>
+            </a:pPr>
+            <a:r>
+              <a:rPr lang="en-US" sz="2400" b="1" dirty="0">
+                <a:solidFill>
+                  <a:srgbClr val="C08A2E"/>
+                </a:solidFill>
+                <a:latin typeface="Cambria" pitchFamily="34" charset="0"/>
+                <a:ea typeface="Cambria" pitchFamily="34" charset="-122"/>
+                <a:cs typeface="Cambria" pitchFamily="34" charset="-120"/>
+              </a:rPr>
+              <a:t>Q1</a:t>
+            </a:r>
+            <a:endParaRPr lang="en-US" sz="2400" dirty="0"/>
+          </a:p>
+        </p:txBody>
+      </p:sp>
+      <p:sp>
+        <p:nvSpPr>
+          <p:cNvPr id="4" name="Text 2"/>
+          <p:cNvSpPr/>
+          <p:nvPr/>
+        </p:nvSpPr>
+        <p:spPr>
+          <a:xfrm>
+            <a:off x="6675120" y="640080"/>
+            <a:ext cx="2011680" cy="201168"/>
+          </a:xfrm>
+          <a:prstGeom prst="rect">
+            <a:avLst/>
+          </a:prstGeom>
+          <a:noFill/>
+          <a:ln/>
+        </p:spPr>
+        <p:txBody>
+          <a:bodyPr wrap="square" lIns="0" tIns="0" rIns="0" bIns="0" rtlCol="0" anchor="ctr"/>
+          <a:lstStyle/>
+          <a:p>
+            <a:pPr algn="r" indent="0" marL="0">
+              <a:buNone/>
+            </a:pPr>
+            <a:r>
+              <a:rPr lang="en-US" sz="900" b="1" spc="200" kern="0" dirty="0">
+                <a:solidFill>
+                  <a:srgbClr val="888888"/>
+                </a:solidFill>
+                <a:latin typeface="Calibri" pitchFamily="34" charset="0"/>
+                <a:ea typeface="Calibri" pitchFamily="34" charset="-122"/>
+                <a:cs typeface="Calibri" pitchFamily="34" charset="-120"/>
+              </a:rPr>
+              <a:t>THE SYSTEMS</a:t>
+            </a:r>
+            <a:endParaRPr lang="en-US" sz="900" dirty="0"/>
+          </a:p>
+        </p:txBody>
       </p:sp>
       <p:sp>
         <p:nvSpPr>
           <p:cNvPr id="5" name="Shape 3"/>
-          <p:cNvSpPr/>
-          <p:nvPr/>
-        </p:nvSpPr>
-        <p:spPr>
-          <a:xfrm>
-            <a:off x="8553115" y="370332"/>
-            <a:ext cx="246888" cy="246888"/>
-          </a:xfrm>
-          <a:prstGeom prst="ellipse">
-            <a:avLst/>
-          </a:prstGeom>
-          <a:solidFill>
-            <a:srgbClr val="C08A2E"/>
-          </a:solidFill>
-          <a:ln/>
-        </p:spPr>
-      </p:sp>
-      <p:sp>
-        <p:nvSpPr>
-          <p:cNvPr id="6" name="Text 4"/>
-          <p:cNvSpPr/>
-          <p:nvPr/>
-        </p:nvSpPr>
-        <p:spPr>
-          <a:xfrm>
-            <a:off x="8028432" y="658368"/>
-            <a:ext cx="914400" cy="201168"/>
-          </a:xfrm>
-          <a:prstGeom prst="rect">
-            <a:avLst/>
-          </a:prstGeom>
-          <a:noFill/>
-          <a:ln/>
-        </p:spPr>
-        <p:txBody>
-          <a:bodyPr wrap="square" rtlCol="0" anchor="ctr"/>
-          <a:lstStyle/>
-          <a:p>
-            <a:pPr algn="ctr" indent="0" marL="0">
-              <a:buNone/>
-            </a:pPr>
-            <a:r>
-              <a:rPr lang="en-US" sz="900" b="1" spc="200" kern="0" dirty="0">
-                <a:solidFill>
-                  <a:srgbClr val="C08A2E"/>
-                </a:solidFill>
-                <a:latin typeface="Calibri" pitchFamily="34" charset="0"/>
-                <a:ea typeface="Calibri" pitchFamily="34" charset="-122"/>
-                <a:cs typeface="Calibri" pitchFamily="34" charset="-120"/>
-              </a:rPr>
-              <a:t>It</a:t>
-            </a:r>
-            <a:endParaRPr lang="en-US" sz="900" dirty="0"/>
-          </a:p>
-        </p:txBody>
-      </p:sp>
-      <p:sp>
-        <p:nvSpPr>
-          <p:cNvPr id="7" name="Shape 5"/>
           <p:cNvSpPr/>
           <p:nvPr/>
         </p:nvSpPr>
@@ -4773,7 +4661,7 @@
       </p:sp>
       <p:sp>
         <p:nvSpPr>
-          <p:cNvPr id="8" name="Text 6"/>
+          <p:cNvPr id="6" name="Text 4"/>
           <p:cNvSpPr/>
           <p:nvPr/>
         </p:nvSpPr>
@@ -4812,7 +4700,7 @@
       </p:sp>
       <p:sp>
         <p:nvSpPr>
-          <p:cNvPr id="9" name="Text 7"/>
+          <p:cNvPr id="7" name="Text 5"/>
           <p:cNvSpPr/>
           <p:nvPr/>
         </p:nvSpPr>
@@ -4848,7 +4736,7 @@
       </p:sp>
       <p:sp>
         <p:nvSpPr>
-          <p:cNvPr id="10" name="Shape 8"/>
+          <p:cNvPr id="8" name="Shape 6"/>
           <p:cNvSpPr/>
           <p:nvPr/>
         </p:nvSpPr>
@@ -4875,7 +4763,7 @@
       </p:sp>
       <p:sp>
         <p:nvSpPr>
-          <p:cNvPr id="11" name="Text 9"/>
+          <p:cNvPr id="9" name="Text 7"/>
           <p:cNvSpPr/>
           <p:nvPr/>
         </p:nvSpPr>
@@ -4914,7 +4802,7 @@
       </p:sp>
       <p:sp>
         <p:nvSpPr>
-          <p:cNvPr id="12" name="Text 10"/>
+          <p:cNvPr id="10" name="Text 8"/>
           <p:cNvSpPr/>
           <p:nvPr/>
         </p:nvSpPr>
@@ -4950,7 +4838,7 @@
       </p:sp>
       <p:sp>
         <p:nvSpPr>
-          <p:cNvPr id="13" name="Shape 11"/>
+          <p:cNvPr id="11" name="Shape 9"/>
           <p:cNvSpPr/>
           <p:nvPr/>
         </p:nvSpPr>
@@ -4977,7 +4865,7 @@
       </p:sp>
       <p:sp>
         <p:nvSpPr>
-          <p:cNvPr id="14" name="Text 12"/>
+          <p:cNvPr id="12" name="Text 10"/>
           <p:cNvSpPr/>
           <p:nvPr/>
         </p:nvSpPr>
@@ -5016,7 +4904,7 @@
       </p:sp>
       <p:sp>
         <p:nvSpPr>
-          <p:cNvPr id="15" name="Text 13"/>
+          <p:cNvPr id="13" name="Text 11"/>
           <p:cNvSpPr/>
           <p:nvPr/>
         </p:nvSpPr>
@@ -5052,7 +4940,7 @@
       </p:sp>
       <p:sp>
         <p:nvSpPr>
-          <p:cNvPr id="16" name="Shape 14"/>
+          <p:cNvPr id="14" name="Shape 12"/>
           <p:cNvSpPr/>
           <p:nvPr/>
         </p:nvSpPr>
@@ -5079,7 +4967,7 @@
       </p:sp>
       <p:sp>
         <p:nvSpPr>
-          <p:cNvPr id="17" name="Text 15"/>
+          <p:cNvPr id="15" name="Text 13"/>
           <p:cNvSpPr/>
           <p:nvPr/>
         </p:nvSpPr>
@@ -5118,7 +5006,7 @@
       </p:sp>
       <p:sp>
         <p:nvSpPr>
-          <p:cNvPr id="18" name="Text 16"/>
+          <p:cNvPr id="16" name="Text 14"/>
           <p:cNvSpPr/>
           <p:nvPr/>
         </p:nvSpPr>
@@ -5154,7 +5042,7 @@
       </p:sp>
       <p:sp>
         <p:nvSpPr>
-          <p:cNvPr id="19" name="Shape 17"/>
+          <p:cNvPr id="17" name="Shape 15"/>
           <p:cNvSpPr/>
           <p:nvPr/>
         </p:nvSpPr>
@@ -5181,7 +5069,7 @@
       </p:sp>
       <p:sp>
         <p:nvSpPr>
-          <p:cNvPr id="20" name="Text 18"/>
+          <p:cNvPr id="18" name="Text 16"/>
           <p:cNvSpPr/>
           <p:nvPr/>
         </p:nvSpPr>
@@ -5220,7 +5108,7 @@
       </p:sp>
       <p:sp>
         <p:nvSpPr>
-          <p:cNvPr id="21" name="Shape 19"/>
+          <p:cNvPr id="19" name="Shape 17"/>
           <p:cNvSpPr/>
           <p:nvPr/>
         </p:nvSpPr>
@@ -5242,7 +5130,7 @@
       </p:sp>
       <p:sp>
         <p:nvSpPr>
-          <p:cNvPr id="22" name="Text 20"/>
+          <p:cNvPr id="20" name="Text 18"/>
           <p:cNvSpPr/>
           <p:nvPr/>
         </p:nvSpPr>
@@ -5304,7 +5192,7 @@
       </p:sp>
       <p:sp>
         <p:nvSpPr>
-          <p:cNvPr id="23" name="Shape 21"/>
+          <p:cNvPr id="21" name="Shape 19"/>
           <p:cNvSpPr/>
           <p:nvPr/>
         </p:nvSpPr>
@@ -5326,7 +5214,7 @@
       </p:sp>
       <p:sp>
         <p:nvSpPr>
-          <p:cNvPr id="24" name="Text 22"/>
+          <p:cNvPr id="22" name="Text 20"/>
           <p:cNvSpPr/>
           <p:nvPr/>
         </p:nvSpPr>
@@ -5388,7 +5276,7 @@
       </p:sp>
       <p:sp>
         <p:nvSpPr>
-          <p:cNvPr id="25" name="Shape 23"/>
+          <p:cNvPr id="23" name="Shape 21"/>
           <p:cNvSpPr/>
           <p:nvPr/>
         </p:nvSpPr>
@@ -5410,7 +5298,7 @@
       </p:sp>
       <p:sp>
         <p:nvSpPr>
-          <p:cNvPr id="26" name="Text 24"/>
+          <p:cNvPr id="24" name="Text 22"/>
           <p:cNvSpPr/>
           <p:nvPr/>
         </p:nvSpPr>
@@ -5472,7 +5360,7 @@
       </p:sp>
       <p:sp>
         <p:nvSpPr>
-          <p:cNvPr id="27" name="Text 25"/>
+          <p:cNvPr id="25" name="Text 23"/>
           <p:cNvSpPr/>
           <p:nvPr/>
         </p:nvSpPr>
@@ -5539,7 +5427,7 @@
       </p:sp>
       <p:sp>
         <p:nvSpPr>
-          <p:cNvPr id="28" name="Text 26"/>
+          <p:cNvPr id="26" name="Text 24"/>
           <p:cNvSpPr/>
           <p:nvPr/>
         </p:nvSpPr>
@@ -5641,7 +5529,7 @@
                 <a:ea typeface="Cambria" pitchFamily="34" charset="-122"/>
                 <a:cs typeface="Cambria" pitchFamily="34" charset="-120"/>
               </a:rPr>
-              <a:t>We — the Season of Listening</a:t>
+              <a:t>Who deserves a goodbye?</a:t>
             </a:r>
             <a:endParaRPr lang="en-US" sz="3000" dirty="0"/>
           </a:p>
@@ -5649,102 +5537,77 @@
       </p:sp>
       <p:sp>
         <p:nvSpPr>
-          <p:cNvPr id="3" name="Shape 1"/>
-          <p:cNvSpPr/>
-          <p:nvPr/>
-        </p:nvSpPr>
-        <p:spPr>
-          <a:xfrm>
-            <a:off x="8403336" y="82296"/>
-            <a:ext cx="164592" cy="164592"/>
-          </a:xfrm>
-          <a:prstGeom prst="ellipse">
-            <a:avLst/>
-          </a:prstGeom>
-          <a:solidFill>
-            <a:srgbClr val="1F3A4D">
-              <a:alpha val="35000"/>
-            </a:srgbClr>
-          </a:solidFill>
-          <a:ln/>
-        </p:spPr>
-      </p:sp>
-      <p:sp>
-        <p:nvSpPr>
-          <p:cNvPr id="4" name="Shape 2"/>
-          <p:cNvSpPr/>
-          <p:nvPr/>
-        </p:nvSpPr>
-        <p:spPr>
-          <a:xfrm>
-            <a:off x="8171261" y="370332"/>
-            <a:ext cx="246888" cy="246888"/>
-          </a:xfrm>
-          <a:prstGeom prst="ellipse">
-            <a:avLst/>
-          </a:prstGeom>
-          <a:solidFill>
-            <a:srgbClr val="2E6E6E"/>
-          </a:solidFill>
-          <a:ln/>
-        </p:spPr>
-      </p:sp>
-      <p:sp>
-        <p:nvSpPr>
-          <p:cNvPr id="5" name="Shape 3"/>
-          <p:cNvSpPr/>
-          <p:nvPr/>
-        </p:nvSpPr>
-        <p:spPr>
-          <a:xfrm>
-            <a:off x="8594263" y="411480"/>
-            <a:ext cx="164592" cy="164592"/>
-          </a:xfrm>
-          <a:prstGeom prst="ellipse">
-            <a:avLst/>
-          </a:prstGeom>
-          <a:solidFill>
-            <a:srgbClr val="C08A2E">
-              <a:alpha val="35000"/>
-            </a:srgbClr>
-          </a:solidFill>
-          <a:ln/>
-        </p:spPr>
-      </p:sp>
-      <p:sp>
-        <p:nvSpPr>
-          <p:cNvPr id="6" name="Text 4"/>
-          <p:cNvSpPr/>
-          <p:nvPr/>
-        </p:nvSpPr>
-        <p:spPr>
-          <a:xfrm>
-            <a:off x="8028432" y="658368"/>
-            <a:ext cx="914400" cy="201168"/>
-          </a:xfrm>
-          <a:prstGeom prst="rect">
-            <a:avLst/>
-          </a:prstGeom>
-          <a:noFill/>
-          <a:ln/>
-        </p:spPr>
-        <p:txBody>
-          <a:bodyPr wrap="square" rtlCol="0" anchor="ctr"/>
-          <a:lstStyle/>
-          <a:p>
-            <a:pPr algn="ctr" indent="0" marL="0">
+          <p:cNvPr id="3" name="Text 1"/>
+          <p:cNvSpPr/>
+          <p:nvPr/>
+        </p:nvSpPr>
+        <p:spPr>
+          <a:xfrm>
+            <a:off x="7726680" y="237744"/>
+            <a:ext cx="960120" cy="402336"/>
+          </a:xfrm>
+          <a:prstGeom prst="rect">
+            <a:avLst/>
+          </a:prstGeom>
+          <a:noFill/>
+          <a:ln/>
+        </p:spPr>
+        <p:txBody>
+          <a:bodyPr wrap="square" lIns="0" tIns="0" rIns="0" bIns="0" rtlCol="0" anchor="ctr"/>
+          <a:lstStyle/>
+          <a:p>
+            <a:pPr algn="r" indent="0" marL="0">
+              <a:buNone/>
+            </a:pPr>
+            <a:r>
+              <a:rPr lang="en-US" sz="2400" b="1" dirty="0">
+                <a:solidFill>
+                  <a:srgbClr val="2E6E6E"/>
+                </a:solidFill>
+                <a:latin typeface="Cambria" pitchFamily="34" charset="0"/>
+                <a:ea typeface="Cambria" pitchFamily="34" charset="-122"/>
+                <a:cs typeface="Cambria" pitchFamily="34" charset="-120"/>
+              </a:rPr>
+              <a:t>Q2</a:t>
+            </a:r>
+            <a:endParaRPr lang="en-US" sz="2400" dirty="0"/>
+          </a:p>
+        </p:txBody>
+      </p:sp>
+      <p:sp>
+        <p:nvSpPr>
+          <p:cNvPr id="4" name="Text 2"/>
+          <p:cNvSpPr/>
+          <p:nvPr/>
+        </p:nvSpPr>
+        <p:spPr>
+          <a:xfrm>
+            <a:off x="6675120" y="640080"/>
+            <a:ext cx="2011680" cy="201168"/>
+          </a:xfrm>
+          <a:prstGeom prst="rect">
+            <a:avLst/>
+          </a:prstGeom>
+          <a:noFill/>
+          <a:ln/>
+        </p:spPr>
+        <p:txBody>
+          <a:bodyPr wrap="square" lIns="0" tIns="0" rIns="0" bIns="0" rtlCol="0" anchor="ctr"/>
+          <a:lstStyle/>
+          <a:p>
+            <a:pPr algn="r" indent="0" marL="0">
               <a:buNone/>
             </a:pPr>
             <a:r>
               <a:rPr lang="en-US" sz="900" b="1" spc="200" kern="0" dirty="0">
                 <a:solidFill>
-                  <a:srgbClr val="2E6E6E"/>
-                </a:solidFill>
-                <a:latin typeface="Calibri" pitchFamily="34" charset="0"/>
-                <a:ea typeface="Calibri" pitchFamily="34" charset="-122"/>
-                <a:cs typeface="Calibri" pitchFamily="34" charset="-120"/>
-              </a:rPr>
-              <a:t>We</a:t>
+                  <a:srgbClr val="888888"/>
+                </a:solidFill>
+                <a:latin typeface="Calibri" pitchFamily="34" charset="0"/>
+                <a:ea typeface="Calibri" pitchFamily="34" charset="-122"/>
+                <a:cs typeface="Calibri" pitchFamily="34" charset="-120"/>
+              </a:rPr>
+              <a:t>THE COMMUNITY</a:t>
             </a:r>
             <a:endParaRPr lang="en-US" sz="900" dirty="0"/>
           </a:p>
@@ -5752,7 +5615,7 @@
       </p:sp>
       <p:sp>
         <p:nvSpPr>
-          <p:cNvPr id="7" name="Text 5"/>
+          <p:cNvPr id="5" name="Text 3"/>
           <p:cNvSpPr/>
           <p:nvPr/>
         </p:nvSpPr>
@@ -5783,7 +5646,7 @@
                 <a:ea typeface="Calibri" pitchFamily="34" charset="-122"/>
                 <a:cs typeface="Calibri" pitchFamily="34" charset="-120"/>
               </a:rPr>
-              <a:t>The We: former retreatants — individuals, churches, organizations — plus volunteers, donors, staff, and board members.</a:t>
+              <a:t>The Season of Listening's answer: former retreatants — individuals, churches, organizations — plus volunteers, donors, staff, and board members.</a:t>
             </a:r>
             <a:endParaRPr lang="en-US" sz="1150" dirty="0"/>
           </a:p>
@@ -5791,7 +5654,7 @@
       </p:sp>
       <p:sp>
         <p:nvSpPr>
-          <p:cNvPr id="8" name="Text 6"/>
+          <p:cNvPr id="6" name="Text 4"/>
           <p:cNvSpPr/>
           <p:nvPr/>
         </p:nvSpPr>
@@ -5853,7 +5716,7 @@
       </p:sp>
       <p:sp>
         <p:nvSpPr>
-          <p:cNvPr id="9" name="Text 7"/>
+          <p:cNvPr id="7" name="Text 5"/>
           <p:cNvSpPr/>
           <p:nvPr/>
         </p:nvSpPr>
@@ -5915,7 +5778,7 @@
       </p:sp>
       <p:sp>
         <p:nvSpPr>
-          <p:cNvPr id="10" name="Text 8"/>
+          <p:cNvPr id="8" name="Text 6"/>
           <p:cNvSpPr/>
           <p:nvPr/>
         </p:nvSpPr>
@@ -5977,7 +5840,7 @@
       </p:sp>
       <p:sp>
         <p:nvSpPr>
-          <p:cNvPr id="11" name="Shape 9"/>
+          <p:cNvPr id="9" name="Shape 7"/>
           <p:cNvSpPr/>
           <p:nvPr/>
         </p:nvSpPr>
@@ -6002,7 +5865,7 @@
       </p:sp>
       <p:sp>
         <p:nvSpPr>
-          <p:cNvPr id="12" name="Text 10"/>
+          <p:cNvPr id="10" name="Text 8"/>
           <p:cNvSpPr/>
           <p:nvPr/>
         </p:nvSpPr>
@@ -6041,7 +5904,7 @@
       </p:sp>
       <p:sp>
         <p:nvSpPr>
-          <p:cNvPr id="13" name="Shape 11"/>
+          <p:cNvPr id="11" name="Shape 9"/>
           <p:cNvSpPr/>
           <p:nvPr/>
         </p:nvSpPr>
@@ -6066,7 +5929,7 @@
       </p:sp>
       <p:sp>
         <p:nvSpPr>
-          <p:cNvPr id="14" name="Text 12"/>
+          <p:cNvPr id="12" name="Text 10"/>
           <p:cNvSpPr/>
           <p:nvPr/>
         </p:nvSpPr>
@@ -6105,7 +5968,7 @@
       </p:sp>
       <p:sp>
         <p:nvSpPr>
-          <p:cNvPr id="15" name="Shape 13"/>
+          <p:cNvPr id="13" name="Shape 11"/>
           <p:cNvSpPr/>
           <p:nvPr/>
         </p:nvSpPr>
@@ -6130,7 +5993,7 @@
       </p:sp>
       <p:sp>
         <p:nvSpPr>
-          <p:cNvPr id="16" name="Text 14"/>
+          <p:cNvPr id="14" name="Text 12"/>
           <p:cNvSpPr/>
           <p:nvPr/>
         </p:nvSpPr>
@@ -6169,7 +6032,7 @@
       </p:sp>
       <p:sp>
         <p:nvSpPr>
-          <p:cNvPr id="17" name="Shape 15"/>
+          <p:cNvPr id="15" name="Shape 13"/>
           <p:cNvSpPr/>
           <p:nvPr/>
         </p:nvSpPr>
@@ -6194,7 +6057,7 @@
       </p:sp>
       <p:sp>
         <p:nvSpPr>
-          <p:cNvPr id="18" name="Text 16"/>
+          <p:cNvPr id="16" name="Text 14"/>
           <p:cNvSpPr/>
           <p:nvPr/>
         </p:nvSpPr>
@@ -6233,7 +6096,7 @@
       </p:sp>
       <p:sp>
         <p:nvSpPr>
-          <p:cNvPr id="19" name="Shape 17"/>
+          <p:cNvPr id="17" name="Shape 15"/>
           <p:cNvSpPr/>
           <p:nvPr/>
         </p:nvSpPr>
@@ -6258,7 +6121,7 @@
       </p:sp>
       <p:sp>
         <p:nvSpPr>
-          <p:cNvPr id="20" name="Text 18"/>
+          <p:cNvPr id="18" name="Text 16"/>
           <p:cNvSpPr/>
           <p:nvPr/>
         </p:nvSpPr>
@@ -6297,7 +6160,7 @@
       </p:sp>
       <p:sp>
         <p:nvSpPr>
-          <p:cNvPr id="21" name="Shape 19"/>
+          <p:cNvPr id="19" name="Shape 17"/>
           <p:cNvSpPr/>
           <p:nvPr/>
         </p:nvSpPr>
@@ -6322,7 +6185,7 @@
       </p:sp>
       <p:sp>
         <p:nvSpPr>
-          <p:cNvPr id="22" name="Text 20"/>
+          <p:cNvPr id="20" name="Text 18"/>
           <p:cNvSpPr/>
           <p:nvPr/>
         </p:nvSpPr>
@@ -6361,7 +6224,7 @@
       </p:sp>
       <p:sp>
         <p:nvSpPr>
-          <p:cNvPr id="23" name="Shape 21"/>
+          <p:cNvPr id="21" name="Shape 19"/>
           <p:cNvSpPr/>
           <p:nvPr/>
         </p:nvSpPr>
@@ -6386,7 +6249,7 @@
       </p:sp>
       <p:sp>
         <p:nvSpPr>
-          <p:cNvPr id="24" name="Text 22"/>
+          <p:cNvPr id="22" name="Text 20"/>
           <p:cNvSpPr/>
           <p:nvPr/>
         </p:nvSpPr>
@@ -6425,7 +6288,7 @@
       </p:sp>
       <p:sp>
         <p:nvSpPr>
-          <p:cNvPr id="25" name="Shape 23"/>
+          <p:cNvPr id="23" name="Shape 21"/>
           <p:cNvSpPr/>
           <p:nvPr/>
         </p:nvSpPr>
@@ -6450,7 +6313,7 @@
       </p:sp>
       <p:sp>
         <p:nvSpPr>
-          <p:cNvPr id="26" name="Text 24"/>
+          <p:cNvPr id="24" name="Text 22"/>
           <p:cNvSpPr/>
           <p:nvPr/>
         </p:nvSpPr>
@@ -6489,7 +6352,7 @@
       </p:sp>
       <p:sp>
         <p:nvSpPr>
-          <p:cNvPr id="27" name="Shape 25"/>
+          <p:cNvPr id="25" name="Shape 23"/>
           <p:cNvSpPr/>
           <p:nvPr/>
         </p:nvSpPr>
@@ -6514,7 +6377,7 @@
       </p:sp>
       <p:sp>
         <p:nvSpPr>
-          <p:cNvPr id="28" name="Text 26"/>
+          <p:cNvPr id="26" name="Text 24"/>
           <p:cNvSpPr/>
           <p:nvPr/>
         </p:nvSpPr>
@@ -6553,7 +6416,7 @@
       </p:sp>
       <p:sp>
         <p:nvSpPr>
-          <p:cNvPr id="29" name="Shape 27"/>
+          <p:cNvPr id="27" name="Shape 25"/>
           <p:cNvSpPr/>
           <p:nvPr/>
         </p:nvSpPr>
@@ -6578,7 +6441,7 @@
       </p:sp>
       <p:sp>
         <p:nvSpPr>
-          <p:cNvPr id="30" name="Text 28"/>
+          <p:cNvPr id="28" name="Text 26"/>
           <p:cNvSpPr/>
           <p:nvPr/>
         </p:nvSpPr>
@@ -6617,7 +6480,7 @@
       </p:sp>
       <p:sp>
         <p:nvSpPr>
-          <p:cNvPr id="31" name="Shape 29"/>
+          <p:cNvPr id="29" name="Shape 27"/>
           <p:cNvSpPr/>
           <p:nvPr/>
         </p:nvSpPr>
@@ -6642,7 +6505,7 @@
       </p:sp>
       <p:sp>
         <p:nvSpPr>
-          <p:cNvPr id="32" name="Text 30"/>
+          <p:cNvPr id="30" name="Text 28"/>
           <p:cNvSpPr/>
           <p:nvPr/>
         </p:nvSpPr>
@@ -6681,7 +6544,7 @@
       </p:sp>
       <p:sp>
         <p:nvSpPr>
-          <p:cNvPr id="33" name="Shape 31"/>
+          <p:cNvPr id="31" name="Shape 29"/>
           <p:cNvSpPr/>
           <p:nvPr/>
         </p:nvSpPr>
@@ -6706,7 +6569,7 @@
       </p:sp>
       <p:sp>
         <p:nvSpPr>
-          <p:cNvPr id="34" name="Text 32"/>
+          <p:cNvPr id="32" name="Text 30"/>
           <p:cNvSpPr/>
           <p:nvPr/>
         </p:nvSpPr>
@@ -6745,7 +6608,7 @@
       </p:sp>
       <p:sp>
         <p:nvSpPr>
-          <p:cNvPr id="35" name="Shape 33"/>
+          <p:cNvPr id="33" name="Shape 31"/>
           <p:cNvSpPr/>
           <p:nvPr/>
         </p:nvSpPr>
@@ -6770,7 +6633,7 @@
       </p:sp>
       <p:sp>
         <p:nvSpPr>
-          <p:cNvPr id="36" name="Text 34"/>
+          <p:cNvPr id="34" name="Text 32"/>
           <p:cNvSpPr/>
           <p:nvPr/>
         </p:nvSpPr>
@@ -6809,7 +6672,7 @@
       </p:sp>
       <p:sp>
         <p:nvSpPr>
-          <p:cNvPr id="37" name="Shape 35"/>
+          <p:cNvPr id="35" name="Shape 33"/>
           <p:cNvSpPr/>
           <p:nvPr/>
         </p:nvSpPr>
@@ -6834,7 +6697,7 @@
       </p:sp>
       <p:sp>
         <p:nvSpPr>
-          <p:cNvPr id="38" name="Text 36"/>
+          <p:cNvPr id="36" name="Text 34"/>
           <p:cNvSpPr/>
           <p:nvPr/>
         </p:nvSpPr>
@@ -6873,7 +6736,7 @@
       </p:sp>
       <p:sp>
         <p:nvSpPr>
-          <p:cNvPr id="39" name="Shape 37"/>
+          <p:cNvPr id="37" name="Shape 35"/>
           <p:cNvSpPr/>
           <p:nvPr/>
         </p:nvSpPr>
@@ -6898,7 +6761,7 @@
       </p:sp>
       <p:sp>
         <p:nvSpPr>
-          <p:cNvPr id="40" name="Text 38"/>
+          <p:cNvPr id="38" name="Text 36"/>
           <p:cNvSpPr/>
           <p:nvPr/>
         </p:nvSpPr>
@@ -6937,7 +6800,7 @@
       </p:sp>
       <p:sp>
         <p:nvSpPr>
-          <p:cNvPr id="41" name="Shape 39"/>
+          <p:cNvPr id="39" name="Shape 37"/>
           <p:cNvSpPr/>
           <p:nvPr/>
         </p:nvSpPr>
@@ -6962,7 +6825,7 @@
       </p:sp>
       <p:sp>
         <p:nvSpPr>
-          <p:cNvPr id="42" name="Text 40"/>
+          <p:cNvPr id="40" name="Text 38"/>
           <p:cNvSpPr/>
           <p:nvPr/>
         </p:nvSpPr>
@@ -7001,7 +6864,7 @@
       </p:sp>
       <p:sp>
         <p:nvSpPr>
-          <p:cNvPr id="43" name="Text 41"/>
+          <p:cNvPr id="41" name="Text 39"/>
           <p:cNvSpPr/>
           <p:nvPr/>
         </p:nvSpPr>
@@ -7040,7 +6903,7 @@
       </p:sp>
       <p:sp>
         <p:nvSpPr>
-          <p:cNvPr id="44" name="Shape 42"/>
+          <p:cNvPr id="42" name="Shape 40"/>
           <p:cNvSpPr/>
           <p:nvPr/>
         </p:nvSpPr>
@@ -7069,7 +6932,7 @@
       </p:sp>
       <p:sp>
         <p:nvSpPr>
-          <p:cNvPr id="45" name="Text 43"/>
+          <p:cNvPr id="43" name="Text 41"/>
           <p:cNvSpPr/>
           <p:nvPr/>
         </p:nvSpPr>
@@ -8227,7 +8090,7 @@
                 <a:ea typeface="Cambria" pitchFamily="34" charset="-122"/>
                 <a:cs typeface="Cambria" pitchFamily="34" charset="-120"/>
               </a:rPr>
-              <a:t>I — ending well, forward</a:t>
+              <a:t>What lives on?</a:t>
             </a:r>
             <a:endParaRPr lang="en-US" sz="3000" dirty="0"/>
           </a:p>
@@ -8235,110 +8098,85 @@
       </p:sp>
       <p:sp>
         <p:nvSpPr>
-          <p:cNvPr id="3" name="Shape 1"/>
-          <p:cNvSpPr/>
-          <p:nvPr/>
-        </p:nvSpPr>
-        <p:spPr>
-          <a:xfrm>
-            <a:off x="8362188" y="41148"/>
-            <a:ext cx="246888" cy="246888"/>
-          </a:xfrm>
-          <a:prstGeom prst="ellipse">
-            <a:avLst/>
-          </a:prstGeom>
-          <a:solidFill>
-            <a:srgbClr val="1F3A4D"/>
-          </a:solidFill>
-          <a:ln/>
-        </p:spPr>
-      </p:sp>
-      <p:sp>
-        <p:nvSpPr>
-          <p:cNvPr id="4" name="Shape 2"/>
-          <p:cNvSpPr/>
-          <p:nvPr/>
-        </p:nvSpPr>
-        <p:spPr>
-          <a:xfrm>
-            <a:off x="8212409" y="411480"/>
-            <a:ext cx="164592" cy="164592"/>
-          </a:xfrm>
-          <a:prstGeom prst="ellipse">
-            <a:avLst/>
-          </a:prstGeom>
-          <a:solidFill>
-            <a:srgbClr val="2E6E6E">
-              <a:alpha val="35000"/>
-            </a:srgbClr>
-          </a:solidFill>
-          <a:ln/>
-        </p:spPr>
+          <p:cNvPr id="3" name="Text 1"/>
+          <p:cNvSpPr/>
+          <p:nvPr/>
+        </p:nvSpPr>
+        <p:spPr>
+          <a:xfrm>
+            <a:off x="7726680" y="237744"/>
+            <a:ext cx="960120" cy="402336"/>
+          </a:xfrm>
+          <a:prstGeom prst="rect">
+            <a:avLst/>
+          </a:prstGeom>
+          <a:noFill/>
+          <a:ln/>
+        </p:spPr>
+        <p:txBody>
+          <a:bodyPr wrap="square" lIns="0" tIns="0" rIns="0" bIns="0" rtlCol="0" anchor="ctr"/>
+          <a:lstStyle/>
+          <a:p>
+            <a:pPr algn="r" indent="0" marL="0">
+              <a:buNone/>
+            </a:pPr>
+            <a:r>
+              <a:rPr lang="en-US" sz="2400" b="1" dirty="0">
+                <a:solidFill>
+                  <a:srgbClr val="1F3A4D"/>
+                </a:solidFill>
+                <a:latin typeface="Cambria" pitchFamily="34" charset="0"/>
+                <a:ea typeface="Cambria" pitchFamily="34" charset="-122"/>
+                <a:cs typeface="Cambria" pitchFamily="34" charset="-120"/>
+              </a:rPr>
+              <a:t>Q3</a:t>
+            </a:r>
+            <a:endParaRPr lang="en-US" sz="2400" dirty="0"/>
+          </a:p>
+        </p:txBody>
+      </p:sp>
+      <p:sp>
+        <p:nvSpPr>
+          <p:cNvPr id="4" name="Text 2"/>
+          <p:cNvSpPr/>
+          <p:nvPr/>
+        </p:nvSpPr>
+        <p:spPr>
+          <a:xfrm>
+            <a:off x="6675120" y="640080"/>
+            <a:ext cx="2011680" cy="201168"/>
+          </a:xfrm>
+          <a:prstGeom prst="rect">
+            <a:avLst/>
+          </a:prstGeom>
+          <a:noFill/>
+          <a:ln/>
+        </p:spPr>
+        <p:txBody>
+          <a:bodyPr wrap="square" lIns="0" tIns="0" rIns="0" bIns="0" rtlCol="0" anchor="ctr"/>
+          <a:lstStyle/>
+          <a:p>
+            <a:pPr algn="r" indent="0" marL="0">
+              <a:buNone/>
+            </a:pPr>
+            <a:r>
+              <a:rPr lang="en-US" sz="900" b="1" spc="200" kern="0" dirty="0">
+                <a:solidFill>
+                  <a:srgbClr val="888888"/>
+                </a:solidFill>
+                <a:latin typeface="Calibri" pitchFamily="34" charset="0"/>
+                <a:ea typeface="Calibri" pitchFamily="34" charset="-122"/>
+                <a:cs typeface="Calibri" pitchFamily="34" charset="-120"/>
+              </a:rPr>
+              <a:t>THE LEGACY</a:t>
+            </a:r>
+            <a:endParaRPr lang="en-US" sz="900" dirty="0"/>
+          </a:p>
+        </p:txBody>
       </p:sp>
       <p:sp>
         <p:nvSpPr>
           <p:cNvPr id="5" name="Shape 3"/>
-          <p:cNvSpPr/>
-          <p:nvPr/>
-        </p:nvSpPr>
-        <p:spPr>
-          <a:xfrm>
-            <a:off x="8594263" y="411480"/>
-            <a:ext cx="164592" cy="164592"/>
-          </a:xfrm>
-          <a:prstGeom prst="ellipse">
-            <a:avLst/>
-          </a:prstGeom>
-          <a:solidFill>
-            <a:srgbClr val="C08A2E">
-              <a:alpha val="35000"/>
-            </a:srgbClr>
-          </a:solidFill>
-          <a:ln/>
-        </p:spPr>
-      </p:sp>
-      <p:sp>
-        <p:nvSpPr>
-          <p:cNvPr id="6" name="Text 4"/>
-          <p:cNvSpPr/>
-          <p:nvPr/>
-        </p:nvSpPr>
-        <p:spPr>
-          <a:xfrm>
-            <a:off x="8028432" y="658368"/>
-            <a:ext cx="914400" cy="201168"/>
-          </a:xfrm>
-          <a:prstGeom prst="rect">
-            <a:avLst/>
-          </a:prstGeom>
-          <a:noFill/>
-          <a:ln/>
-        </p:spPr>
-        <p:txBody>
-          <a:bodyPr wrap="square" rtlCol="0" anchor="ctr"/>
-          <a:lstStyle/>
-          <a:p>
-            <a:pPr algn="ctr" indent="0" marL="0">
-              <a:buNone/>
-            </a:pPr>
-            <a:r>
-              <a:rPr lang="en-US" sz="900" b="1" spc="200" kern="0" dirty="0">
-                <a:solidFill>
-                  <a:srgbClr val="1F3A4D"/>
-                </a:solidFill>
-                <a:latin typeface="Calibri" pitchFamily="34" charset="0"/>
-                <a:ea typeface="Calibri" pitchFamily="34" charset="-122"/>
-                <a:cs typeface="Calibri" pitchFamily="34" charset="-120"/>
-              </a:rPr>
-              <a:t>I</a:t>
-            </a:r>
-            <a:endParaRPr lang="en-US" sz="900" dirty="0"/>
-          </a:p>
-        </p:txBody>
-      </p:sp>
-      <p:sp>
-        <p:nvSpPr>
-          <p:cNvPr id="7" name="Shape 5"/>
           <p:cNvSpPr/>
           <p:nvPr/>
         </p:nvSpPr>
@@ -8360,7 +8198,7 @@
       </p:sp>
       <p:sp>
         <p:nvSpPr>
-          <p:cNvPr id="8" name="Text 6"/>
+          <p:cNvPr id="6" name="Text 4"/>
           <p:cNvSpPr/>
           <p:nvPr/>
         </p:nvSpPr>
@@ -8399,7 +8237,7 @@
       </p:sp>
       <p:sp>
         <p:nvSpPr>
-          <p:cNvPr id="9" name="Text 7"/>
+          <p:cNvPr id="7" name="Text 5"/>
           <p:cNvSpPr/>
           <p:nvPr/>
         </p:nvSpPr>
@@ -8461,7 +8299,7 @@
       </p:sp>
       <p:sp>
         <p:nvSpPr>
-          <p:cNvPr id="10" name="Shape 8"/>
+          <p:cNvPr id="8" name="Shape 6"/>
           <p:cNvSpPr/>
           <p:nvPr/>
         </p:nvSpPr>
@@ -8483,7 +8321,7 @@
       </p:sp>
       <p:sp>
         <p:nvSpPr>
-          <p:cNvPr id="11" name="Text 9"/>
+          <p:cNvPr id="9" name="Text 7"/>
           <p:cNvSpPr/>
           <p:nvPr/>
         </p:nvSpPr>
@@ -8522,7 +8360,7 @@
       </p:sp>
       <p:sp>
         <p:nvSpPr>
-          <p:cNvPr id="12" name="Text 10"/>
+          <p:cNvPr id="10" name="Text 8"/>
           <p:cNvSpPr/>
           <p:nvPr/>
         </p:nvSpPr>
@@ -8584,7 +8422,7 @@
       </p:sp>
       <p:sp>
         <p:nvSpPr>
-          <p:cNvPr id="13" name="Shape 11"/>
+          <p:cNvPr id="11" name="Shape 9"/>
           <p:cNvSpPr/>
           <p:nvPr/>
         </p:nvSpPr>
@@ -8606,7 +8444,7 @@
       </p:sp>
       <p:sp>
         <p:nvSpPr>
-          <p:cNvPr id="14" name="Text 12"/>
+          <p:cNvPr id="12" name="Text 10"/>
           <p:cNvSpPr/>
           <p:nvPr/>
         </p:nvSpPr>
@@ -8645,7 +8483,7 @@
       </p:sp>
       <p:sp>
         <p:nvSpPr>
-          <p:cNvPr id="15" name="Text 13"/>
+          <p:cNvPr id="13" name="Text 11"/>
           <p:cNvSpPr/>
           <p:nvPr/>
         </p:nvSpPr>
@@ -8707,7 +8545,7 @@
       </p:sp>
       <p:sp>
         <p:nvSpPr>
-          <p:cNvPr id="16" name="Text 14"/>
+          <p:cNvPr id="14" name="Text 12"/>
           <p:cNvSpPr/>
           <p:nvPr/>
         </p:nvSpPr>
